--- a/docs/pptx/carbo/jx-carbo-linsubhr-sens-anemia3.pptx
+++ b/docs/pptx/carbo/jx-carbo-linsubhr-sens-anemia3.pptx
@@ -5339,7 +5339,7 @@
           <p:spPr>
             <a:xfrm>
               <a:off x="817517" y="1896563"/>
-              <a:ext cx="6169365" cy="82021"/>
+              <a:ext cx="6833128" cy="82021"/>
             </a:xfrm>
             <a:prstGeom prst="rect">
               <a:avLst/>
@@ -5371,7 +5371,7 @@
                   <a:latin typeface="Helvetica"/>
                   <a:cs typeface="Helvetica"/>
                 </a:rPr>
-                <a:t>subHR per 0.1 ratio decline: 1.26 (1.08-1.48), p = 0.003  |  per IQR decline (Δ = 0.28): 1.92 (1.24-2.98)  |  IQR: [0.70, 0.98]</a:t>
+                <a:t>subHR per 0.1 ratio decline: 1.26 (1.08-1.48), p_Bonf = 0.020 (n = 6)  |  per IQR decline (Δ = 0.28): 1.92 (1.24-2.98)  |  IQR: [0.70, 0.98]</a:t>
               </a:r>
             </a:p>
           </p:txBody>

--- a/docs/pptx/carbo/jx-carbo-linsubhr-sens-anemia3.pptx
+++ b/docs/pptx/carbo/jx-carbo-linsubhr-sens-anemia3.pptx
@@ -5062,8 +5062,8 @@
           </p:nvSpPr>
           <p:spPr>
             <a:xfrm>
-              <a:off x="2155289" y="5785772"/>
-              <a:ext cx="155356" cy="80101"/>
+              <a:off x="2152181" y="5785772"/>
+              <a:ext cx="161574" cy="80101"/>
             </a:xfrm>
             <a:prstGeom prst="rect">
               <a:avLst/>
@@ -5095,7 +5095,7 @@
                   <a:latin typeface="Helvetica"/>
                   <a:cs typeface="Helvetica"/>
                 </a:rPr>
-                <a:t>0.6</a:t>
+                <a:t>-40</a:t>
               </a:r>
             </a:p>
           </p:txBody>
@@ -5108,8 +5108,8 @@
           </p:nvSpPr>
           <p:spPr>
             <a:xfrm>
-              <a:off x="3887213" y="5785772"/>
-              <a:ext cx="155356" cy="80101"/>
+              <a:off x="3884104" y="5785772"/>
+              <a:ext cx="161574" cy="80101"/>
             </a:xfrm>
             <a:prstGeom prst="rect">
               <a:avLst/>
@@ -5141,7 +5141,7 @@
                   <a:latin typeface="Helvetica"/>
                   <a:cs typeface="Helvetica"/>
                 </a:rPr>
-                <a:t>0.8</a:t>
+                <a:t>-20</a:t>
               </a:r>
             </a:p>
           </p:txBody>
@@ -5154,8 +5154,8 @@
           </p:nvSpPr>
           <p:spPr>
             <a:xfrm>
-              <a:off x="5619136" y="5785772"/>
-              <a:ext cx="155356" cy="80101"/>
+              <a:off x="5665725" y="5785772"/>
+              <a:ext cx="62179" cy="80101"/>
             </a:xfrm>
             <a:prstGeom prst="rect">
               <a:avLst/>
@@ -5187,7 +5187,7 @@
                   <a:latin typeface="Helvetica"/>
                   <a:cs typeface="Helvetica"/>
                 </a:rPr>
-                <a:t>1.0</a:t>
+                <a:t>0</a:t>
               </a:r>
             </a:p>
           </p:txBody>
@@ -5200,8 +5200,8 @@
           </p:nvSpPr>
           <p:spPr>
             <a:xfrm>
-              <a:off x="7351060" y="5785772"/>
-              <a:ext cx="155356" cy="80101"/>
+              <a:off x="7366559" y="5785772"/>
+              <a:ext cx="124358" cy="80101"/>
             </a:xfrm>
             <a:prstGeom prst="rect">
               <a:avLst/>
@@ -5233,7 +5233,7 @@
                   <a:latin typeface="Helvetica"/>
                   <a:cs typeface="Helvetica"/>
                 </a:rPr>
-                <a:t>1.2</a:t>
+                <a:t>20</a:t>
               </a:r>
             </a:p>
           </p:txBody>
@@ -5246,8 +5246,8 @@
           </p:nvSpPr>
           <p:spPr>
             <a:xfrm>
-              <a:off x="2691419" y="5925448"/>
-              <a:ext cx="4051889" cy="100218"/>
+              <a:off x="1561815" y="5925448"/>
+              <a:ext cx="6311097" cy="100218"/>
             </a:xfrm>
             <a:prstGeom prst="rect">
               <a:avLst/>
@@ -5279,7 +5279,7 @@
                   <a:latin typeface="Helvetica"/>
                   <a:cs typeface="Helvetica"/>
                 </a:rPr>
-                <a:t>Sensitivity eGFR Ratio (CKD-EPI 2012 CysC / CKD-EPI 2021 Cr)</a:t>
+                <a:t>Sensitivity eGFR Difference (%): 100 × (CKD-EPI 2012 CysC − CKD-EPI 2021 Cr) / CKD-EPI 2021 Cr</a:t>
               </a:r>
             </a:p>
           </p:txBody>
@@ -5339,7 +5339,7 @@
           <p:spPr>
             <a:xfrm>
               <a:off x="817517" y="1896563"/>
-              <a:ext cx="6833128" cy="82021"/>
+              <a:ext cx="6959864" cy="82021"/>
             </a:xfrm>
             <a:prstGeom prst="rect">
               <a:avLst/>
@@ -5371,7 +5371,7 @@
                   <a:latin typeface="Helvetica"/>
                   <a:cs typeface="Helvetica"/>
                 </a:rPr>
-                <a:t>subHR per 0.1 ratio decline: 1.26 (1.08-1.48), p_Bonf = 0.020 (n = 6)  |  per IQR decline (Δ = 0.28): 1.92 (1.24-2.98)  |  IQR: [0.70, 0.98]</a:t>
+                <a:t>subHR per 10 % decline: 1.26 (1.08-1.48), p_Bonf = 0.020 (n = 6)  |  per IQR decline (Δ = 28.0 %): 1.92 (1.24-2.98)  |  IQR: [-30.0, -2.0] %</a:t>
               </a:r>
             </a:p>
           </p:txBody>

--- a/docs/pptx/carbo/jx-carbo-linsubhr-sens-anemia3.pptx
+++ b/docs/pptx/carbo/jx-carbo-linsubhr-sens-anemia3.pptx
@@ -2265,34 +2265,26 @@
         </p:sp>
         <p:sp>
           <p:nvSpPr>
-            <p:cNvPr id="4" name="pl4"/>
+            <p:cNvPr id="4" name="rc4"/>
             <p:cNvSpPr/>
             <p:nvPr/>
           </p:nvSpPr>
           <p:spPr>
             <a:xfrm>
-              <a:off x="817517" y="5142518"/>
-              <a:ext cx="7799693" cy="0"/>
+              <a:off x="457200" y="1600200"/>
+              <a:ext cx="8229600" cy="4525962"/>
             </a:xfrm>
-            <a:custGeom>
+            <a:prstGeom prst="rect">
               <a:avLst/>
-              <a:pathLst>
-                <a:path w="7799693" h="0">
-                  <a:moveTo>
-                    <a:pt x="0" y="0"/>
-                  </a:moveTo>
-                  <a:lnTo>
-                    <a:pt x="7799693" y="0"/>
-                  </a:lnTo>
-                  <a:lnTo>
-                    <a:pt x="7799693" y="0"/>
-                  </a:lnTo>
-                </a:path>
-              </a:pathLst>
-            </a:custGeom>
-            <a:ln w="6775" cap="flat">
+            </a:prstGeom>
+            <a:solidFill>
+              <a:srgbClr val="FFFFFF">
+                <a:alpha val="100000"/>
+              </a:srgbClr>
+            </a:solidFill>
+            <a:ln w="13550" cap="rnd">
               <a:solidFill>
-                <a:srgbClr val="EBEBEB">
+                <a:srgbClr val="FFFFFF">
                   <a:alpha val="100000"/>
                 </a:srgbClr>
               </a:solidFill>
@@ -2314,21 +2306,21 @@
           </p:nvSpPr>
           <p:spPr>
             <a:xfrm>
-              <a:off x="817517" y="4313054"/>
-              <a:ext cx="7799693" cy="0"/>
+              <a:off x="887106" y="3250627"/>
+              <a:ext cx="7660515" cy="0"/>
             </a:xfrm>
             <a:custGeom>
               <a:avLst/>
               <a:pathLst>
-                <a:path w="7799693" h="0">
+                <a:path w="7660515" h="0">
                   <a:moveTo>
                     <a:pt x="0" y="0"/>
                   </a:moveTo>
                   <a:lnTo>
-                    <a:pt x="7799693" y="0"/>
-                  </a:lnTo>
-                  <a:lnTo>
-                    <a:pt x="7799693" y="0"/>
+                    <a:pt x="7660515" y="0"/>
+                  </a:lnTo>
+                  <a:lnTo>
+                    <a:pt x="7660515" y="0"/>
                   </a:lnTo>
                 </a:path>
               </a:pathLst>
@@ -2357,21 +2349,21 @@
           </p:nvSpPr>
           <p:spPr>
             <a:xfrm>
-              <a:off x="817517" y="3483591"/>
-              <a:ext cx="7799693" cy="0"/>
+              <a:off x="887106" y="2951293"/>
+              <a:ext cx="7660515" cy="0"/>
             </a:xfrm>
             <a:custGeom>
               <a:avLst/>
               <a:pathLst>
-                <a:path w="7799693" h="0">
+                <a:path w="7660515" h="0">
                   <a:moveTo>
                     <a:pt x="0" y="0"/>
                   </a:moveTo>
                   <a:lnTo>
-                    <a:pt x="7799693" y="0"/>
-                  </a:lnTo>
-                  <a:lnTo>
-                    <a:pt x="7799693" y="0"/>
+                    <a:pt x="7660515" y="0"/>
+                  </a:lnTo>
+                  <a:lnTo>
+                    <a:pt x="7660515" y="0"/>
                   </a:lnTo>
                 </a:path>
               </a:pathLst>
@@ -2400,21 +2392,21 @@
           </p:nvSpPr>
           <p:spPr>
             <a:xfrm>
-              <a:off x="817517" y="2654127"/>
-              <a:ext cx="7799693" cy="0"/>
+              <a:off x="887106" y="2651959"/>
+              <a:ext cx="7660515" cy="0"/>
             </a:xfrm>
             <a:custGeom>
               <a:avLst/>
               <a:pathLst>
-                <a:path w="7799693" h="0">
+                <a:path w="7660515" h="0">
                   <a:moveTo>
                     <a:pt x="0" y="0"/>
                   </a:moveTo>
                   <a:lnTo>
-                    <a:pt x="7799693" y="0"/>
-                  </a:lnTo>
-                  <a:lnTo>
-                    <a:pt x="7799693" y="0"/>
+                    <a:pt x="7660515" y="0"/>
+                  </a:lnTo>
+                  <a:lnTo>
+                    <a:pt x="7660515" y="0"/>
                   </a:lnTo>
                 </a:path>
               </a:pathLst>
@@ -2443,21 +2435,21 @@
           </p:nvSpPr>
           <p:spPr>
             <a:xfrm>
-              <a:off x="1367006" y="2073503"/>
-              <a:ext cx="0" cy="3649639"/>
+              <a:off x="887106" y="2352625"/>
+              <a:ext cx="7660515" cy="0"/>
             </a:xfrm>
             <a:custGeom>
               <a:avLst/>
               <a:pathLst>
-                <a:path w="0" h="3649639">
+                <a:path w="7660515" h="0">
                   <a:moveTo>
-                    <a:pt x="0" y="3649639"/>
+                    <a:pt x="0" y="0"/>
                   </a:moveTo>
                   <a:lnTo>
-                    <a:pt x="0" y="0"/>
-                  </a:lnTo>
-                  <a:lnTo>
-                    <a:pt x="0" y="0"/>
+                    <a:pt x="7660515" y="0"/>
+                  </a:lnTo>
+                  <a:lnTo>
+                    <a:pt x="7660515" y="0"/>
                   </a:lnTo>
                 </a:path>
               </a:pathLst>
@@ -2486,15 +2478,15 @@
           </p:nvSpPr>
           <p:spPr>
             <a:xfrm>
-              <a:off x="3098929" y="2073503"/>
-              <a:ext cx="0" cy="3649639"/>
+              <a:off x="1426790" y="2143092"/>
+              <a:ext cx="0" cy="1317069"/>
             </a:xfrm>
             <a:custGeom>
               <a:avLst/>
               <a:pathLst>
-                <a:path w="0" h="3649639">
+                <a:path w="0" h="1317069">
                   <a:moveTo>
-                    <a:pt x="0" y="3649639"/>
+                    <a:pt x="0" y="1317069"/>
                   </a:moveTo>
                   <a:lnTo>
                     <a:pt x="0" y="0"/>
@@ -2529,15 +2521,15 @@
           </p:nvSpPr>
           <p:spPr>
             <a:xfrm>
-              <a:off x="4830853" y="2073503"/>
-              <a:ext cx="0" cy="3649639"/>
+              <a:off x="3127809" y="2143092"/>
+              <a:ext cx="0" cy="1317069"/>
             </a:xfrm>
             <a:custGeom>
               <a:avLst/>
               <a:pathLst>
-                <a:path w="0" h="3649639">
+                <a:path w="0" h="1317069">
                   <a:moveTo>
-                    <a:pt x="0" y="3649639"/>
+                    <a:pt x="0" y="1317069"/>
                   </a:moveTo>
                   <a:lnTo>
                     <a:pt x="0" y="0"/>
@@ -2572,15 +2564,15 @@
           </p:nvSpPr>
           <p:spPr>
             <a:xfrm>
-              <a:off x="6562776" y="2073503"/>
-              <a:ext cx="0" cy="3649639"/>
+              <a:off x="4828828" y="2143092"/>
+              <a:ext cx="0" cy="1317069"/>
             </a:xfrm>
             <a:custGeom>
               <a:avLst/>
               <a:pathLst>
-                <a:path w="0" h="3649639">
+                <a:path w="0" h="1317069">
                   <a:moveTo>
-                    <a:pt x="0" y="3649639"/>
+                    <a:pt x="0" y="1317069"/>
                   </a:moveTo>
                   <a:lnTo>
                     <a:pt x="0" y="0"/>
@@ -2615,15 +2607,15 @@
           </p:nvSpPr>
           <p:spPr>
             <a:xfrm>
-              <a:off x="8294700" y="2073503"/>
-              <a:ext cx="0" cy="3649639"/>
+              <a:off x="6529847" y="2143092"/>
+              <a:ext cx="0" cy="1317069"/>
             </a:xfrm>
             <a:custGeom>
               <a:avLst/>
               <a:pathLst>
-                <a:path w="0" h="3649639">
+                <a:path w="0" h="1317069">
                   <a:moveTo>
-                    <a:pt x="0" y="3649639"/>
+                    <a:pt x="0" y="1317069"/>
                   </a:moveTo>
                   <a:lnTo>
                     <a:pt x="0" y="0"/>
@@ -2658,26 +2650,26 @@
           </p:nvSpPr>
           <p:spPr>
             <a:xfrm>
-              <a:off x="817517" y="5557249"/>
-              <a:ext cx="7799693" cy="0"/>
+              <a:off x="8230866" y="2143092"/>
+              <a:ext cx="0" cy="1317069"/>
             </a:xfrm>
             <a:custGeom>
               <a:avLst/>
               <a:pathLst>
-                <a:path w="7799693" h="0">
+                <a:path w="0" h="1317069">
                   <a:moveTo>
+                    <a:pt x="0" y="1317069"/>
+                  </a:moveTo>
+                  <a:lnTo>
                     <a:pt x="0" y="0"/>
-                  </a:moveTo>
-                  <a:lnTo>
-                    <a:pt x="7799693" y="0"/>
-                  </a:lnTo>
-                  <a:lnTo>
-                    <a:pt x="7799693" y="0"/>
+                  </a:lnTo>
+                  <a:lnTo>
+                    <a:pt x="0" y="0"/>
                   </a:lnTo>
                 </a:path>
               </a:pathLst>
             </a:custGeom>
-            <a:ln w="13550" cap="flat">
+            <a:ln w="6775" cap="flat">
               <a:solidFill>
                 <a:srgbClr val="EBEBEB">
                   <a:alpha val="100000"/>
@@ -2701,21 +2693,21 @@
           </p:nvSpPr>
           <p:spPr>
             <a:xfrm>
-              <a:off x="817517" y="4727786"/>
-              <a:ext cx="7799693" cy="0"/>
+              <a:off x="887106" y="3400294"/>
+              <a:ext cx="7660515" cy="0"/>
             </a:xfrm>
             <a:custGeom>
               <a:avLst/>
               <a:pathLst>
-                <a:path w="7799693" h="0">
+                <a:path w="7660515" h="0">
                   <a:moveTo>
                     <a:pt x="0" y="0"/>
                   </a:moveTo>
                   <a:lnTo>
-                    <a:pt x="7799693" y="0"/>
-                  </a:lnTo>
-                  <a:lnTo>
-                    <a:pt x="7799693" y="0"/>
+                    <a:pt x="7660515" y="0"/>
+                  </a:lnTo>
+                  <a:lnTo>
+                    <a:pt x="7660515" y="0"/>
                   </a:lnTo>
                 </a:path>
               </a:pathLst>
@@ -2744,21 +2736,21 @@
           </p:nvSpPr>
           <p:spPr>
             <a:xfrm>
-              <a:off x="817517" y="3898322"/>
-              <a:ext cx="7799693" cy="0"/>
+              <a:off x="887106" y="3100960"/>
+              <a:ext cx="7660515" cy="0"/>
             </a:xfrm>
             <a:custGeom>
               <a:avLst/>
               <a:pathLst>
-                <a:path w="7799693" h="0">
+                <a:path w="7660515" h="0">
                   <a:moveTo>
                     <a:pt x="0" y="0"/>
                   </a:moveTo>
                   <a:lnTo>
-                    <a:pt x="7799693" y="0"/>
-                  </a:lnTo>
-                  <a:lnTo>
-                    <a:pt x="7799693" y="0"/>
+                    <a:pt x="7660515" y="0"/>
+                  </a:lnTo>
+                  <a:lnTo>
+                    <a:pt x="7660515" y="0"/>
                   </a:lnTo>
                 </a:path>
               </a:pathLst>
@@ -2787,21 +2779,21 @@
           </p:nvSpPr>
           <p:spPr>
             <a:xfrm>
-              <a:off x="817517" y="3068859"/>
-              <a:ext cx="7799693" cy="0"/>
+              <a:off x="887106" y="2801626"/>
+              <a:ext cx="7660515" cy="0"/>
             </a:xfrm>
             <a:custGeom>
               <a:avLst/>
               <a:pathLst>
-                <a:path w="7799693" h="0">
+                <a:path w="7660515" h="0">
                   <a:moveTo>
                     <a:pt x="0" y="0"/>
                   </a:moveTo>
                   <a:lnTo>
-                    <a:pt x="7799693" y="0"/>
-                  </a:lnTo>
-                  <a:lnTo>
-                    <a:pt x="7799693" y="0"/>
+                    <a:pt x="7660515" y="0"/>
+                  </a:lnTo>
+                  <a:lnTo>
+                    <a:pt x="7660515" y="0"/>
                   </a:lnTo>
                 </a:path>
               </a:pathLst>
@@ -2830,21 +2822,21 @@
           </p:nvSpPr>
           <p:spPr>
             <a:xfrm>
-              <a:off x="817517" y="2239395"/>
-              <a:ext cx="7799693" cy="0"/>
+              <a:off x="887106" y="2502292"/>
+              <a:ext cx="7660515" cy="0"/>
             </a:xfrm>
             <a:custGeom>
               <a:avLst/>
               <a:pathLst>
-                <a:path w="7799693" h="0">
+                <a:path w="7660515" h="0">
                   <a:moveTo>
                     <a:pt x="0" y="0"/>
                   </a:moveTo>
                   <a:lnTo>
-                    <a:pt x="7799693" y="0"/>
-                  </a:lnTo>
-                  <a:lnTo>
-                    <a:pt x="7799693" y="0"/>
+                    <a:pt x="7660515" y="0"/>
+                  </a:lnTo>
+                  <a:lnTo>
+                    <a:pt x="7660515" y="0"/>
                   </a:lnTo>
                 </a:path>
               </a:pathLst>
@@ -2873,21 +2865,21 @@
           </p:nvSpPr>
           <p:spPr>
             <a:xfrm>
-              <a:off x="2232968" y="2073503"/>
-              <a:ext cx="0" cy="3649639"/>
+              <a:off x="887106" y="2202958"/>
+              <a:ext cx="7660515" cy="0"/>
             </a:xfrm>
             <a:custGeom>
               <a:avLst/>
               <a:pathLst>
-                <a:path w="0" h="3649639">
+                <a:path w="7660515" h="0">
                   <a:moveTo>
-                    <a:pt x="0" y="3649639"/>
+                    <a:pt x="0" y="0"/>
                   </a:moveTo>
                   <a:lnTo>
-                    <a:pt x="0" y="0"/>
-                  </a:lnTo>
-                  <a:lnTo>
-                    <a:pt x="0" y="0"/>
+                    <a:pt x="7660515" y="0"/>
+                  </a:lnTo>
+                  <a:lnTo>
+                    <a:pt x="7660515" y="0"/>
                   </a:lnTo>
                 </a:path>
               </a:pathLst>
@@ -2916,15 +2908,15 @@
           </p:nvSpPr>
           <p:spPr>
             <a:xfrm>
-              <a:off x="3964891" y="2073503"/>
-              <a:ext cx="0" cy="3649639"/>
+              <a:off x="2277299" y="2143092"/>
+              <a:ext cx="0" cy="1317069"/>
             </a:xfrm>
             <a:custGeom>
               <a:avLst/>
               <a:pathLst>
-                <a:path w="0" h="3649639">
+                <a:path w="0" h="1317069">
                   <a:moveTo>
-                    <a:pt x="0" y="3649639"/>
+                    <a:pt x="0" y="1317069"/>
                   </a:moveTo>
                   <a:lnTo>
                     <a:pt x="0" y="0"/>
@@ -2959,15 +2951,15 @@
           </p:nvSpPr>
           <p:spPr>
             <a:xfrm>
-              <a:off x="5696815" y="2073503"/>
-              <a:ext cx="0" cy="3649639"/>
+              <a:off x="3978318" y="2143092"/>
+              <a:ext cx="0" cy="1317069"/>
             </a:xfrm>
             <a:custGeom>
               <a:avLst/>
               <a:pathLst>
-                <a:path w="0" h="3649639">
+                <a:path w="0" h="1317069">
                   <a:moveTo>
-                    <a:pt x="0" y="3649639"/>
+                    <a:pt x="0" y="1317069"/>
                   </a:moveTo>
                   <a:lnTo>
                     <a:pt x="0" y="0"/>
@@ -3002,15 +2994,15 @@
           </p:nvSpPr>
           <p:spPr>
             <a:xfrm>
-              <a:off x="7428738" y="2073503"/>
-              <a:ext cx="0" cy="3649639"/>
+              <a:off x="5679337" y="2143092"/>
+              <a:ext cx="0" cy="1317069"/>
             </a:xfrm>
             <a:custGeom>
               <a:avLst/>
               <a:pathLst>
-                <a:path w="0" h="3649639">
+                <a:path w="0" h="1317069">
                   <a:moveTo>
-                    <a:pt x="0" y="3649639"/>
+                    <a:pt x="0" y="1317069"/>
                   </a:moveTo>
                   <a:lnTo>
                     <a:pt x="0" y="0"/>
@@ -3039,618 +3031,661 @@
         </p:sp>
         <p:sp>
           <p:nvSpPr>
-            <p:cNvPr id="22" name="pg22"/>
+            <p:cNvPr id="22" name="pl22"/>
             <p:cNvSpPr/>
             <p:nvPr/>
           </p:nvSpPr>
           <p:spPr>
             <a:xfrm>
-              <a:off x="1172049" y="2192050"/>
-              <a:ext cx="7090630" cy="3226672"/>
+              <a:off x="7380356" y="2143092"/>
+              <a:ext cx="0" cy="1317069"/>
             </a:xfrm>
             <a:custGeom>
               <a:avLst/>
               <a:pathLst>
-                <a:path w="7090630" h="3226672">
+                <a:path w="0" h="1317069">
+                  <a:moveTo>
+                    <a:pt x="0" y="1317069"/>
+                  </a:moveTo>
+                  <a:lnTo>
+                    <a:pt x="0" y="0"/>
+                  </a:lnTo>
+                  <a:lnTo>
+                    <a:pt x="0" y="0"/>
+                  </a:lnTo>
+                </a:path>
+              </a:pathLst>
+            </a:custGeom>
+            <a:ln w="13550" cap="flat">
+              <a:solidFill>
+                <a:srgbClr val="EBEBEB">
+                  <a:alpha val="100000"/>
+                </a:srgbClr>
+              </a:solidFill>
+              <a:prstDash val="solid"/>
+              <a:round/>
+            </a:ln>
+          </p:spPr>
+          <p:txBody>
+            <a:bodyPr/>
+            <a:lstStyle/>
+            <a:p/>
+          </p:txBody>
+        </p:sp>
+        <p:sp>
+          <p:nvSpPr>
+            <p:cNvPr id="23" name="pg23"/>
+            <p:cNvSpPr/>
+            <p:nvPr/>
+          </p:nvSpPr>
+          <p:spPr>
+            <a:xfrm>
+              <a:off x="1235312" y="2185872"/>
+              <a:ext cx="6964104" cy="1164430"/>
+            </a:xfrm>
+            <a:custGeom>
+              <a:avLst/>
+              <a:pathLst>
+                <a:path w="6964104" h="1164430">
                   <a:moveTo>
                     <a:pt x="0" y="0"/>
                   </a:moveTo>
                   <a:lnTo>
-                    <a:pt x="71622" y="106711"/>
-                  </a:lnTo>
-                  <a:lnTo>
-                    <a:pt x="143245" y="210039"/>
-                  </a:lnTo>
-                  <a:lnTo>
-                    <a:pt x="214867" y="310090"/>
-                  </a:lnTo>
-                  <a:lnTo>
-                    <a:pt x="286490" y="406969"/>
-                  </a:lnTo>
-                  <a:lnTo>
-                    <a:pt x="358112" y="500775"/>
-                  </a:lnTo>
-                  <a:lnTo>
-                    <a:pt x="429735" y="591607"/>
-                  </a:lnTo>
-                  <a:lnTo>
-                    <a:pt x="501357" y="679559"/>
-                  </a:lnTo>
-                  <a:lnTo>
-                    <a:pt x="572980" y="764721"/>
-                  </a:lnTo>
-                  <a:lnTo>
-                    <a:pt x="644602" y="847183"/>
-                  </a:lnTo>
-                  <a:lnTo>
-                    <a:pt x="716225" y="927031"/>
-                  </a:lnTo>
-                  <a:lnTo>
-                    <a:pt x="787847" y="1004346"/>
-                  </a:lnTo>
-                  <a:lnTo>
-                    <a:pt x="859470" y="1079209"/>
-                  </a:lnTo>
-                  <a:lnTo>
-                    <a:pt x="931092" y="1151699"/>
-                  </a:lnTo>
-                  <a:lnTo>
-                    <a:pt x="1002715" y="1221890"/>
-                  </a:lnTo>
-                  <a:lnTo>
-                    <a:pt x="1074337" y="1289855"/>
-                  </a:lnTo>
-                  <a:lnTo>
-                    <a:pt x="1145960" y="1355665"/>
-                  </a:lnTo>
-                  <a:lnTo>
-                    <a:pt x="1217582" y="1419388"/>
-                  </a:lnTo>
-                  <a:lnTo>
-                    <a:pt x="1289205" y="1481090"/>
-                  </a:lnTo>
-                  <a:lnTo>
-                    <a:pt x="1360827" y="1540836"/>
-                  </a:lnTo>
-                  <a:lnTo>
-                    <a:pt x="1432450" y="1598687"/>
-                  </a:lnTo>
-                  <a:lnTo>
-                    <a:pt x="1504073" y="1654704"/>
-                  </a:lnTo>
-                  <a:lnTo>
-                    <a:pt x="1575695" y="1708944"/>
-                  </a:lnTo>
-                  <a:lnTo>
-                    <a:pt x="1647318" y="1761465"/>
-                  </a:lnTo>
-                  <a:lnTo>
-                    <a:pt x="1718940" y="1812320"/>
-                  </a:lnTo>
-                  <a:lnTo>
-                    <a:pt x="1790563" y="1861562"/>
-                  </a:lnTo>
-                  <a:lnTo>
-                    <a:pt x="1862185" y="1909243"/>
-                  </a:lnTo>
-                  <a:lnTo>
-                    <a:pt x="1933808" y="1955412"/>
-                  </a:lnTo>
-                  <a:lnTo>
-                    <a:pt x="2005430" y="2000117"/>
-                  </a:lnTo>
-                  <a:lnTo>
-                    <a:pt x="2077053" y="2043404"/>
-                  </a:lnTo>
-                  <a:lnTo>
-                    <a:pt x="2148675" y="2085319"/>
-                  </a:lnTo>
-                  <a:lnTo>
-                    <a:pt x="2220298" y="2125904"/>
-                  </a:lnTo>
-                  <a:lnTo>
-                    <a:pt x="2291920" y="2165202"/>
-                  </a:lnTo>
-                  <a:lnTo>
-                    <a:pt x="2363543" y="2203255"/>
-                  </a:lnTo>
-                  <a:lnTo>
-                    <a:pt x="2435165" y="2240100"/>
-                  </a:lnTo>
-                  <a:lnTo>
-                    <a:pt x="2506788" y="2275778"/>
-                  </a:lnTo>
-                  <a:lnTo>
-                    <a:pt x="2578410" y="2310324"/>
-                  </a:lnTo>
-                  <a:lnTo>
-                    <a:pt x="2650033" y="2343774"/>
-                  </a:lnTo>
-                  <a:lnTo>
-                    <a:pt x="2721655" y="2376164"/>
-                  </a:lnTo>
-                  <a:lnTo>
-                    <a:pt x="2793278" y="2407527"/>
-                  </a:lnTo>
-                  <a:lnTo>
-                    <a:pt x="2864901" y="2437895"/>
-                  </a:lnTo>
-                  <a:lnTo>
-                    <a:pt x="2936523" y="2467300"/>
-                  </a:lnTo>
-                  <a:lnTo>
-                    <a:pt x="3008146" y="2495773"/>
-                  </a:lnTo>
-                  <a:lnTo>
-                    <a:pt x="3079768" y="2523342"/>
-                  </a:lnTo>
-                  <a:lnTo>
-                    <a:pt x="3151391" y="2538605"/>
-                  </a:lnTo>
-                  <a:lnTo>
-                    <a:pt x="3223013" y="2543896"/>
-                  </a:lnTo>
-                  <a:lnTo>
-                    <a:pt x="3294636" y="2549152"/>
-                  </a:lnTo>
-                  <a:lnTo>
-                    <a:pt x="3366258" y="2554375"/>
-                  </a:lnTo>
-                  <a:lnTo>
-                    <a:pt x="3437881" y="2559565"/>
-                  </a:lnTo>
-                  <a:lnTo>
-                    <a:pt x="3509503" y="2564721"/>
-                  </a:lnTo>
-                  <a:lnTo>
-                    <a:pt x="3581126" y="2569844"/>
-                  </a:lnTo>
-                  <a:lnTo>
-                    <a:pt x="3652748" y="2574934"/>
-                  </a:lnTo>
-                  <a:lnTo>
-                    <a:pt x="3724371" y="2579992"/>
-                  </a:lnTo>
-                  <a:lnTo>
-                    <a:pt x="3795993" y="2585018"/>
-                  </a:lnTo>
-                  <a:lnTo>
-                    <a:pt x="3867616" y="2590011"/>
-                  </a:lnTo>
-                  <a:lnTo>
-                    <a:pt x="3939238" y="2594972"/>
-                  </a:lnTo>
-                  <a:lnTo>
-                    <a:pt x="4010861" y="2599902"/>
-                  </a:lnTo>
-                  <a:lnTo>
-                    <a:pt x="4082483" y="2604800"/>
-                  </a:lnTo>
-                  <a:lnTo>
-                    <a:pt x="4154106" y="2609667"/>
-                  </a:lnTo>
-                  <a:lnTo>
-                    <a:pt x="4225729" y="2614502"/>
-                  </a:lnTo>
-                  <a:lnTo>
-                    <a:pt x="4297351" y="2619307"/>
-                  </a:lnTo>
-                  <a:lnTo>
-                    <a:pt x="4368974" y="2624081"/>
-                  </a:lnTo>
-                  <a:lnTo>
-                    <a:pt x="4440596" y="2628824"/>
-                  </a:lnTo>
-                  <a:lnTo>
-                    <a:pt x="4512219" y="2633537"/>
-                  </a:lnTo>
-                  <a:lnTo>
-                    <a:pt x="4583841" y="2638220"/>
-                  </a:lnTo>
-                  <a:lnTo>
-                    <a:pt x="4655464" y="2642873"/>
-                  </a:lnTo>
-                  <a:lnTo>
-                    <a:pt x="4727086" y="2647496"/>
-                  </a:lnTo>
-                  <a:lnTo>
-                    <a:pt x="4798709" y="2652089"/>
-                  </a:lnTo>
-                  <a:lnTo>
-                    <a:pt x="4870331" y="2656653"/>
-                  </a:lnTo>
-                  <a:lnTo>
-                    <a:pt x="4941954" y="2661188"/>
-                  </a:lnTo>
-                  <a:lnTo>
-                    <a:pt x="5013576" y="2665694"/>
-                  </a:lnTo>
-                  <a:lnTo>
-                    <a:pt x="5085199" y="2670171"/>
-                  </a:lnTo>
-                  <a:lnTo>
-                    <a:pt x="5156821" y="2674619"/>
-                  </a:lnTo>
-                  <a:lnTo>
-                    <a:pt x="5228444" y="2679039"/>
-                  </a:lnTo>
-                  <a:lnTo>
-                    <a:pt x="5300066" y="2683430"/>
-                  </a:lnTo>
-                  <a:lnTo>
-                    <a:pt x="5371689" y="2687794"/>
-                  </a:lnTo>
-                  <a:lnTo>
-                    <a:pt x="5443311" y="2692129"/>
-                  </a:lnTo>
-                  <a:lnTo>
-                    <a:pt x="5514934" y="2696437"/>
-                  </a:lnTo>
-                  <a:lnTo>
-                    <a:pt x="5586557" y="2700717"/>
-                  </a:lnTo>
-                  <a:lnTo>
-                    <a:pt x="5658179" y="2704970"/>
-                  </a:lnTo>
-                  <a:lnTo>
-                    <a:pt x="5729802" y="2709196"/>
-                  </a:lnTo>
-                  <a:lnTo>
-                    <a:pt x="5801424" y="2713394"/>
-                  </a:lnTo>
-                  <a:lnTo>
-                    <a:pt x="5873047" y="2717566"/>
-                  </a:lnTo>
-                  <a:lnTo>
-                    <a:pt x="5944669" y="2721711"/>
-                  </a:lnTo>
-                  <a:lnTo>
-                    <a:pt x="6016292" y="2725829"/>
-                  </a:lnTo>
-                  <a:lnTo>
-                    <a:pt x="6087914" y="2729922"/>
-                  </a:lnTo>
-                  <a:lnTo>
-                    <a:pt x="6159537" y="2733987"/>
-                  </a:lnTo>
-                  <a:lnTo>
-                    <a:pt x="6231159" y="2738027"/>
-                  </a:lnTo>
-                  <a:lnTo>
-                    <a:pt x="6302782" y="2742041"/>
-                  </a:lnTo>
-                  <a:lnTo>
-                    <a:pt x="6374404" y="2746030"/>
-                  </a:lnTo>
-                  <a:lnTo>
-                    <a:pt x="6446027" y="2749992"/>
-                  </a:lnTo>
-                  <a:lnTo>
-                    <a:pt x="6517649" y="2753930"/>
-                  </a:lnTo>
-                  <a:lnTo>
-                    <a:pt x="6589272" y="2757842"/>
-                  </a:lnTo>
-                  <a:lnTo>
-                    <a:pt x="6660894" y="2761729"/>
-                  </a:lnTo>
-                  <a:lnTo>
-                    <a:pt x="6732517" y="2765592"/>
-                  </a:lnTo>
-                  <a:lnTo>
-                    <a:pt x="6804139" y="2769429"/>
-                  </a:lnTo>
-                  <a:lnTo>
-                    <a:pt x="6875762" y="2773242"/>
-                  </a:lnTo>
-                  <a:lnTo>
-                    <a:pt x="6947385" y="2777031"/>
-                  </a:lnTo>
-                  <a:lnTo>
-                    <a:pt x="7019007" y="2780795"/>
-                  </a:lnTo>
-                  <a:lnTo>
-                    <a:pt x="7090630" y="2784536"/>
-                  </a:lnTo>
-                  <a:lnTo>
-                    <a:pt x="7090630" y="3226672"/>
-                  </a:lnTo>
-                  <a:lnTo>
-                    <a:pt x="7019007" y="3222136"/>
-                  </a:lnTo>
-                  <a:lnTo>
-                    <a:pt x="6947385" y="3217451"/>
-                  </a:lnTo>
-                  <a:lnTo>
-                    <a:pt x="6875762" y="3212612"/>
-                  </a:lnTo>
-                  <a:lnTo>
-                    <a:pt x="6804139" y="3207615"/>
-                  </a:lnTo>
-                  <a:lnTo>
-                    <a:pt x="6732517" y="3202454"/>
-                  </a:lnTo>
-                  <a:lnTo>
-                    <a:pt x="6660894" y="3197124"/>
-                  </a:lnTo>
-                  <a:lnTo>
-                    <a:pt x="6589272" y="3191620"/>
-                  </a:lnTo>
-                  <a:lnTo>
-                    <a:pt x="6517649" y="3185936"/>
-                  </a:lnTo>
-                  <a:lnTo>
-                    <a:pt x="6446027" y="3180065"/>
-                  </a:lnTo>
-                  <a:lnTo>
-                    <a:pt x="6374404" y="3174002"/>
-                  </a:lnTo>
-                  <a:lnTo>
-                    <a:pt x="6302782" y="3167741"/>
-                  </a:lnTo>
-                  <a:lnTo>
-                    <a:pt x="6231159" y="3161274"/>
-                  </a:lnTo>
-                  <a:lnTo>
-                    <a:pt x="6159537" y="3154596"/>
-                  </a:lnTo>
-                  <a:lnTo>
-                    <a:pt x="6087914" y="3147699"/>
-                  </a:lnTo>
-                  <a:lnTo>
-                    <a:pt x="6016292" y="3140576"/>
-                  </a:lnTo>
-                  <a:lnTo>
-                    <a:pt x="5944669" y="3133220"/>
-                  </a:lnTo>
-                  <a:lnTo>
-                    <a:pt x="5873047" y="3125623"/>
-                  </a:lnTo>
-                  <a:lnTo>
-                    <a:pt x="5801424" y="3117777"/>
-                  </a:lnTo>
-                  <a:lnTo>
-                    <a:pt x="5729802" y="3109674"/>
-                  </a:lnTo>
-                  <a:lnTo>
-                    <a:pt x="5658179" y="3101306"/>
-                  </a:lnTo>
-                  <a:lnTo>
-                    <a:pt x="5586557" y="3092664"/>
-                  </a:lnTo>
-                  <a:lnTo>
-                    <a:pt x="5514934" y="3083738"/>
-                  </a:lnTo>
-                  <a:lnTo>
-                    <a:pt x="5443311" y="3074521"/>
-                  </a:lnTo>
-                  <a:lnTo>
-                    <a:pt x="5371689" y="3065002"/>
-                  </a:lnTo>
-                  <a:lnTo>
-                    <a:pt x="5300066" y="3055170"/>
-                  </a:lnTo>
-                  <a:lnTo>
-                    <a:pt x="5228444" y="3045017"/>
-                  </a:lnTo>
-                  <a:lnTo>
-                    <a:pt x="5156821" y="3034532"/>
-                  </a:lnTo>
-                  <a:lnTo>
-                    <a:pt x="5085199" y="3023703"/>
-                  </a:lnTo>
-                  <a:lnTo>
-                    <a:pt x="5013576" y="3012519"/>
-                  </a:lnTo>
-                  <a:lnTo>
-                    <a:pt x="4941954" y="3000969"/>
-                  </a:lnTo>
-                  <a:lnTo>
-                    <a:pt x="4870331" y="2989041"/>
-                  </a:lnTo>
-                  <a:lnTo>
-                    <a:pt x="4798709" y="2976722"/>
-                  </a:lnTo>
-                  <a:lnTo>
-                    <a:pt x="4727086" y="2964000"/>
-                  </a:lnTo>
-                  <a:lnTo>
-                    <a:pt x="4655464" y="2950861"/>
-                  </a:lnTo>
-                  <a:lnTo>
-                    <a:pt x="4583841" y="2937292"/>
-                  </a:lnTo>
-                  <a:lnTo>
-                    <a:pt x="4512219" y="2923279"/>
-                  </a:lnTo>
-                  <a:lnTo>
-                    <a:pt x="4440596" y="2908807"/>
-                  </a:lnTo>
-                  <a:lnTo>
-                    <a:pt x="4368974" y="2893860"/>
-                  </a:lnTo>
-                  <a:lnTo>
-                    <a:pt x="4297351" y="2878424"/>
-                  </a:lnTo>
-                  <a:lnTo>
-                    <a:pt x="4225729" y="2862483"/>
-                  </a:lnTo>
-                  <a:lnTo>
-                    <a:pt x="4154106" y="2846020"/>
-                  </a:lnTo>
-                  <a:lnTo>
-                    <a:pt x="4082483" y="2829017"/>
-                  </a:lnTo>
-                  <a:lnTo>
-                    <a:pt x="4010861" y="2811458"/>
-                  </a:lnTo>
-                  <a:lnTo>
-                    <a:pt x="3939238" y="2793323"/>
-                  </a:lnTo>
-                  <a:lnTo>
-                    <a:pt x="3867616" y="2774595"/>
-                  </a:lnTo>
-                  <a:lnTo>
-                    <a:pt x="3795993" y="2755254"/>
-                  </a:lnTo>
-                  <a:lnTo>
-                    <a:pt x="3724371" y="2735279"/>
-                  </a:lnTo>
-                  <a:lnTo>
-                    <a:pt x="3652748" y="2714649"/>
-                  </a:lnTo>
-                  <a:lnTo>
-                    <a:pt x="3581126" y="2693345"/>
-                  </a:lnTo>
-                  <a:lnTo>
-                    <a:pt x="3509503" y="2671342"/>
-                  </a:lnTo>
-                  <a:lnTo>
-                    <a:pt x="3437881" y="2648619"/>
-                  </a:lnTo>
-                  <a:lnTo>
-                    <a:pt x="3366258" y="2625152"/>
-                  </a:lnTo>
-                  <a:lnTo>
-                    <a:pt x="3294636" y="2600916"/>
-                  </a:lnTo>
-                  <a:lnTo>
-                    <a:pt x="3223013" y="2575887"/>
-                  </a:lnTo>
-                  <a:lnTo>
-                    <a:pt x="3151391" y="2550038"/>
-                  </a:lnTo>
-                  <a:lnTo>
-                    <a:pt x="3079768" y="2533281"/>
-                  </a:lnTo>
-                  <a:lnTo>
-                    <a:pt x="3008146" y="2527922"/>
-                  </a:lnTo>
-                  <a:lnTo>
-                    <a:pt x="2936523" y="2522529"/>
-                  </a:lnTo>
-                  <a:lnTo>
-                    <a:pt x="2864901" y="2517101"/>
-                  </a:lnTo>
-                  <a:lnTo>
-                    <a:pt x="2793278" y="2511638"/>
-                  </a:lnTo>
-                  <a:lnTo>
-                    <a:pt x="2721655" y="2506140"/>
-                  </a:lnTo>
-                  <a:lnTo>
-                    <a:pt x="2650033" y="2500606"/>
-                  </a:lnTo>
-                  <a:lnTo>
-                    <a:pt x="2578410" y="2495037"/>
-                  </a:lnTo>
-                  <a:lnTo>
-                    <a:pt x="2506788" y="2489432"/>
-                  </a:lnTo>
-                  <a:lnTo>
-                    <a:pt x="2435165" y="2483791"/>
-                  </a:lnTo>
-                  <a:lnTo>
-                    <a:pt x="2363543" y="2478113"/>
-                  </a:lnTo>
-                  <a:lnTo>
-                    <a:pt x="2291920" y="2472399"/>
-                  </a:lnTo>
-                  <a:lnTo>
-                    <a:pt x="2220298" y="2466648"/>
-                  </a:lnTo>
-                  <a:lnTo>
-                    <a:pt x="2148675" y="2460860"/>
-                  </a:lnTo>
-                  <a:lnTo>
-                    <a:pt x="2077053" y="2455035"/>
-                  </a:lnTo>
-                  <a:lnTo>
-                    <a:pt x="2005430" y="2449172"/>
-                  </a:lnTo>
-                  <a:lnTo>
-                    <a:pt x="1933808" y="2443272"/>
-                  </a:lnTo>
-                  <a:lnTo>
-                    <a:pt x="1862185" y="2437333"/>
-                  </a:lnTo>
-                  <a:lnTo>
-                    <a:pt x="1790563" y="2431357"/>
-                  </a:lnTo>
-                  <a:lnTo>
-                    <a:pt x="1718940" y="2425341"/>
-                  </a:lnTo>
-                  <a:lnTo>
-                    <a:pt x="1647318" y="2419287"/>
-                  </a:lnTo>
-                  <a:lnTo>
-                    <a:pt x="1575695" y="2413194"/>
-                  </a:lnTo>
-                  <a:lnTo>
-                    <a:pt x="1504073" y="2407062"/>
-                  </a:lnTo>
-                  <a:lnTo>
-                    <a:pt x="1432450" y="2400890"/>
-                  </a:lnTo>
-                  <a:lnTo>
-                    <a:pt x="1360827" y="2394679"/>
-                  </a:lnTo>
-                  <a:lnTo>
-                    <a:pt x="1289205" y="2388427"/>
-                  </a:lnTo>
-                  <a:lnTo>
-                    <a:pt x="1217582" y="2382136"/>
-                  </a:lnTo>
-                  <a:lnTo>
-                    <a:pt x="1145960" y="2375803"/>
-                  </a:lnTo>
-                  <a:lnTo>
-                    <a:pt x="1074337" y="2369430"/>
-                  </a:lnTo>
-                  <a:lnTo>
-                    <a:pt x="1002715" y="2363016"/>
-                  </a:lnTo>
-                  <a:lnTo>
-                    <a:pt x="931092" y="2356560"/>
-                  </a:lnTo>
-                  <a:lnTo>
-                    <a:pt x="859470" y="2350063"/>
-                  </a:lnTo>
-                  <a:lnTo>
-                    <a:pt x="787847" y="2343524"/>
-                  </a:lnTo>
-                  <a:lnTo>
-                    <a:pt x="716225" y="2336943"/>
-                  </a:lnTo>
-                  <a:lnTo>
-                    <a:pt x="644602" y="2330320"/>
-                  </a:lnTo>
-                  <a:lnTo>
-                    <a:pt x="572980" y="2323654"/>
-                  </a:lnTo>
-                  <a:lnTo>
-                    <a:pt x="501357" y="2316945"/>
-                  </a:lnTo>
-                  <a:lnTo>
-                    <a:pt x="429735" y="2310193"/>
-                  </a:lnTo>
-                  <a:lnTo>
-                    <a:pt x="358112" y="2303397"/>
-                  </a:lnTo>
-                  <a:lnTo>
-                    <a:pt x="286490" y="2296557"/>
-                  </a:lnTo>
-                  <a:lnTo>
-                    <a:pt x="214867" y="2289674"/>
-                  </a:lnTo>
-                  <a:lnTo>
-                    <a:pt x="143245" y="2282746"/>
-                  </a:lnTo>
-                  <a:lnTo>
-                    <a:pt x="71622" y="2275773"/>
-                  </a:lnTo>
-                  <a:lnTo>
-                    <a:pt x="0" y="2268756"/>
+                    <a:pt x="70344" y="38509"/>
+                  </a:lnTo>
+                  <a:lnTo>
+                    <a:pt x="140688" y="75798"/>
+                  </a:lnTo>
+                  <a:lnTo>
+                    <a:pt x="211033" y="111904"/>
+                  </a:lnTo>
+                  <a:lnTo>
+                    <a:pt x="281377" y="146865"/>
+                  </a:lnTo>
+                  <a:lnTo>
+                    <a:pt x="351722" y="180718"/>
+                  </a:lnTo>
+                  <a:lnTo>
+                    <a:pt x="422066" y="213497"/>
+                  </a:lnTo>
+                  <a:lnTo>
+                    <a:pt x="492411" y="245236"/>
+                  </a:lnTo>
+                  <a:lnTo>
+                    <a:pt x="562755" y="275970"/>
+                  </a:lnTo>
+                  <a:lnTo>
+                    <a:pt x="633100" y="305728"/>
+                  </a:lnTo>
+                  <a:lnTo>
+                    <a:pt x="703444" y="334543"/>
+                  </a:lnTo>
+                  <a:lnTo>
+                    <a:pt x="773789" y="362444"/>
+                  </a:lnTo>
+                  <a:lnTo>
+                    <a:pt x="844133" y="389461"/>
+                  </a:lnTo>
+                  <a:lnTo>
+                    <a:pt x="914478" y="415621"/>
+                  </a:lnTo>
+                  <a:lnTo>
+                    <a:pt x="984822" y="440951"/>
+                  </a:lnTo>
+                  <a:lnTo>
+                    <a:pt x="1055167" y="465478"/>
+                  </a:lnTo>
+                  <a:lnTo>
+                    <a:pt x="1125511" y="489227"/>
+                  </a:lnTo>
+                  <a:lnTo>
+                    <a:pt x="1195856" y="512223"/>
+                  </a:lnTo>
+                  <a:lnTo>
+                    <a:pt x="1266200" y="534490"/>
+                  </a:lnTo>
+                  <a:lnTo>
+                    <a:pt x="1336545" y="556051"/>
+                  </a:lnTo>
+                  <a:lnTo>
+                    <a:pt x="1406889" y="576928"/>
+                  </a:lnTo>
+                  <a:lnTo>
+                    <a:pt x="1477234" y="597143"/>
+                  </a:lnTo>
+                  <a:lnTo>
+                    <a:pt x="1547578" y="616717"/>
+                  </a:lnTo>
+                  <a:lnTo>
+                    <a:pt x="1617923" y="635671"/>
+                  </a:lnTo>
+                  <a:lnTo>
+                    <a:pt x="1688267" y="654023"/>
+                  </a:lnTo>
+                  <a:lnTo>
+                    <a:pt x="1758612" y="671794"/>
+                  </a:lnTo>
+                  <a:lnTo>
+                    <a:pt x="1828956" y="689001"/>
+                  </a:lnTo>
+                  <a:lnTo>
+                    <a:pt x="1899301" y="705662"/>
+                  </a:lnTo>
+                  <a:lnTo>
+                    <a:pt x="1969645" y="721795"/>
+                  </a:lnTo>
+                  <a:lnTo>
+                    <a:pt x="2039990" y="737416"/>
+                  </a:lnTo>
+                  <a:lnTo>
+                    <a:pt x="2110334" y="752542"/>
+                  </a:lnTo>
+                  <a:lnTo>
+                    <a:pt x="2180679" y="767188"/>
+                  </a:lnTo>
+                  <a:lnTo>
+                    <a:pt x="2251023" y="781370"/>
+                  </a:lnTo>
+                  <a:lnTo>
+                    <a:pt x="2321368" y="795103"/>
+                  </a:lnTo>
+                  <a:lnTo>
+                    <a:pt x="2391712" y="808399"/>
+                  </a:lnTo>
+                  <a:lnTo>
+                    <a:pt x="2462057" y="821274"/>
+                  </a:lnTo>
+                  <a:lnTo>
+                    <a:pt x="2532401" y="833741"/>
+                  </a:lnTo>
+                  <a:lnTo>
+                    <a:pt x="2602746" y="845813"/>
+                  </a:lnTo>
+                  <a:lnTo>
+                    <a:pt x="2673090" y="857501"/>
+                  </a:lnTo>
+                  <a:lnTo>
+                    <a:pt x="2743435" y="868819"/>
+                  </a:lnTo>
+                  <a:lnTo>
+                    <a:pt x="2813779" y="879779"/>
+                  </a:lnTo>
+                  <a:lnTo>
+                    <a:pt x="2884124" y="890390"/>
+                  </a:lnTo>
+                  <a:lnTo>
+                    <a:pt x="2954468" y="900665"/>
+                  </a:lnTo>
+                  <a:lnTo>
+                    <a:pt x="3024813" y="910615"/>
+                  </a:lnTo>
+                  <a:lnTo>
+                    <a:pt x="3095157" y="916123"/>
+                  </a:lnTo>
+                  <a:lnTo>
+                    <a:pt x="3165502" y="918032"/>
+                  </a:lnTo>
+                  <a:lnTo>
+                    <a:pt x="3235846" y="919929"/>
+                  </a:lnTo>
+                  <a:lnTo>
+                    <a:pt x="3306191" y="921814"/>
+                  </a:lnTo>
+                  <a:lnTo>
+                    <a:pt x="3376535" y="923686"/>
+                  </a:lnTo>
+                  <a:lnTo>
+                    <a:pt x="3446880" y="925547"/>
+                  </a:lnTo>
+                  <a:lnTo>
+                    <a:pt x="3517224" y="927396"/>
+                  </a:lnTo>
+                  <a:lnTo>
+                    <a:pt x="3587569" y="929233"/>
+                  </a:lnTo>
+                  <a:lnTo>
+                    <a:pt x="3657913" y="931058"/>
+                  </a:lnTo>
+                  <a:lnTo>
+                    <a:pt x="3728257" y="932872"/>
+                  </a:lnTo>
+                  <a:lnTo>
+                    <a:pt x="3798602" y="934674"/>
+                  </a:lnTo>
+                  <a:lnTo>
+                    <a:pt x="3868946" y="936464"/>
+                  </a:lnTo>
+                  <a:lnTo>
+                    <a:pt x="3939291" y="938243"/>
+                  </a:lnTo>
+                  <a:lnTo>
+                    <a:pt x="4009635" y="940011"/>
+                  </a:lnTo>
+                  <a:lnTo>
+                    <a:pt x="4079980" y="941767"/>
+                  </a:lnTo>
+                  <a:lnTo>
+                    <a:pt x="4150324" y="943512"/>
+                  </a:lnTo>
+                  <a:lnTo>
+                    <a:pt x="4220669" y="945246"/>
+                  </a:lnTo>
+                  <a:lnTo>
+                    <a:pt x="4291013" y="946969"/>
+                  </a:lnTo>
+                  <a:lnTo>
+                    <a:pt x="4361358" y="948680"/>
+                  </a:lnTo>
+                  <a:lnTo>
+                    <a:pt x="4431702" y="950381"/>
+                  </a:lnTo>
+                  <a:lnTo>
+                    <a:pt x="4502047" y="952071"/>
+                  </a:lnTo>
+                  <a:lnTo>
+                    <a:pt x="4572391" y="953750"/>
+                  </a:lnTo>
+                  <a:lnTo>
+                    <a:pt x="4642736" y="955419"/>
+                  </a:lnTo>
+                  <a:lnTo>
+                    <a:pt x="4713080" y="957076"/>
+                  </a:lnTo>
+                  <a:lnTo>
+                    <a:pt x="4783425" y="958723"/>
+                  </a:lnTo>
+                  <a:lnTo>
+                    <a:pt x="4853769" y="960360"/>
+                  </a:lnTo>
+                  <a:lnTo>
+                    <a:pt x="4924114" y="961986"/>
+                  </a:lnTo>
+                  <a:lnTo>
+                    <a:pt x="4994458" y="963601"/>
+                  </a:lnTo>
+                  <a:lnTo>
+                    <a:pt x="5064803" y="965207"/>
+                  </a:lnTo>
+                  <a:lnTo>
+                    <a:pt x="5135147" y="966802"/>
+                  </a:lnTo>
+                  <a:lnTo>
+                    <a:pt x="5205492" y="968387"/>
+                  </a:lnTo>
+                  <a:lnTo>
+                    <a:pt x="5275836" y="969961"/>
+                  </a:lnTo>
+                  <a:lnTo>
+                    <a:pt x="5346181" y="971526"/>
+                  </a:lnTo>
+                  <a:lnTo>
+                    <a:pt x="5416525" y="973080"/>
+                  </a:lnTo>
+                  <a:lnTo>
+                    <a:pt x="5486870" y="974625"/>
+                  </a:lnTo>
+                  <a:lnTo>
+                    <a:pt x="5557214" y="976160"/>
+                  </a:lnTo>
+                  <a:lnTo>
+                    <a:pt x="5627559" y="977685"/>
+                  </a:lnTo>
+                  <a:lnTo>
+                    <a:pt x="5697903" y="979200"/>
+                  </a:lnTo>
+                  <a:lnTo>
+                    <a:pt x="5768248" y="980705"/>
+                  </a:lnTo>
+                  <a:lnTo>
+                    <a:pt x="5838592" y="982201"/>
+                  </a:lnTo>
+                  <a:lnTo>
+                    <a:pt x="5908937" y="983687"/>
+                  </a:lnTo>
+                  <a:lnTo>
+                    <a:pt x="5979281" y="985164"/>
+                  </a:lnTo>
+                  <a:lnTo>
+                    <a:pt x="6049626" y="986631"/>
+                  </a:lnTo>
+                  <a:lnTo>
+                    <a:pt x="6119970" y="988089"/>
+                  </a:lnTo>
+                  <a:lnTo>
+                    <a:pt x="6190315" y="989538"/>
+                  </a:lnTo>
+                  <a:lnTo>
+                    <a:pt x="6260659" y="990977"/>
+                  </a:lnTo>
+                  <a:lnTo>
+                    <a:pt x="6331004" y="992407"/>
+                  </a:lnTo>
+                  <a:lnTo>
+                    <a:pt x="6401348" y="993828"/>
+                  </a:lnTo>
+                  <a:lnTo>
+                    <a:pt x="6471693" y="995240"/>
+                  </a:lnTo>
+                  <a:lnTo>
+                    <a:pt x="6542037" y="996643"/>
+                  </a:lnTo>
+                  <a:lnTo>
+                    <a:pt x="6612382" y="998037"/>
+                  </a:lnTo>
+                  <a:lnTo>
+                    <a:pt x="6682726" y="999422"/>
+                  </a:lnTo>
+                  <a:lnTo>
+                    <a:pt x="6753071" y="1000798"/>
+                  </a:lnTo>
+                  <a:lnTo>
+                    <a:pt x="6823415" y="1002165"/>
+                  </a:lnTo>
+                  <a:lnTo>
+                    <a:pt x="6893760" y="1003523"/>
+                  </a:lnTo>
+                  <a:lnTo>
+                    <a:pt x="6964104" y="1004873"/>
+                  </a:lnTo>
+                  <a:lnTo>
+                    <a:pt x="6964104" y="1164430"/>
+                  </a:lnTo>
+                  <a:lnTo>
+                    <a:pt x="6893760" y="1162793"/>
+                  </a:lnTo>
+                  <a:lnTo>
+                    <a:pt x="6823415" y="1161102"/>
+                  </a:lnTo>
+                  <a:lnTo>
+                    <a:pt x="6753071" y="1159356"/>
+                  </a:lnTo>
+                  <a:lnTo>
+                    <a:pt x="6682726" y="1157552"/>
+                  </a:lnTo>
+                  <a:lnTo>
+                    <a:pt x="6612382" y="1155690"/>
+                  </a:lnTo>
+                  <a:lnTo>
+                    <a:pt x="6542037" y="1153767"/>
+                  </a:lnTo>
+                  <a:lnTo>
+                    <a:pt x="6471693" y="1151780"/>
+                  </a:lnTo>
+                  <a:lnTo>
+                    <a:pt x="6401348" y="1149729"/>
+                  </a:lnTo>
+                  <a:lnTo>
+                    <a:pt x="6331004" y="1147610"/>
+                  </a:lnTo>
+                  <a:lnTo>
+                    <a:pt x="6260659" y="1145422"/>
+                  </a:lnTo>
+                  <a:lnTo>
+                    <a:pt x="6190315" y="1143163"/>
+                  </a:lnTo>
+                  <a:lnTo>
+                    <a:pt x="6119970" y="1140829"/>
+                  </a:lnTo>
+                  <a:lnTo>
+                    <a:pt x="6049626" y="1138419"/>
+                  </a:lnTo>
+                  <a:lnTo>
+                    <a:pt x="5979281" y="1135930"/>
+                  </a:lnTo>
+                  <a:lnTo>
+                    <a:pt x="5908937" y="1133360"/>
+                  </a:lnTo>
+                  <a:lnTo>
+                    <a:pt x="5838592" y="1130705"/>
+                  </a:lnTo>
+                  <a:lnTo>
+                    <a:pt x="5768248" y="1127963"/>
+                  </a:lnTo>
+                  <a:lnTo>
+                    <a:pt x="5697903" y="1125132"/>
+                  </a:lnTo>
+                  <a:lnTo>
+                    <a:pt x="5627559" y="1122208"/>
+                  </a:lnTo>
+                  <a:lnTo>
+                    <a:pt x="5557214" y="1119188"/>
+                  </a:lnTo>
+                  <a:lnTo>
+                    <a:pt x="5486870" y="1116069"/>
+                  </a:lnTo>
+                  <a:lnTo>
+                    <a:pt x="5416525" y="1112848"/>
+                  </a:lnTo>
+                  <a:lnTo>
+                    <a:pt x="5346181" y="1109522"/>
+                  </a:lnTo>
+                  <a:lnTo>
+                    <a:pt x="5275836" y="1106087"/>
+                  </a:lnTo>
+                  <a:lnTo>
+                    <a:pt x="5205492" y="1102539"/>
+                  </a:lnTo>
+                  <a:lnTo>
+                    <a:pt x="5135147" y="1098875"/>
+                  </a:lnTo>
+                  <a:lnTo>
+                    <a:pt x="5064803" y="1095091"/>
+                  </a:lnTo>
+                  <a:lnTo>
+                    <a:pt x="4994458" y="1091183"/>
+                  </a:lnTo>
+                  <a:lnTo>
+                    <a:pt x="4924114" y="1087147"/>
+                  </a:lnTo>
+                  <a:lnTo>
+                    <a:pt x="4853769" y="1082979"/>
+                  </a:lnTo>
+                  <a:lnTo>
+                    <a:pt x="4783425" y="1078674"/>
+                  </a:lnTo>
+                  <a:lnTo>
+                    <a:pt x="4713080" y="1074229"/>
+                  </a:lnTo>
+                  <a:lnTo>
+                    <a:pt x="4642736" y="1069638"/>
+                  </a:lnTo>
+                  <a:lnTo>
+                    <a:pt x="4572391" y="1064896"/>
+                  </a:lnTo>
+                  <a:lnTo>
+                    <a:pt x="4502047" y="1059999"/>
+                  </a:lnTo>
+                  <a:lnTo>
+                    <a:pt x="4431702" y="1054942"/>
+                  </a:lnTo>
+                  <a:lnTo>
+                    <a:pt x="4361358" y="1049720"/>
+                  </a:lnTo>
+                  <a:lnTo>
+                    <a:pt x="4291013" y="1044326"/>
+                  </a:lnTo>
+                  <a:lnTo>
+                    <a:pt x="4220669" y="1038755"/>
+                  </a:lnTo>
+                  <a:lnTo>
+                    <a:pt x="4150324" y="1033002"/>
+                  </a:lnTo>
+                  <a:lnTo>
+                    <a:pt x="4079980" y="1027061"/>
+                  </a:lnTo>
+                  <a:lnTo>
+                    <a:pt x="4009635" y="1020925"/>
+                  </a:lnTo>
+                  <a:lnTo>
+                    <a:pt x="3939291" y="1014589"/>
+                  </a:lnTo>
+                  <a:lnTo>
+                    <a:pt x="3868946" y="1008044"/>
+                  </a:lnTo>
+                  <a:lnTo>
+                    <a:pt x="3798602" y="1001286"/>
+                  </a:lnTo>
+                  <a:lnTo>
+                    <a:pt x="3728257" y="994306"/>
+                  </a:lnTo>
+                  <a:lnTo>
+                    <a:pt x="3657913" y="987097"/>
+                  </a:lnTo>
+                  <a:lnTo>
+                    <a:pt x="3587569" y="979653"/>
+                  </a:lnTo>
+                  <a:lnTo>
+                    <a:pt x="3517224" y="971964"/>
+                  </a:lnTo>
+                  <a:lnTo>
+                    <a:pt x="3446880" y="964024"/>
+                  </a:lnTo>
+                  <a:lnTo>
+                    <a:pt x="3376535" y="955824"/>
+                  </a:lnTo>
+                  <a:lnTo>
+                    <a:pt x="3306191" y="947355"/>
+                  </a:lnTo>
+                  <a:lnTo>
+                    <a:pt x="3235846" y="938609"/>
+                  </a:lnTo>
+                  <a:lnTo>
+                    <a:pt x="3165502" y="929577"/>
+                  </a:lnTo>
+                  <a:lnTo>
+                    <a:pt x="3095157" y="920248"/>
+                  </a:lnTo>
+                  <a:lnTo>
+                    <a:pt x="3024813" y="914201"/>
+                  </a:lnTo>
+                  <a:lnTo>
+                    <a:pt x="2954468" y="912267"/>
+                  </a:lnTo>
+                  <a:lnTo>
+                    <a:pt x="2884124" y="910321"/>
+                  </a:lnTo>
+                  <a:lnTo>
+                    <a:pt x="2813779" y="908362"/>
+                  </a:lnTo>
+                  <a:lnTo>
+                    <a:pt x="2743435" y="906391"/>
+                  </a:lnTo>
+                  <a:lnTo>
+                    <a:pt x="2673090" y="904407"/>
+                  </a:lnTo>
+                  <a:lnTo>
+                    <a:pt x="2602746" y="902410"/>
+                  </a:lnTo>
+                  <a:lnTo>
+                    <a:pt x="2532401" y="900400"/>
+                  </a:lnTo>
+                  <a:lnTo>
+                    <a:pt x="2462057" y="898377"/>
+                  </a:lnTo>
+                  <a:lnTo>
+                    <a:pt x="2391712" y="896341"/>
+                  </a:lnTo>
+                  <a:lnTo>
+                    <a:pt x="2321368" y="894292"/>
+                  </a:lnTo>
+                  <a:lnTo>
+                    <a:pt x="2251023" y="892230"/>
+                  </a:lnTo>
+                  <a:lnTo>
+                    <a:pt x="2180679" y="890155"/>
+                  </a:lnTo>
+                  <a:lnTo>
+                    <a:pt x="2110334" y="888066"/>
+                  </a:lnTo>
+                  <a:lnTo>
+                    <a:pt x="2039990" y="885964"/>
+                  </a:lnTo>
+                  <a:lnTo>
+                    <a:pt x="1969645" y="883848"/>
+                  </a:lnTo>
+                  <a:lnTo>
+                    <a:pt x="1899301" y="881719"/>
+                  </a:lnTo>
+                  <a:lnTo>
+                    <a:pt x="1828956" y="879576"/>
+                  </a:lnTo>
+                  <a:lnTo>
+                    <a:pt x="1758612" y="877419"/>
+                  </a:lnTo>
+                  <a:lnTo>
+                    <a:pt x="1688267" y="875248"/>
+                  </a:lnTo>
+                  <a:lnTo>
+                    <a:pt x="1617923" y="873064"/>
+                  </a:lnTo>
+                  <a:lnTo>
+                    <a:pt x="1547578" y="870865"/>
+                  </a:lnTo>
+                  <a:lnTo>
+                    <a:pt x="1477234" y="868652"/>
+                  </a:lnTo>
+                  <a:lnTo>
+                    <a:pt x="1406889" y="866425"/>
+                  </a:lnTo>
+                  <a:lnTo>
+                    <a:pt x="1336545" y="864183"/>
+                  </a:lnTo>
+                  <a:lnTo>
+                    <a:pt x="1266200" y="861927"/>
+                  </a:lnTo>
+                  <a:lnTo>
+                    <a:pt x="1195856" y="859656"/>
+                  </a:lnTo>
+                  <a:lnTo>
+                    <a:pt x="1125511" y="857371"/>
+                  </a:lnTo>
+                  <a:lnTo>
+                    <a:pt x="1055167" y="855071"/>
+                  </a:lnTo>
+                  <a:lnTo>
+                    <a:pt x="984822" y="852757"/>
+                  </a:lnTo>
+                  <a:lnTo>
+                    <a:pt x="914478" y="850427"/>
+                  </a:lnTo>
+                  <a:lnTo>
+                    <a:pt x="844133" y="848082"/>
+                  </a:lnTo>
+                  <a:lnTo>
+                    <a:pt x="773789" y="845723"/>
+                  </a:lnTo>
+                  <a:lnTo>
+                    <a:pt x="703444" y="843348"/>
+                  </a:lnTo>
+                  <a:lnTo>
+                    <a:pt x="633100" y="840957"/>
+                  </a:lnTo>
+                  <a:lnTo>
+                    <a:pt x="562755" y="838552"/>
+                  </a:lnTo>
+                  <a:lnTo>
+                    <a:pt x="492411" y="836131"/>
+                  </a:lnTo>
+                  <a:lnTo>
+                    <a:pt x="422066" y="833694"/>
+                  </a:lnTo>
+                  <a:lnTo>
+                    <a:pt x="351722" y="831241"/>
+                  </a:lnTo>
+                  <a:lnTo>
+                    <a:pt x="281377" y="828773"/>
+                  </a:lnTo>
+                  <a:lnTo>
+                    <a:pt x="211033" y="826289"/>
+                  </a:lnTo>
+                  <a:lnTo>
+                    <a:pt x="140688" y="823789"/>
+                  </a:lnTo>
+                  <a:lnTo>
+                    <a:pt x="70344" y="821273"/>
+                  </a:lnTo>
+                  <a:lnTo>
+                    <a:pt x="0" y="818740"/>
                   </a:lnTo>
                   <a:close/>
                 </a:path>
@@ -3670,643 +3705,318 @@
         </p:sp>
         <p:sp>
           <p:nvSpPr>
-            <p:cNvPr id="23" name="pl23"/>
-            <p:cNvSpPr/>
-            <p:nvPr/>
-          </p:nvSpPr>
-          <p:spPr>
-            <a:xfrm>
-              <a:off x="1172049" y="2192050"/>
-              <a:ext cx="7090630" cy="2784536"/>
-            </a:xfrm>
-            <a:custGeom>
-              <a:avLst/>
-              <a:pathLst>
-                <a:path w="7090630" h="2784536">
-                  <a:moveTo>
-                    <a:pt x="0" y="0"/>
-                  </a:moveTo>
-                  <a:lnTo>
-                    <a:pt x="71622" y="106711"/>
-                  </a:lnTo>
-                  <a:lnTo>
-                    <a:pt x="143245" y="210039"/>
-                  </a:lnTo>
-                  <a:lnTo>
-                    <a:pt x="214867" y="310090"/>
-                  </a:lnTo>
-                  <a:lnTo>
-                    <a:pt x="286490" y="406969"/>
-                  </a:lnTo>
-                  <a:lnTo>
-                    <a:pt x="358112" y="500775"/>
-                  </a:lnTo>
-                  <a:lnTo>
-                    <a:pt x="429735" y="591607"/>
-                  </a:lnTo>
-                  <a:lnTo>
-                    <a:pt x="501357" y="679559"/>
-                  </a:lnTo>
-                  <a:lnTo>
-                    <a:pt x="572980" y="764721"/>
-                  </a:lnTo>
-                  <a:lnTo>
-                    <a:pt x="644602" y="847183"/>
-                  </a:lnTo>
-                  <a:lnTo>
-                    <a:pt x="716225" y="927031"/>
-                  </a:lnTo>
-                  <a:lnTo>
-                    <a:pt x="787847" y="1004346"/>
-                  </a:lnTo>
-                  <a:lnTo>
-                    <a:pt x="859470" y="1079209"/>
-                  </a:lnTo>
-                  <a:lnTo>
-                    <a:pt x="931092" y="1151699"/>
-                  </a:lnTo>
-                  <a:lnTo>
-                    <a:pt x="1002715" y="1221890"/>
-                  </a:lnTo>
-                  <a:lnTo>
-                    <a:pt x="1074337" y="1289855"/>
-                  </a:lnTo>
-                  <a:lnTo>
-                    <a:pt x="1145960" y="1355665"/>
-                  </a:lnTo>
-                  <a:lnTo>
-                    <a:pt x="1217582" y="1419388"/>
-                  </a:lnTo>
-                  <a:lnTo>
-                    <a:pt x="1289205" y="1481090"/>
-                  </a:lnTo>
-                  <a:lnTo>
-                    <a:pt x="1360827" y="1540836"/>
-                  </a:lnTo>
-                  <a:lnTo>
-                    <a:pt x="1432450" y="1598687"/>
-                  </a:lnTo>
-                  <a:lnTo>
-                    <a:pt x="1504073" y="1654704"/>
-                  </a:lnTo>
-                  <a:lnTo>
-                    <a:pt x="1575695" y="1708944"/>
-                  </a:lnTo>
-                  <a:lnTo>
-                    <a:pt x="1647318" y="1761465"/>
-                  </a:lnTo>
-                  <a:lnTo>
-                    <a:pt x="1718940" y="1812320"/>
-                  </a:lnTo>
-                  <a:lnTo>
-                    <a:pt x="1790563" y="1861562"/>
-                  </a:lnTo>
-                  <a:lnTo>
-                    <a:pt x="1862185" y="1909243"/>
-                  </a:lnTo>
-                  <a:lnTo>
-                    <a:pt x="1933808" y="1955412"/>
-                  </a:lnTo>
-                  <a:lnTo>
-                    <a:pt x="2005430" y="2000117"/>
-                  </a:lnTo>
-                  <a:lnTo>
-                    <a:pt x="2077053" y="2043404"/>
-                  </a:lnTo>
-                  <a:lnTo>
-                    <a:pt x="2148675" y="2085319"/>
-                  </a:lnTo>
-                  <a:lnTo>
-                    <a:pt x="2220298" y="2125904"/>
-                  </a:lnTo>
-                  <a:lnTo>
-                    <a:pt x="2291920" y="2165202"/>
-                  </a:lnTo>
-                  <a:lnTo>
-                    <a:pt x="2363543" y="2203255"/>
-                  </a:lnTo>
-                  <a:lnTo>
-                    <a:pt x="2435165" y="2240100"/>
-                  </a:lnTo>
-                  <a:lnTo>
-                    <a:pt x="2506788" y="2275778"/>
-                  </a:lnTo>
-                  <a:lnTo>
-                    <a:pt x="2578410" y="2310324"/>
-                  </a:lnTo>
-                  <a:lnTo>
-                    <a:pt x="2650033" y="2343774"/>
-                  </a:lnTo>
-                  <a:lnTo>
-                    <a:pt x="2721655" y="2376164"/>
-                  </a:lnTo>
-                  <a:lnTo>
-                    <a:pt x="2793278" y="2407527"/>
-                  </a:lnTo>
-                  <a:lnTo>
-                    <a:pt x="2864901" y="2437895"/>
-                  </a:lnTo>
-                  <a:lnTo>
-                    <a:pt x="2936523" y="2467300"/>
-                  </a:lnTo>
-                  <a:lnTo>
-                    <a:pt x="3008146" y="2495773"/>
-                  </a:lnTo>
-                  <a:lnTo>
-                    <a:pt x="3079768" y="2523342"/>
-                  </a:lnTo>
-                  <a:lnTo>
-                    <a:pt x="3151391" y="2538605"/>
-                  </a:lnTo>
-                  <a:lnTo>
-                    <a:pt x="3223013" y="2543896"/>
-                  </a:lnTo>
-                  <a:lnTo>
-                    <a:pt x="3294636" y="2549152"/>
-                  </a:lnTo>
-                  <a:lnTo>
-                    <a:pt x="3366258" y="2554375"/>
-                  </a:lnTo>
-                  <a:lnTo>
-                    <a:pt x="3437881" y="2559565"/>
-                  </a:lnTo>
-                  <a:lnTo>
-                    <a:pt x="3509503" y="2564721"/>
-                  </a:lnTo>
-                  <a:lnTo>
-                    <a:pt x="3581126" y="2569844"/>
-                  </a:lnTo>
-                  <a:lnTo>
-                    <a:pt x="3652748" y="2574934"/>
-                  </a:lnTo>
-                  <a:lnTo>
-                    <a:pt x="3724371" y="2579992"/>
-                  </a:lnTo>
-                  <a:lnTo>
-                    <a:pt x="3795993" y="2585018"/>
-                  </a:lnTo>
-                  <a:lnTo>
-                    <a:pt x="3867616" y="2590011"/>
-                  </a:lnTo>
-                  <a:lnTo>
-                    <a:pt x="3939238" y="2594972"/>
-                  </a:lnTo>
-                  <a:lnTo>
-                    <a:pt x="4010861" y="2599902"/>
-                  </a:lnTo>
-                  <a:lnTo>
-                    <a:pt x="4082483" y="2604800"/>
-                  </a:lnTo>
-                  <a:lnTo>
-                    <a:pt x="4154106" y="2609667"/>
-                  </a:lnTo>
-                  <a:lnTo>
-                    <a:pt x="4225729" y="2614502"/>
-                  </a:lnTo>
-                  <a:lnTo>
-                    <a:pt x="4297351" y="2619307"/>
-                  </a:lnTo>
-                  <a:lnTo>
-                    <a:pt x="4368974" y="2624081"/>
-                  </a:lnTo>
-                  <a:lnTo>
-                    <a:pt x="4440596" y="2628824"/>
-                  </a:lnTo>
-                  <a:lnTo>
-                    <a:pt x="4512219" y="2633537"/>
-                  </a:lnTo>
-                  <a:lnTo>
-                    <a:pt x="4583841" y="2638220"/>
-                  </a:lnTo>
-                  <a:lnTo>
-                    <a:pt x="4655464" y="2642873"/>
-                  </a:lnTo>
-                  <a:lnTo>
-                    <a:pt x="4727086" y="2647496"/>
-                  </a:lnTo>
-                  <a:lnTo>
-                    <a:pt x="4798709" y="2652089"/>
-                  </a:lnTo>
-                  <a:lnTo>
-                    <a:pt x="4870331" y="2656653"/>
-                  </a:lnTo>
-                  <a:lnTo>
-                    <a:pt x="4941954" y="2661188"/>
-                  </a:lnTo>
-                  <a:lnTo>
-                    <a:pt x="5013576" y="2665694"/>
-                  </a:lnTo>
-                  <a:lnTo>
-                    <a:pt x="5085199" y="2670171"/>
-                  </a:lnTo>
-                  <a:lnTo>
-                    <a:pt x="5156821" y="2674619"/>
-                  </a:lnTo>
-                  <a:lnTo>
-                    <a:pt x="5228444" y="2679039"/>
-                  </a:lnTo>
-                  <a:lnTo>
-                    <a:pt x="5300066" y="2683430"/>
-                  </a:lnTo>
-                  <a:lnTo>
-                    <a:pt x="5371689" y="2687794"/>
-                  </a:lnTo>
-                  <a:lnTo>
-                    <a:pt x="5443311" y="2692129"/>
-                  </a:lnTo>
-                  <a:lnTo>
-                    <a:pt x="5514934" y="2696437"/>
-                  </a:lnTo>
-                  <a:lnTo>
-                    <a:pt x="5586557" y="2700717"/>
-                  </a:lnTo>
-                  <a:lnTo>
-                    <a:pt x="5658179" y="2704970"/>
-                  </a:lnTo>
-                  <a:lnTo>
-                    <a:pt x="5729802" y="2709196"/>
-                  </a:lnTo>
-                  <a:lnTo>
-                    <a:pt x="5801424" y="2713394"/>
-                  </a:lnTo>
-                  <a:lnTo>
-                    <a:pt x="5873047" y="2717566"/>
-                  </a:lnTo>
-                  <a:lnTo>
-                    <a:pt x="5944669" y="2721711"/>
-                  </a:lnTo>
-                  <a:lnTo>
-                    <a:pt x="6016292" y="2725829"/>
-                  </a:lnTo>
-                  <a:lnTo>
-                    <a:pt x="6087914" y="2729922"/>
-                  </a:lnTo>
-                  <a:lnTo>
-                    <a:pt x="6159537" y="2733987"/>
-                  </a:lnTo>
-                  <a:lnTo>
-                    <a:pt x="6231159" y="2738027"/>
-                  </a:lnTo>
-                  <a:lnTo>
-                    <a:pt x="6302782" y="2742041"/>
-                  </a:lnTo>
-                  <a:lnTo>
-                    <a:pt x="6374404" y="2746030"/>
-                  </a:lnTo>
-                  <a:lnTo>
-                    <a:pt x="6446027" y="2749992"/>
-                  </a:lnTo>
-                  <a:lnTo>
-                    <a:pt x="6517649" y="2753930"/>
-                  </a:lnTo>
-                  <a:lnTo>
-                    <a:pt x="6589272" y="2757842"/>
-                  </a:lnTo>
-                  <a:lnTo>
-                    <a:pt x="6660894" y="2761729"/>
-                  </a:lnTo>
-                  <a:lnTo>
-                    <a:pt x="6732517" y="2765592"/>
-                  </a:lnTo>
-                  <a:lnTo>
-                    <a:pt x="6804139" y="2769429"/>
-                  </a:lnTo>
-                  <a:lnTo>
-                    <a:pt x="6875762" y="2773242"/>
-                  </a:lnTo>
-                  <a:lnTo>
-                    <a:pt x="6947385" y="2777031"/>
-                  </a:lnTo>
-                  <a:lnTo>
-                    <a:pt x="7019007" y="2780795"/>
-                  </a:lnTo>
-                  <a:lnTo>
-                    <a:pt x="7090630" y="2784536"/>
-                  </a:lnTo>
-                </a:path>
-              </a:pathLst>
-            </a:custGeom>
-          </p:spPr>
-          <p:txBody>
-            <a:bodyPr/>
-            <a:lstStyle/>
-            <a:p/>
-          </p:txBody>
-        </p:sp>
-        <p:sp>
-          <p:nvSpPr>
             <p:cNvPr id="24" name="pl24"/>
             <p:cNvSpPr/>
             <p:nvPr/>
           </p:nvSpPr>
           <p:spPr>
             <a:xfrm>
-              <a:off x="1172049" y="4460806"/>
-              <a:ext cx="7090630" cy="957916"/>
+              <a:off x="1235312" y="2185872"/>
+              <a:ext cx="6964104" cy="1004873"/>
             </a:xfrm>
             <a:custGeom>
               <a:avLst/>
               <a:pathLst>
-                <a:path w="7090630" h="957916">
+                <a:path w="6964104" h="1004873">
                   <a:moveTo>
-                    <a:pt x="7090630" y="957916"/>
+                    <a:pt x="0" y="0"/>
                   </a:moveTo>
                   <a:lnTo>
-                    <a:pt x="7019007" y="953379"/>
-                  </a:lnTo>
-                  <a:lnTo>
-                    <a:pt x="6947385" y="948694"/>
-                  </a:lnTo>
-                  <a:lnTo>
-                    <a:pt x="6875762" y="943856"/>
-                  </a:lnTo>
-                  <a:lnTo>
-                    <a:pt x="6804139" y="938859"/>
-                  </a:lnTo>
-                  <a:lnTo>
-                    <a:pt x="6732517" y="933698"/>
-                  </a:lnTo>
-                  <a:lnTo>
-                    <a:pt x="6660894" y="928368"/>
-                  </a:lnTo>
-                  <a:lnTo>
-                    <a:pt x="6589272" y="922864"/>
-                  </a:lnTo>
-                  <a:lnTo>
-                    <a:pt x="6517649" y="917179"/>
-                  </a:lnTo>
-                  <a:lnTo>
-                    <a:pt x="6446027" y="911309"/>
-                  </a:lnTo>
-                  <a:lnTo>
-                    <a:pt x="6374404" y="905246"/>
-                  </a:lnTo>
-                  <a:lnTo>
-                    <a:pt x="6302782" y="898984"/>
-                  </a:lnTo>
-                  <a:lnTo>
-                    <a:pt x="6231159" y="892518"/>
-                  </a:lnTo>
-                  <a:lnTo>
-                    <a:pt x="6159537" y="885839"/>
-                  </a:lnTo>
-                  <a:lnTo>
-                    <a:pt x="6087914" y="878942"/>
-                  </a:lnTo>
-                  <a:lnTo>
-                    <a:pt x="6016292" y="871819"/>
-                  </a:lnTo>
-                  <a:lnTo>
-                    <a:pt x="5944669" y="864463"/>
-                  </a:lnTo>
-                  <a:lnTo>
-                    <a:pt x="5873047" y="856866"/>
-                  </a:lnTo>
-                  <a:lnTo>
-                    <a:pt x="5801424" y="849020"/>
-                  </a:lnTo>
-                  <a:lnTo>
-                    <a:pt x="5729802" y="840918"/>
-                  </a:lnTo>
-                  <a:lnTo>
-                    <a:pt x="5658179" y="832549"/>
-                  </a:lnTo>
-                  <a:lnTo>
-                    <a:pt x="5586557" y="823907"/>
-                  </a:lnTo>
-                  <a:lnTo>
-                    <a:pt x="5514934" y="814982"/>
-                  </a:lnTo>
-                  <a:lnTo>
-                    <a:pt x="5443311" y="805764"/>
-                  </a:lnTo>
-                  <a:lnTo>
-                    <a:pt x="5371689" y="796245"/>
-                  </a:lnTo>
-                  <a:lnTo>
-                    <a:pt x="5300066" y="786414"/>
-                  </a:lnTo>
-                  <a:lnTo>
-                    <a:pt x="5228444" y="776261"/>
-                  </a:lnTo>
-                  <a:lnTo>
-                    <a:pt x="5156821" y="765775"/>
-                  </a:lnTo>
-                  <a:lnTo>
-                    <a:pt x="5085199" y="754946"/>
-                  </a:lnTo>
-                  <a:lnTo>
-                    <a:pt x="5013576" y="743763"/>
-                  </a:lnTo>
-                  <a:lnTo>
-                    <a:pt x="4941954" y="732213"/>
-                  </a:lnTo>
-                  <a:lnTo>
-                    <a:pt x="4870331" y="720285"/>
-                  </a:lnTo>
-                  <a:lnTo>
-                    <a:pt x="4798709" y="707966"/>
-                  </a:lnTo>
-                  <a:lnTo>
-                    <a:pt x="4727086" y="695244"/>
-                  </a:lnTo>
-                  <a:lnTo>
-                    <a:pt x="4655464" y="682105"/>
-                  </a:lnTo>
-                  <a:lnTo>
-                    <a:pt x="4583841" y="668536"/>
-                  </a:lnTo>
-                  <a:lnTo>
-                    <a:pt x="4512219" y="654523"/>
-                  </a:lnTo>
-                  <a:lnTo>
-                    <a:pt x="4440596" y="640050"/>
-                  </a:lnTo>
-                  <a:lnTo>
-                    <a:pt x="4368974" y="625104"/>
-                  </a:lnTo>
-                  <a:lnTo>
-                    <a:pt x="4297351" y="609668"/>
-                  </a:lnTo>
-                  <a:lnTo>
-                    <a:pt x="4225729" y="593727"/>
-                  </a:lnTo>
-                  <a:lnTo>
-                    <a:pt x="4154106" y="577263"/>
-                  </a:lnTo>
-                  <a:lnTo>
-                    <a:pt x="4082483" y="560261"/>
-                  </a:lnTo>
-                  <a:lnTo>
-                    <a:pt x="4010861" y="542701"/>
-                  </a:lnTo>
-                  <a:lnTo>
-                    <a:pt x="3939238" y="524567"/>
-                  </a:lnTo>
-                  <a:lnTo>
-                    <a:pt x="3867616" y="505839"/>
-                  </a:lnTo>
-                  <a:lnTo>
-                    <a:pt x="3795993" y="486497"/>
-                  </a:lnTo>
-                  <a:lnTo>
-                    <a:pt x="3724371" y="466522"/>
-                  </a:lnTo>
-                  <a:lnTo>
-                    <a:pt x="3652748" y="445893"/>
-                  </a:lnTo>
-                  <a:lnTo>
-                    <a:pt x="3581126" y="424588"/>
-                  </a:lnTo>
-                  <a:lnTo>
-                    <a:pt x="3509503" y="402586"/>
-                  </a:lnTo>
-                  <a:lnTo>
-                    <a:pt x="3437881" y="379863"/>
-                  </a:lnTo>
-                  <a:lnTo>
-                    <a:pt x="3366258" y="356396"/>
-                  </a:lnTo>
-                  <a:lnTo>
-                    <a:pt x="3294636" y="332160"/>
-                  </a:lnTo>
-                  <a:lnTo>
-                    <a:pt x="3223013" y="307131"/>
-                  </a:lnTo>
-                  <a:lnTo>
-                    <a:pt x="3151391" y="281282"/>
-                  </a:lnTo>
-                  <a:lnTo>
-                    <a:pt x="3079768" y="264525"/>
-                  </a:lnTo>
-                  <a:lnTo>
-                    <a:pt x="3008146" y="259166"/>
-                  </a:lnTo>
-                  <a:lnTo>
-                    <a:pt x="2936523" y="253773"/>
-                  </a:lnTo>
-                  <a:lnTo>
-                    <a:pt x="2864901" y="248345"/>
-                  </a:lnTo>
-                  <a:lnTo>
-                    <a:pt x="2793278" y="242882"/>
-                  </a:lnTo>
-                  <a:lnTo>
-                    <a:pt x="2721655" y="237384"/>
-                  </a:lnTo>
-                  <a:lnTo>
-                    <a:pt x="2650033" y="231850"/>
-                  </a:lnTo>
-                  <a:lnTo>
-                    <a:pt x="2578410" y="226281"/>
-                  </a:lnTo>
-                  <a:lnTo>
-                    <a:pt x="2506788" y="220676"/>
-                  </a:lnTo>
-                  <a:lnTo>
-                    <a:pt x="2435165" y="215034"/>
-                  </a:lnTo>
-                  <a:lnTo>
-                    <a:pt x="2363543" y="209357"/>
-                  </a:lnTo>
-                  <a:lnTo>
-                    <a:pt x="2291920" y="203643"/>
-                  </a:lnTo>
-                  <a:lnTo>
-                    <a:pt x="2220298" y="197892"/>
-                  </a:lnTo>
-                  <a:lnTo>
-                    <a:pt x="2148675" y="192104"/>
-                  </a:lnTo>
-                  <a:lnTo>
-                    <a:pt x="2077053" y="186279"/>
-                  </a:lnTo>
-                  <a:lnTo>
-                    <a:pt x="2005430" y="180416"/>
-                  </a:lnTo>
-                  <a:lnTo>
-                    <a:pt x="1933808" y="174516"/>
-                  </a:lnTo>
-                  <a:lnTo>
-                    <a:pt x="1862185" y="168577"/>
-                  </a:lnTo>
-                  <a:lnTo>
-                    <a:pt x="1790563" y="162600"/>
-                  </a:lnTo>
-                  <a:lnTo>
-                    <a:pt x="1718940" y="156585"/>
-                  </a:lnTo>
-                  <a:lnTo>
-                    <a:pt x="1647318" y="150531"/>
-                  </a:lnTo>
-                  <a:lnTo>
-                    <a:pt x="1575695" y="144438"/>
-                  </a:lnTo>
-                  <a:lnTo>
-                    <a:pt x="1504073" y="138306"/>
-                  </a:lnTo>
-                  <a:lnTo>
-                    <a:pt x="1432450" y="132134"/>
-                  </a:lnTo>
-                  <a:lnTo>
-                    <a:pt x="1360827" y="125922"/>
-                  </a:lnTo>
-                  <a:lnTo>
-                    <a:pt x="1289205" y="119671"/>
-                  </a:lnTo>
-                  <a:lnTo>
-                    <a:pt x="1217582" y="113379"/>
-                  </a:lnTo>
-                  <a:lnTo>
-                    <a:pt x="1145960" y="107047"/>
-                  </a:lnTo>
-                  <a:lnTo>
-                    <a:pt x="1074337" y="100674"/>
-                  </a:lnTo>
-                  <a:lnTo>
-                    <a:pt x="1002715" y="94259"/>
-                  </a:lnTo>
-                  <a:lnTo>
-                    <a:pt x="931092" y="87804"/>
-                  </a:lnTo>
-                  <a:lnTo>
-                    <a:pt x="859470" y="81307"/>
-                  </a:lnTo>
-                  <a:lnTo>
-                    <a:pt x="787847" y="74768"/>
-                  </a:lnTo>
-                  <a:lnTo>
-                    <a:pt x="716225" y="68187"/>
-                  </a:lnTo>
-                  <a:lnTo>
-                    <a:pt x="644602" y="61564"/>
-                  </a:lnTo>
-                  <a:lnTo>
-                    <a:pt x="572980" y="54897"/>
-                  </a:lnTo>
-                  <a:lnTo>
-                    <a:pt x="501357" y="48188"/>
-                  </a:lnTo>
-                  <a:lnTo>
-                    <a:pt x="429735" y="41436"/>
-                  </a:lnTo>
-                  <a:lnTo>
-                    <a:pt x="358112" y="34640"/>
-                  </a:lnTo>
-                  <a:lnTo>
-                    <a:pt x="286490" y="27801"/>
-                  </a:lnTo>
-                  <a:lnTo>
-                    <a:pt x="214867" y="20917"/>
-                  </a:lnTo>
-                  <a:lnTo>
-                    <a:pt x="143245" y="13989"/>
-                  </a:lnTo>
-                  <a:lnTo>
-                    <a:pt x="71622" y="7017"/>
-                  </a:lnTo>
-                  <a:lnTo>
-                    <a:pt x="0" y="0"/>
+                    <a:pt x="70344" y="38509"/>
+                  </a:lnTo>
+                  <a:lnTo>
+                    <a:pt x="140688" y="75798"/>
+                  </a:lnTo>
+                  <a:lnTo>
+                    <a:pt x="211033" y="111904"/>
+                  </a:lnTo>
+                  <a:lnTo>
+                    <a:pt x="281377" y="146865"/>
+                  </a:lnTo>
+                  <a:lnTo>
+                    <a:pt x="351722" y="180718"/>
+                  </a:lnTo>
+                  <a:lnTo>
+                    <a:pt x="422066" y="213497"/>
+                  </a:lnTo>
+                  <a:lnTo>
+                    <a:pt x="492411" y="245236"/>
+                  </a:lnTo>
+                  <a:lnTo>
+                    <a:pt x="562755" y="275970"/>
+                  </a:lnTo>
+                  <a:lnTo>
+                    <a:pt x="633100" y="305728"/>
+                  </a:lnTo>
+                  <a:lnTo>
+                    <a:pt x="703444" y="334543"/>
+                  </a:lnTo>
+                  <a:lnTo>
+                    <a:pt x="773789" y="362444"/>
+                  </a:lnTo>
+                  <a:lnTo>
+                    <a:pt x="844133" y="389461"/>
+                  </a:lnTo>
+                  <a:lnTo>
+                    <a:pt x="914478" y="415621"/>
+                  </a:lnTo>
+                  <a:lnTo>
+                    <a:pt x="984822" y="440951"/>
+                  </a:lnTo>
+                  <a:lnTo>
+                    <a:pt x="1055167" y="465478"/>
+                  </a:lnTo>
+                  <a:lnTo>
+                    <a:pt x="1125511" y="489227"/>
+                  </a:lnTo>
+                  <a:lnTo>
+                    <a:pt x="1195856" y="512223"/>
+                  </a:lnTo>
+                  <a:lnTo>
+                    <a:pt x="1266200" y="534490"/>
+                  </a:lnTo>
+                  <a:lnTo>
+                    <a:pt x="1336545" y="556051"/>
+                  </a:lnTo>
+                  <a:lnTo>
+                    <a:pt x="1406889" y="576928"/>
+                  </a:lnTo>
+                  <a:lnTo>
+                    <a:pt x="1477234" y="597143"/>
+                  </a:lnTo>
+                  <a:lnTo>
+                    <a:pt x="1547578" y="616717"/>
+                  </a:lnTo>
+                  <a:lnTo>
+                    <a:pt x="1617923" y="635671"/>
+                  </a:lnTo>
+                  <a:lnTo>
+                    <a:pt x="1688267" y="654023"/>
+                  </a:lnTo>
+                  <a:lnTo>
+                    <a:pt x="1758612" y="671794"/>
+                  </a:lnTo>
+                  <a:lnTo>
+                    <a:pt x="1828956" y="689001"/>
+                  </a:lnTo>
+                  <a:lnTo>
+                    <a:pt x="1899301" y="705662"/>
+                  </a:lnTo>
+                  <a:lnTo>
+                    <a:pt x="1969645" y="721795"/>
+                  </a:lnTo>
+                  <a:lnTo>
+                    <a:pt x="2039990" y="737416"/>
+                  </a:lnTo>
+                  <a:lnTo>
+                    <a:pt x="2110334" y="752542"/>
+                  </a:lnTo>
+                  <a:lnTo>
+                    <a:pt x="2180679" y="767188"/>
+                  </a:lnTo>
+                  <a:lnTo>
+                    <a:pt x="2251023" y="781370"/>
+                  </a:lnTo>
+                  <a:lnTo>
+                    <a:pt x="2321368" y="795103"/>
+                  </a:lnTo>
+                  <a:lnTo>
+                    <a:pt x="2391712" y="808399"/>
+                  </a:lnTo>
+                  <a:lnTo>
+                    <a:pt x="2462057" y="821274"/>
+                  </a:lnTo>
+                  <a:lnTo>
+                    <a:pt x="2532401" y="833741"/>
+                  </a:lnTo>
+                  <a:lnTo>
+                    <a:pt x="2602746" y="845813"/>
+                  </a:lnTo>
+                  <a:lnTo>
+                    <a:pt x="2673090" y="857501"/>
+                  </a:lnTo>
+                  <a:lnTo>
+                    <a:pt x="2743435" y="868819"/>
+                  </a:lnTo>
+                  <a:lnTo>
+                    <a:pt x="2813779" y="879779"/>
+                  </a:lnTo>
+                  <a:lnTo>
+                    <a:pt x="2884124" y="890390"/>
+                  </a:lnTo>
+                  <a:lnTo>
+                    <a:pt x="2954468" y="900665"/>
+                  </a:lnTo>
+                  <a:lnTo>
+                    <a:pt x="3024813" y="910615"/>
+                  </a:lnTo>
+                  <a:lnTo>
+                    <a:pt x="3095157" y="916123"/>
+                  </a:lnTo>
+                  <a:lnTo>
+                    <a:pt x="3165502" y="918032"/>
+                  </a:lnTo>
+                  <a:lnTo>
+                    <a:pt x="3235846" y="919929"/>
+                  </a:lnTo>
+                  <a:lnTo>
+                    <a:pt x="3306191" y="921814"/>
+                  </a:lnTo>
+                  <a:lnTo>
+                    <a:pt x="3376535" y="923686"/>
+                  </a:lnTo>
+                  <a:lnTo>
+                    <a:pt x="3446880" y="925547"/>
+                  </a:lnTo>
+                  <a:lnTo>
+                    <a:pt x="3517224" y="927396"/>
+                  </a:lnTo>
+                  <a:lnTo>
+                    <a:pt x="3587569" y="929233"/>
+                  </a:lnTo>
+                  <a:lnTo>
+                    <a:pt x="3657913" y="931058"/>
+                  </a:lnTo>
+                  <a:lnTo>
+                    <a:pt x="3728257" y="932872"/>
+                  </a:lnTo>
+                  <a:lnTo>
+                    <a:pt x="3798602" y="934674"/>
+                  </a:lnTo>
+                  <a:lnTo>
+                    <a:pt x="3868946" y="936464"/>
+                  </a:lnTo>
+                  <a:lnTo>
+                    <a:pt x="3939291" y="938243"/>
+                  </a:lnTo>
+                  <a:lnTo>
+                    <a:pt x="4009635" y="940011"/>
+                  </a:lnTo>
+                  <a:lnTo>
+                    <a:pt x="4079980" y="941767"/>
+                  </a:lnTo>
+                  <a:lnTo>
+                    <a:pt x="4150324" y="943512"/>
+                  </a:lnTo>
+                  <a:lnTo>
+                    <a:pt x="4220669" y="945246"/>
+                  </a:lnTo>
+                  <a:lnTo>
+                    <a:pt x="4291013" y="946969"/>
+                  </a:lnTo>
+                  <a:lnTo>
+                    <a:pt x="4361358" y="948680"/>
+                  </a:lnTo>
+                  <a:lnTo>
+                    <a:pt x="4431702" y="950381"/>
+                  </a:lnTo>
+                  <a:lnTo>
+                    <a:pt x="4502047" y="952071"/>
+                  </a:lnTo>
+                  <a:lnTo>
+                    <a:pt x="4572391" y="953750"/>
+                  </a:lnTo>
+                  <a:lnTo>
+                    <a:pt x="4642736" y="955419"/>
+                  </a:lnTo>
+                  <a:lnTo>
+                    <a:pt x="4713080" y="957076"/>
+                  </a:lnTo>
+                  <a:lnTo>
+                    <a:pt x="4783425" y="958723"/>
+                  </a:lnTo>
+                  <a:lnTo>
+                    <a:pt x="4853769" y="960360"/>
+                  </a:lnTo>
+                  <a:lnTo>
+                    <a:pt x="4924114" y="961986"/>
+                  </a:lnTo>
+                  <a:lnTo>
+                    <a:pt x="4994458" y="963601"/>
+                  </a:lnTo>
+                  <a:lnTo>
+                    <a:pt x="5064803" y="965207"/>
+                  </a:lnTo>
+                  <a:lnTo>
+                    <a:pt x="5135147" y="966802"/>
+                  </a:lnTo>
+                  <a:lnTo>
+                    <a:pt x="5205492" y="968387"/>
+                  </a:lnTo>
+                  <a:lnTo>
+                    <a:pt x="5275836" y="969961"/>
+                  </a:lnTo>
+                  <a:lnTo>
+                    <a:pt x="5346181" y="971526"/>
+                  </a:lnTo>
+                  <a:lnTo>
+                    <a:pt x="5416525" y="973080"/>
+                  </a:lnTo>
+                  <a:lnTo>
+                    <a:pt x="5486870" y="974625"/>
+                  </a:lnTo>
+                  <a:lnTo>
+                    <a:pt x="5557214" y="976160"/>
+                  </a:lnTo>
+                  <a:lnTo>
+                    <a:pt x="5627559" y="977685"/>
+                  </a:lnTo>
+                  <a:lnTo>
+                    <a:pt x="5697903" y="979200"/>
+                  </a:lnTo>
+                  <a:lnTo>
+                    <a:pt x="5768248" y="980705"/>
+                  </a:lnTo>
+                  <a:lnTo>
+                    <a:pt x="5838592" y="982201"/>
+                  </a:lnTo>
+                  <a:lnTo>
+                    <a:pt x="5908937" y="983687"/>
+                  </a:lnTo>
+                  <a:lnTo>
+                    <a:pt x="5979281" y="985164"/>
+                  </a:lnTo>
+                  <a:lnTo>
+                    <a:pt x="6049626" y="986631"/>
+                  </a:lnTo>
+                  <a:lnTo>
+                    <a:pt x="6119970" y="988089"/>
+                  </a:lnTo>
+                  <a:lnTo>
+                    <a:pt x="6190315" y="989538"/>
+                  </a:lnTo>
+                  <a:lnTo>
+                    <a:pt x="6260659" y="990977"/>
+                  </a:lnTo>
+                  <a:lnTo>
+                    <a:pt x="6331004" y="992407"/>
+                  </a:lnTo>
+                  <a:lnTo>
+                    <a:pt x="6401348" y="993828"/>
+                  </a:lnTo>
+                  <a:lnTo>
+                    <a:pt x="6471693" y="995240"/>
+                  </a:lnTo>
+                  <a:lnTo>
+                    <a:pt x="6542037" y="996643"/>
+                  </a:lnTo>
+                  <a:lnTo>
+                    <a:pt x="6612382" y="998037"/>
+                  </a:lnTo>
+                  <a:lnTo>
+                    <a:pt x="6682726" y="999422"/>
+                  </a:lnTo>
+                  <a:lnTo>
+                    <a:pt x="6753071" y="1000798"/>
+                  </a:lnTo>
+                  <a:lnTo>
+                    <a:pt x="6823415" y="1002165"/>
+                  </a:lnTo>
+                  <a:lnTo>
+                    <a:pt x="6893760" y="1003523"/>
+                  </a:lnTo>
+                  <a:lnTo>
+                    <a:pt x="6964104" y="1004873"/>
                   </a:lnTo>
                 </a:path>
               </a:pathLst>
@@ -4326,312 +4036,637 @@
           </p:nvSpPr>
           <p:spPr>
             <a:xfrm>
-              <a:off x="1172049" y="3636377"/>
-              <a:ext cx="7090630" cy="1637257"/>
+              <a:off x="1235312" y="3004613"/>
+              <a:ext cx="6964104" cy="345689"/>
             </a:xfrm>
             <a:custGeom>
               <a:avLst/>
               <a:pathLst>
-                <a:path w="7090630" h="1637257">
+                <a:path w="6964104" h="345689">
+                  <a:moveTo>
+                    <a:pt x="6964104" y="345689"/>
+                  </a:moveTo>
+                  <a:lnTo>
+                    <a:pt x="6893760" y="344052"/>
+                  </a:lnTo>
+                  <a:lnTo>
+                    <a:pt x="6823415" y="342361"/>
+                  </a:lnTo>
+                  <a:lnTo>
+                    <a:pt x="6753071" y="340615"/>
+                  </a:lnTo>
+                  <a:lnTo>
+                    <a:pt x="6682726" y="338812"/>
+                  </a:lnTo>
+                  <a:lnTo>
+                    <a:pt x="6612382" y="336949"/>
+                  </a:lnTo>
+                  <a:lnTo>
+                    <a:pt x="6542037" y="335026"/>
+                  </a:lnTo>
+                  <a:lnTo>
+                    <a:pt x="6471693" y="333040"/>
+                  </a:lnTo>
+                  <a:lnTo>
+                    <a:pt x="6401348" y="330988"/>
+                  </a:lnTo>
+                  <a:lnTo>
+                    <a:pt x="6331004" y="328870"/>
+                  </a:lnTo>
+                  <a:lnTo>
+                    <a:pt x="6260659" y="326682"/>
+                  </a:lnTo>
+                  <a:lnTo>
+                    <a:pt x="6190315" y="324422"/>
+                  </a:lnTo>
+                  <a:lnTo>
+                    <a:pt x="6119970" y="322088"/>
+                  </a:lnTo>
+                  <a:lnTo>
+                    <a:pt x="6049626" y="319678"/>
+                  </a:lnTo>
+                  <a:lnTo>
+                    <a:pt x="5979281" y="317189"/>
+                  </a:lnTo>
+                  <a:lnTo>
+                    <a:pt x="5908937" y="314619"/>
+                  </a:lnTo>
+                  <a:lnTo>
+                    <a:pt x="5838592" y="311964"/>
+                  </a:lnTo>
+                  <a:lnTo>
+                    <a:pt x="5768248" y="309223"/>
+                  </a:lnTo>
+                  <a:lnTo>
+                    <a:pt x="5697903" y="306391"/>
+                  </a:lnTo>
+                  <a:lnTo>
+                    <a:pt x="5627559" y="303467"/>
+                  </a:lnTo>
+                  <a:lnTo>
+                    <a:pt x="5557214" y="300447"/>
+                  </a:lnTo>
+                  <a:lnTo>
+                    <a:pt x="5486870" y="297328"/>
+                  </a:lnTo>
+                  <a:lnTo>
+                    <a:pt x="5416525" y="294108"/>
+                  </a:lnTo>
+                  <a:lnTo>
+                    <a:pt x="5346181" y="290781"/>
+                  </a:lnTo>
+                  <a:lnTo>
+                    <a:pt x="5275836" y="287346"/>
+                  </a:lnTo>
+                  <a:lnTo>
+                    <a:pt x="5205492" y="283798"/>
+                  </a:lnTo>
+                  <a:lnTo>
+                    <a:pt x="5135147" y="280134"/>
+                  </a:lnTo>
+                  <a:lnTo>
+                    <a:pt x="5064803" y="276350"/>
+                  </a:lnTo>
+                  <a:lnTo>
+                    <a:pt x="4994458" y="272442"/>
+                  </a:lnTo>
+                  <a:lnTo>
+                    <a:pt x="4924114" y="268406"/>
+                  </a:lnTo>
+                  <a:lnTo>
+                    <a:pt x="4853769" y="264238"/>
+                  </a:lnTo>
+                  <a:lnTo>
+                    <a:pt x="4783425" y="259934"/>
+                  </a:lnTo>
+                  <a:lnTo>
+                    <a:pt x="4713080" y="255488"/>
+                  </a:lnTo>
+                  <a:lnTo>
+                    <a:pt x="4642736" y="250897"/>
+                  </a:lnTo>
+                  <a:lnTo>
+                    <a:pt x="4572391" y="246155"/>
+                  </a:lnTo>
+                  <a:lnTo>
+                    <a:pt x="4502047" y="241259"/>
+                  </a:lnTo>
+                  <a:lnTo>
+                    <a:pt x="4431702" y="236201"/>
+                  </a:lnTo>
+                  <a:lnTo>
+                    <a:pt x="4361358" y="230979"/>
+                  </a:lnTo>
+                  <a:lnTo>
+                    <a:pt x="4291013" y="225585"/>
+                  </a:lnTo>
+                  <a:lnTo>
+                    <a:pt x="4220669" y="220015"/>
+                  </a:lnTo>
+                  <a:lnTo>
+                    <a:pt x="4150324" y="214262"/>
+                  </a:lnTo>
+                  <a:lnTo>
+                    <a:pt x="4079980" y="208320"/>
+                  </a:lnTo>
+                  <a:lnTo>
+                    <a:pt x="4009635" y="202185"/>
+                  </a:lnTo>
+                  <a:lnTo>
+                    <a:pt x="3939291" y="195848"/>
+                  </a:lnTo>
+                  <a:lnTo>
+                    <a:pt x="3868946" y="189304"/>
+                  </a:lnTo>
+                  <a:lnTo>
+                    <a:pt x="3798602" y="182545"/>
+                  </a:lnTo>
+                  <a:lnTo>
+                    <a:pt x="3728257" y="175565"/>
+                  </a:lnTo>
+                  <a:lnTo>
+                    <a:pt x="3657913" y="168357"/>
+                  </a:lnTo>
+                  <a:lnTo>
+                    <a:pt x="3587569" y="160912"/>
+                  </a:lnTo>
+                  <a:lnTo>
+                    <a:pt x="3517224" y="153224"/>
+                  </a:lnTo>
+                  <a:lnTo>
+                    <a:pt x="3446880" y="145283"/>
+                  </a:lnTo>
+                  <a:lnTo>
+                    <a:pt x="3376535" y="137083"/>
+                  </a:lnTo>
+                  <a:lnTo>
+                    <a:pt x="3306191" y="128615"/>
+                  </a:lnTo>
+                  <a:lnTo>
+                    <a:pt x="3235846" y="119868"/>
+                  </a:lnTo>
+                  <a:lnTo>
+                    <a:pt x="3165502" y="110836"/>
+                  </a:lnTo>
+                  <a:lnTo>
+                    <a:pt x="3095157" y="101508"/>
+                  </a:lnTo>
+                  <a:lnTo>
+                    <a:pt x="3024813" y="95460"/>
+                  </a:lnTo>
+                  <a:lnTo>
+                    <a:pt x="2954468" y="93527"/>
+                  </a:lnTo>
+                  <a:lnTo>
+                    <a:pt x="2884124" y="91580"/>
+                  </a:lnTo>
+                  <a:lnTo>
+                    <a:pt x="2813779" y="89621"/>
+                  </a:lnTo>
+                  <a:lnTo>
+                    <a:pt x="2743435" y="87650"/>
+                  </a:lnTo>
+                  <a:lnTo>
+                    <a:pt x="2673090" y="85666"/>
+                  </a:lnTo>
+                  <a:lnTo>
+                    <a:pt x="2602746" y="83669"/>
+                  </a:lnTo>
+                  <a:lnTo>
+                    <a:pt x="2532401" y="81659"/>
+                  </a:lnTo>
+                  <a:lnTo>
+                    <a:pt x="2462057" y="79636"/>
+                  </a:lnTo>
+                  <a:lnTo>
+                    <a:pt x="2391712" y="77601"/>
+                  </a:lnTo>
+                  <a:lnTo>
+                    <a:pt x="2321368" y="75552"/>
+                  </a:lnTo>
+                  <a:lnTo>
+                    <a:pt x="2251023" y="73490"/>
+                  </a:lnTo>
+                  <a:lnTo>
+                    <a:pt x="2180679" y="71414"/>
+                  </a:lnTo>
+                  <a:lnTo>
+                    <a:pt x="2110334" y="69326"/>
+                  </a:lnTo>
+                  <a:lnTo>
+                    <a:pt x="2039990" y="67223"/>
+                  </a:lnTo>
+                  <a:lnTo>
+                    <a:pt x="1969645" y="65108"/>
+                  </a:lnTo>
+                  <a:lnTo>
+                    <a:pt x="1899301" y="62978"/>
+                  </a:lnTo>
+                  <a:lnTo>
+                    <a:pt x="1828956" y="60835"/>
+                  </a:lnTo>
+                  <a:lnTo>
+                    <a:pt x="1758612" y="58678"/>
+                  </a:lnTo>
+                  <a:lnTo>
+                    <a:pt x="1688267" y="56508"/>
+                  </a:lnTo>
+                  <a:lnTo>
+                    <a:pt x="1617923" y="54323"/>
+                  </a:lnTo>
+                  <a:lnTo>
+                    <a:pt x="1547578" y="52124"/>
+                  </a:lnTo>
+                  <a:lnTo>
+                    <a:pt x="1477234" y="49911"/>
+                  </a:lnTo>
+                  <a:lnTo>
+                    <a:pt x="1406889" y="47684"/>
+                  </a:lnTo>
+                  <a:lnTo>
+                    <a:pt x="1336545" y="45442"/>
+                  </a:lnTo>
+                  <a:lnTo>
+                    <a:pt x="1266200" y="43186"/>
+                  </a:lnTo>
+                  <a:lnTo>
+                    <a:pt x="1195856" y="40916"/>
+                  </a:lnTo>
+                  <a:lnTo>
+                    <a:pt x="1125511" y="38630"/>
+                  </a:lnTo>
+                  <a:lnTo>
+                    <a:pt x="1055167" y="36330"/>
+                  </a:lnTo>
+                  <a:lnTo>
+                    <a:pt x="984822" y="34016"/>
+                  </a:lnTo>
+                  <a:lnTo>
+                    <a:pt x="914478" y="31686"/>
+                  </a:lnTo>
+                  <a:lnTo>
+                    <a:pt x="844133" y="29341"/>
+                  </a:lnTo>
+                  <a:lnTo>
+                    <a:pt x="773789" y="26982"/>
+                  </a:lnTo>
+                  <a:lnTo>
+                    <a:pt x="703444" y="24607"/>
+                  </a:lnTo>
+                  <a:lnTo>
+                    <a:pt x="633100" y="22217"/>
+                  </a:lnTo>
+                  <a:lnTo>
+                    <a:pt x="562755" y="19811"/>
+                  </a:lnTo>
+                  <a:lnTo>
+                    <a:pt x="492411" y="17390"/>
+                  </a:lnTo>
+                  <a:lnTo>
+                    <a:pt x="422066" y="14953"/>
+                  </a:lnTo>
+                  <a:lnTo>
+                    <a:pt x="351722" y="12501"/>
+                  </a:lnTo>
+                  <a:lnTo>
+                    <a:pt x="281377" y="10032"/>
+                  </a:lnTo>
+                  <a:lnTo>
+                    <a:pt x="211033" y="7548"/>
+                  </a:lnTo>
+                  <a:lnTo>
+                    <a:pt x="140688" y="5048"/>
+                  </a:lnTo>
+                  <a:lnTo>
+                    <a:pt x="70344" y="2532"/>
+                  </a:lnTo>
+                  <a:lnTo>
+                    <a:pt x="0" y="0"/>
+                  </a:lnTo>
+                </a:path>
+              </a:pathLst>
+            </a:custGeom>
+          </p:spPr>
+          <p:txBody>
+            <a:bodyPr/>
+            <a:lstStyle/>
+            <a:p/>
+          </p:txBody>
+        </p:sp>
+        <p:sp>
+          <p:nvSpPr>
+            <p:cNvPr id="26" name="pl26"/>
+            <p:cNvSpPr/>
+            <p:nvPr/>
+          </p:nvSpPr>
+          <p:spPr>
+            <a:xfrm>
+              <a:off x="1235312" y="2707096"/>
+              <a:ext cx="6964104" cy="590847"/>
+            </a:xfrm>
+            <a:custGeom>
+              <a:avLst/>
+              <a:pathLst>
+                <a:path w="6964104" h="590847">
                   <a:moveTo>
                     <a:pt x="0" y="0"/>
                   </a:moveTo>
                   <a:lnTo>
-                    <a:pt x="71622" y="36759"/>
-                  </a:lnTo>
-                  <a:lnTo>
-                    <a:pt x="143245" y="72815"/>
-                  </a:lnTo>
-                  <a:lnTo>
-                    <a:pt x="214867" y="108181"/>
-                  </a:lnTo>
-                  <a:lnTo>
-                    <a:pt x="286490" y="142871"/>
-                  </a:lnTo>
-                  <a:lnTo>
-                    <a:pt x="358112" y="176896"/>
-                  </a:lnTo>
-                  <a:lnTo>
-                    <a:pt x="429735" y="210270"/>
-                  </a:lnTo>
-                  <a:lnTo>
-                    <a:pt x="501357" y="243006"/>
-                  </a:lnTo>
-                  <a:lnTo>
-                    <a:pt x="572980" y="275115"/>
-                  </a:lnTo>
-                  <a:lnTo>
-                    <a:pt x="644602" y="306610"/>
-                  </a:lnTo>
-                  <a:lnTo>
-                    <a:pt x="716225" y="337502"/>
-                  </a:lnTo>
-                  <a:lnTo>
-                    <a:pt x="787847" y="367803"/>
-                  </a:lnTo>
-                  <a:lnTo>
-                    <a:pt x="859470" y="397524"/>
-                  </a:lnTo>
-                  <a:lnTo>
-                    <a:pt x="931092" y="426676"/>
-                  </a:lnTo>
-                  <a:lnTo>
-                    <a:pt x="1002715" y="455270"/>
-                  </a:lnTo>
-                  <a:lnTo>
-                    <a:pt x="1074337" y="483317"/>
-                  </a:lnTo>
-                  <a:lnTo>
-                    <a:pt x="1145960" y="510827"/>
-                  </a:lnTo>
-                  <a:lnTo>
-                    <a:pt x="1217582" y="537811"/>
-                  </a:lnTo>
-                  <a:lnTo>
-                    <a:pt x="1289205" y="564279"/>
-                  </a:lnTo>
-                  <a:lnTo>
-                    <a:pt x="1360827" y="590240"/>
-                  </a:lnTo>
-                  <a:lnTo>
-                    <a:pt x="1432450" y="615704"/>
-                  </a:lnTo>
-                  <a:lnTo>
-                    <a:pt x="1504073" y="640681"/>
-                  </a:lnTo>
-                  <a:lnTo>
-                    <a:pt x="1575695" y="665180"/>
-                  </a:lnTo>
-                  <a:lnTo>
-                    <a:pt x="1647318" y="689210"/>
-                  </a:lnTo>
-                  <a:lnTo>
-                    <a:pt x="1718940" y="712780"/>
-                  </a:lnTo>
-                  <a:lnTo>
-                    <a:pt x="1790563" y="735899"/>
-                  </a:lnTo>
-                  <a:lnTo>
-                    <a:pt x="1862185" y="758576"/>
-                  </a:lnTo>
-                  <a:lnTo>
-                    <a:pt x="1933808" y="780819"/>
-                  </a:lnTo>
-                  <a:lnTo>
-                    <a:pt x="2005430" y="802636"/>
-                  </a:lnTo>
-                  <a:lnTo>
-                    <a:pt x="2077053" y="824035"/>
-                  </a:lnTo>
-                  <a:lnTo>
-                    <a:pt x="2148675" y="845025"/>
-                  </a:lnTo>
-                  <a:lnTo>
-                    <a:pt x="2220298" y="865614"/>
-                  </a:lnTo>
-                  <a:lnTo>
-                    <a:pt x="2291920" y="885808"/>
-                  </a:lnTo>
-                  <a:lnTo>
-                    <a:pt x="2363543" y="905616"/>
-                  </a:lnTo>
-                  <a:lnTo>
-                    <a:pt x="2435165" y="925045"/>
-                  </a:lnTo>
-                  <a:lnTo>
-                    <a:pt x="2506788" y="944102"/>
-                  </a:lnTo>
-                  <a:lnTo>
-                    <a:pt x="2578410" y="962794"/>
-                  </a:lnTo>
-                  <a:lnTo>
-                    <a:pt x="2650033" y="981129"/>
-                  </a:lnTo>
-                  <a:lnTo>
-                    <a:pt x="2721655" y="999113"/>
-                  </a:lnTo>
-                  <a:lnTo>
-                    <a:pt x="2793278" y="1016752"/>
-                  </a:lnTo>
-                  <a:lnTo>
-                    <a:pt x="2864901" y="1034054"/>
-                  </a:lnTo>
-                  <a:lnTo>
-                    <a:pt x="2936523" y="1051025"/>
-                  </a:lnTo>
-                  <a:lnTo>
-                    <a:pt x="3008146" y="1067672"/>
-                  </a:lnTo>
-                  <a:lnTo>
-                    <a:pt x="3079768" y="1083999"/>
-                  </a:lnTo>
-                  <a:lnTo>
-                    <a:pt x="3151391" y="1100014"/>
-                  </a:lnTo>
-                  <a:lnTo>
-                    <a:pt x="3223013" y="1115723"/>
-                  </a:lnTo>
-                  <a:lnTo>
-                    <a:pt x="3294636" y="1131131"/>
-                  </a:lnTo>
-                  <a:lnTo>
-                    <a:pt x="3366258" y="1146244"/>
-                  </a:lnTo>
-                  <a:lnTo>
-                    <a:pt x="3437881" y="1161068"/>
-                  </a:lnTo>
-                  <a:lnTo>
-                    <a:pt x="3509503" y="1175609"/>
-                  </a:lnTo>
-                  <a:lnTo>
-                    <a:pt x="3581126" y="1189871"/>
-                  </a:lnTo>
-                  <a:lnTo>
-                    <a:pt x="3652748" y="1203860"/>
-                  </a:lnTo>
-                  <a:lnTo>
-                    <a:pt x="3724371" y="1217581"/>
-                  </a:lnTo>
-                  <a:lnTo>
-                    <a:pt x="3795993" y="1231040"/>
-                  </a:lnTo>
-                  <a:lnTo>
-                    <a:pt x="3867616" y="1244241"/>
-                  </a:lnTo>
-                  <a:lnTo>
-                    <a:pt x="3939238" y="1257190"/>
-                  </a:lnTo>
-                  <a:lnTo>
-                    <a:pt x="4010861" y="1269891"/>
-                  </a:lnTo>
-                  <a:lnTo>
-                    <a:pt x="4082483" y="1282348"/>
-                  </a:lnTo>
-                  <a:lnTo>
-                    <a:pt x="4154106" y="1294568"/>
-                  </a:lnTo>
-                  <a:lnTo>
-                    <a:pt x="4225729" y="1306553"/>
-                  </a:lnTo>
-                  <a:lnTo>
-                    <a:pt x="4297351" y="1318309"/>
-                  </a:lnTo>
-                  <a:lnTo>
-                    <a:pt x="4368974" y="1329841"/>
-                  </a:lnTo>
-                  <a:lnTo>
-                    <a:pt x="4440596" y="1341151"/>
-                  </a:lnTo>
-                  <a:lnTo>
-                    <a:pt x="4512219" y="1352245"/>
-                  </a:lnTo>
-                  <a:lnTo>
-                    <a:pt x="4583841" y="1363127"/>
-                  </a:lnTo>
-                  <a:lnTo>
-                    <a:pt x="4655464" y="1373800"/>
-                  </a:lnTo>
-                  <a:lnTo>
-                    <a:pt x="4727086" y="1384270"/>
-                  </a:lnTo>
-                  <a:lnTo>
-                    <a:pt x="4798709" y="1394539"/>
-                  </a:lnTo>
-                  <a:lnTo>
-                    <a:pt x="4870331" y="1404611"/>
-                  </a:lnTo>
-                  <a:lnTo>
-                    <a:pt x="4941954" y="1414491"/>
-                  </a:lnTo>
-                  <a:lnTo>
-                    <a:pt x="5013576" y="1424181"/>
-                  </a:lnTo>
-                  <a:lnTo>
-                    <a:pt x="5085199" y="1433686"/>
-                  </a:lnTo>
-                  <a:lnTo>
-                    <a:pt x="5156821" y="1443010"/>
-                  </a:lnTo>
-                  <a:lnTo>
-                    <a:pt x="5228444" y="1452154"/>
-                  </a:lnTo>
-                  <a:lnTo>
-                    <a:pt x="5300066" y="1461124"/>
-                  </a:lnTo>
-                  <a:lnTo>
-                    <a:pt x="5371689" y="1469922"/>
-                  </a:lnTo>
-                  <a:lnTo>
-                    <a:pt x="5443311" y="1478552"/>
-                  </a:lnTo>
-                  <a:lnTo>
-                    <a:pt x="5514934" y="1487017"/>
-                  </a:lnTo>
-                  <a:lnTo>
-                    <a:pt x="5586557" y="1495319"/>
-                  </a:lnTo>
-                  <a:lnTo>
-                    <a:pt x="5658179" y="1503463"/>
-                  </a:lnTo>
-                  <a:lnTo>
-                    <a:pt x="5729802" y="1511451"/>
-                  </a:lnTo>
-                  <a:lnTo>
-                    <a:pt x="5801424" y="1519286"/>
-                  </a:lnTo>
-                  <a:lnTo>
-                    <a:pt x="5873047" y="1526971"/>
-                  </a:lnTo>
-                  <a:lnTo>
-                    <a:pt x="5944669" y="1534509"/>
-                  </a:lnTo>
-                  <a:lnTo>
-                    <a:pt x="6016292" y="1541903"/>
-                  </a:lnTo>
-                  <a:lnTo>
-                    <a:pt x="6087914" y="1549155"/>
-                  </a:lnTo>
-                  <a:lnTo>
-                    <a:pt x="6159537" y="1556269"/>
-                  </a:lnTo>
-                  <a:lnTo>
-                    <a:pt x="6231159" y="1563246"/>
-                  </a:lnTo>
-                  <a:lnTo>
-                    <a:pt x="6302782" y="1570090"/>
-                  </a:lnTo>
-                  <a:lnTo>
-                    <a:pt x="6374404" y="1576803"/>
-                  </a:lnTo>
-                  <a:lnTo>
-                    <a:pt x="6446027" y="1583387"/>
-                  </a:lnTo>
-                  <a:lnTo>
-                    <a:pt x="6517649" y="1589846"/>
-                  </a:lnTo>
-                  <a:lnTo>
-                    <a:pt x="6589272" y="1596181"/>
-                  </a:lnTo>
-                  <a:lnTo>
-                    <a:pt x="6660894" y="1602394"/>
-                  </a:lnTo>
-                  <a:lnTo>
-                    <a:pt x="6732517" y="1608489"/>
-                  </a:lnTo>
-                  <a:lnTo>
-                    <a:pt x="6804139" y="1614467"/>
-                  </a:lnTo>
-                  <a:lnTo>
-                    <a:pt x="6875762" y="1620331"/>
-                  </a:lnTo>
-                  <a:lnTo>
-                    <a:pt x="6947385" y="1626082"/>
-                  </a:lnTo>
-                  <a:lnTo>
-                    <a:pt x="7019007" y="1631723"/>
-                  </a:lnTo>
-                  <a:lnTo>
-                    <a:pt x="7090630" y="1637257"/>
+                    <a:pt x="70344" y="13265"/>
+                  </a:lnTo>
+                  <a:lnTo>
+                    <a:pt x="140688" y="26277"/>
+                  </a:lnTo>
+                  <a:lnTo>
+                    <a:pt x="211033" y="39040"/>
+                  </a:lnTo>
+                  <a:lnTo>
+                    <a:pt x="281377" y="51558"/>
+                  </a:lnTo>
+                  <a:lnTo>
+                    <a:pt x="351722" y="63837"/>
+                  </a:lnTo>
+                  <a:lnTo>
+                    <a:pt x="422066" y="75881"/>
+                  </a:lnTo>
+                  <a:lnTo>
+                    <a:pt x="492411" y="87695"/>
+                  </a:lnTo>
+                  <a:lnTo>
+                    <a:pt x="562755" y="99282"/>
+                  </a:lnTo>
+                  <a:lnTo>
+                    <a:pt x="633100" y="110648"/>
+                  </a:lnTo>
+                  <a:lnTo>
+                    <a:pt x="703444" y="121796"/>
+                  </a:lnTo>
+                  <a:lnTo>
+                    <a:pt x="773789" y="132731"/>
+                  </a:lnTo>
+                  <a:lnTo>
+                    <a:pt x="844133" y="143457"/>
+                  </a:lnTo>
+                  <a:lnTo>
+                    <a:pt x="914478" y="153977"/>
+                  </a:lnTo>
+                  <a:lnTo>
+                    <a:pt x="984822" y="164296"/>
+                  </a:lnTo>
+                  <a:lnTo>
+                    <a:pt x="1055167" y="174417"/>
+                  </a:lnTo>
+                  <a:lnTo>
+                    <a:pt x="1125511" y="184345"/>
+                  </a:lnTo>
+                  <a:lnTo>
+                    <a:pt x="1195856" y="194083"/>
+                  </a:lnTo>
+                  <a:lnTo>
+                    <a:pt x="1266200" y="203635"/>
+                  </a:lnTo>
+                  <a:lnTo>
+                    <a:pt x="1336545" y="213003"/>
+                  </a:lnTo>
+                  <a:lnTo>
+                    <a:pt x="1406889" y="222193"/>
+                  </a:lnTo>
+                  <a:lnTo>
+                    <a:pt x="1477234" y="231206"/>
+                  </a:lnTo>
+                  <a:lnTo>
+                    <a:pt x="1547578" y="240047"/>
+                  </a:lnTo>
+                  <a:lnTo>
+                    <a:pt x="1617923" y="248719"/>
+                  </a:lnTo>
+                  <a:lnTo>
+                    <a:pt x="1688267" y="257225"/>
+                  </a:lnTo>
+                  <a:lnTo>
+                    <a:pt x="1758612" y="265568"/>
+                  </a:lnTo>
+                  <a:lnTo>
+                    <a:pt x="1828956" y="273752"/>
+                  </a:lnTo>
+                  <a:lnTo>
+                    <a:pt x="1899301" y="281779"/>
+                  </a:lnTo>
+                  <a:lnTo>
+                    <a:pt x="1969645" y="289652"/>
+                  </a:lnTo>
+                  <a:lnTo>
+                    <a:pt x="2039990" y="297375"/>
+                  </a:lnTo>
+                  <a:lnTo>
+                    <a:pt x="2110334" y="304949"/>
+                  </a:lnTo>
+                  <a:lnTo>
+                    <a:pt x="2180679" y="312379"/>
+                  </a:lnTo>
+                  <a:lnTo>
+                    <a:pt x="2251023" y="319667"/>
+                  </a:lnTo>
+                  <a:lnTo>
+                    <a:pt x="2321368" y="326815"/>
+                  </a:lnTo>
+                  <a:lnTo>
+                    <a:pt x="2391712" y="333827"/>
+                  </a:lnTo>
+                  <a:lnTo>
+                    <a:pt x="2462057" y="340704"/>
+                  </a:lnTo>
+                  <a:lnTo>
+                    <a:pt x="2532401" y="347450"/>
+                  </a:lnTo>
+                  <a:lnTo>
+                    <a:pt x="2602746" y="354066"/>
+                  </a:lnTo>
+                  <a:lnTo>
+                    <a:pt x="2673090" y="360556"/>
+                  </a:lnTo>
+                  <a:lnTo>
+                    <a:pt x="2743435" y="366922"/>
+                  </a:lnTo>
+                  <a:lnTo>
+                    <a:pt x="2813779" y="373166"/>
+                  </a:lnTo>
+                  <a:lnTo>
+                    <a:pt x="2884124" y="379290"/>
+                  </a:lnTo>
+                  <a:lnTo>
+                    <a:pt x="2954468" y="385297"/>
+                  </a:lnTo>
+                  <a:lnTo>
+                    <a:pt x="3024813" y="391189"/>
+                  </a:lnTo>
+                  <a:lnTo>
+                    <a:pt x="3095157" y="396969"/>
+                  </a:lnTo>
+                  <a:lnTo>
+                    <a:pt x="3165502" y="402638"/>
+                  </a:lnTo>
+                  <a:lnTo>
+                    <a:pt x="3235846" y="408198"/>
+                  </a:lnTo>
+                  <a:lnTo>
+                    <a:pt x="3306191" y="413652"/>
+                  </a:lnTo>
+                  <a:lnTo>
+                    <a:pt x="3376535" y="419002"/>
+                  </a:lnTo>
+                  <a:lnTo>
+                    <a:pt x="3446880" y="424249"/>
+                  </a:lnTo>
+                  <a:lnTo>
+                    <a:pt x="3517224" y="429396"/>
+                  </a:lnTo>
+                  <a:lnTo>
+                    <a:pt x="3587569" y="434444"/>
+                  </a:lnTo>
+                  <a:lnTo>
+                    <a:pt x="3657913" y="439396"/>
+                  </a:lnTo>
+                  <a:lnTo>
+                    <a:pt x="3728257" y="444253"/>
+                  </a:lnTo>
+                  <a:lnTo>
+                    <a:pt x="3798602" y="449017"/>
+                  </a:lnTo>
+                  <a:lnTo>
+                    <a:pt x="3868946" y="453690"/>
+                  </a:lnTo>
+                  <a:lnTo>
+                    <a:pt x="3939291" y="458273"/>
+                  </a:lnTo>
+                  <a:lnTo>
+                    <a:pt x="4009635" y="462769"/>
+                  </a:lnTo>
+                  <a:lnTo>
+                    <a:pt x="4079980" y="467179"/>
+                  </a:lnTo>
+                  <a:lnTo>
+                    <a:pt x="4150324" y="471504"/>
+                  </a:lnTo>
+                  <a:lnTo>
+                    <a:pt x="4220669" y="475747"/>
+                  </a:lnTo>
+                  <a:lnTo>
+                    <a:pt x="4291013" y="479908"/>
+                  </a:lnTo>
+                  <a:lnTo>
+                    <a:pt x="4361358" y="483990"/>
+                  </a:lnTo>
+                  <a:lnTo>
+                    <a:pt x="4431702" y="487993"/>
+                  </a:lnTo>
+                  <a:lnTo>
+                    <a:pt x="4502047" y="491920"/>
+                  </a:lnTo>
+                  <a:lnTo>
+                    <a:pt x="4572391" y="495772"/>
+                  </a:lnTo>
+                  <a:lnTo>
+                    <a:pt x="4642736" y="499550"/>
+                  </a:lnTo>
+                  <a:lnTo>
+                    <a:pt x="4713080" y="503256"/>
+                  </a:lnTo>
+                  <a:lnTo>
+                    <a:pt x="4783425" y="506891"/>
+                  </a:lnTo>
+                  <a:lnTo>
+                    <a:pt x="4853769" y="510456"/>
+                  </a:lnTo>
+                  <a:lnTo>
+                    <a:pt x="4924114" y="513953"/>
+                  </a:lnTo>
+                  <a:lnTo>
+                    <a:pt x="4994458" y="517383"/>
+                  </a:lnTo>
+                  <a:lnTo>
+                    <a:pt x="5064803" y="520748"/>
+                  </a:lnTo>
+                  <a:lnTo>
+                    <a:pt x="5135147" y="524048"/>
+                  </a:lnTo>
+                  <a:lnTo>
+                    <a:pt x="5205492" y="527285"/>
+                  </a:lnTo>
+                  <a:lnTo>
+                    <a:pt x="5275836" y="530460"/>
+                  </a:lnTo>
+                  <a:lnTo>
+                    <a:pt x="5346181" y="533574"/>
+                  </a:lnTo>
+                  <a:lnTo>
+                    <a:pt x="5416525" y="536629"/>
+                  </a:lnTo>
+                  <a:lnTo>
+                    <a:pt x="5486870" y="539625"/>
+                  </a:lnTo>
+                  <a:lnTo>
+                    <a:pt x="5557214" y="542564"/>
+                  </a:lnTo>
+                  <a:lnTo>
+                    <a:pt x="5627559" y="545447"/>
+                  </a:lnTo>
+                  <a:lnTo>
+                    <a:pt x="5697903" y="548274"/>
+                  </a:lnTo>
+                  <a:lnTo>
+                    <a:pt x="5768248" y="551048"/>
+                  </a:lnTo>
+                  <a:lnTo>
+                    <a:pt x="5838592" y="553768"/>
+                  </a:lnTo>
+                  <a:lnTo>
+                    <a:pt x="5908937" y="556436"/>
+                  </a:lnTo>
+                  <a:lnTo>
+                    <a:pt x="5979281" y="559053"/>
+                  </a:lnTo>
+                  <a:lnTo>
+                    <a:pt x="6049626" y="561620"/>
+                  </a:lnTo>
+                  <a:lnTo>
+                    <a:pt x="6119970" y="564138"/>
+                  </a:lnTo>
+                  <a:lnTo>
+                    <a:pt x="6190315" y="566608"/>
+                  </a:lnTo>
+                  <a:lnTo>
+                    <a:pt x="6260659" y="569031"/>
+                  </a:lnTo>
+                  <a:lnTo>
+                    <a:pt x="6331004" y="571407"/>
+                  </a:lnTo>
+                  <a:lnTo>
+                    <a:pt x="6401348" y="573738"/>
+                  </a:lnTo>
+                  <a:lnTo>
+                    <a:pt x="6471693" y="576024"/>
+                  </a:lnTo>
+                  <a:lnTo>
+                    <a:pt x="6542037" y="578266"/>
+                  </a:lnTo>
+                  <a:lnTo>
+                    <a:pt x="6612382" y="580465"/>
+                  </a:lnTo>
+                  <a:lnTo>
+                    <a:pt x="6682726" y="582623"/>
+                  </a:lnTo>
+                  <a:lnTo>
+                    <a:pt x="6753071" y="584739"/>
+                  </a:lnTo>
+                  <a:lnTo>
+                    <a:pt x="6823415" y="586814"/>
+                  </a:lnTo>
+                  <a:lnTo>
+                    <a:pt x="6893760" y="588850"/>
+                  </a:lnTo>
+                  <a:lnTo>
+                    <a:pt x="6964104" y="590847"/>
                   </a:lnTo>
                 </a:path>
               </a:pathLst>
@@ -4654,27 +4689,27 @@
         </p:sp>
         <p:sp>
           <p:nvSpPr>
-            <p:cNvPr id="26" name="pl26"/>
+            <p:cNvPr id="27" name="pl27"/>
             <p:cNvSpPr/>
             <p:nvPr/>
           </p:nvSpPr>
           <p:spPr>
             <a:xfrm>
-              <a:off x="817517" y="4727786"/>
-              <a:ext cx="7799693" cy="0"/>
+              <a:off x="887106" y="3100960"/>
+              <a:ext cx="7660515" cy="0"/>
             </a:xfrm>
             <a:custGeom>
               <a:avLst/>
               <a:pathLst>
-                <a:path w="7799693" h="0">
+                <a:path w="7660515" h="0">
                   <a:moveTo>
                     <a:pt x="0" y="0"/>
                   </a:moveTo>
                   <a:lnTo>
-                    <a:pt x="7799693" y="0"/>
-                  </a:lnTo>
-                  <a:lnTo>
-                    <a:pt x="7799693" y="0"/>
+                    <a:pt x="7660515" y="0"/>
+                  </a:lnTo>
+                  <a:lnTo>
+                    <a:pt x="7660515" y="0"/>
                   </a:lnTo>
                 </a:path>
               </a:pathLst>
@@ -4697,21 +4732,21 @@
         </p:sp>
         <p:sp>
           <p:nvSpPr>
-            <p:cNvPr id="27" name="pl27"/>
+            <p:cNvPr id="28" name="pl28"/>
             <p:cNvSpPr/>
             <p:nvPr/>
           </p:nvSpPr>
           <p:spPr>
             <a:xfrm>
-              <a:off x="4284781" y="2073503"/>
-              <a:ext cx="0" cy="3649639"/>
+              <a:off x="4292500" y="2143092"/>
+              <a:ext cx="0" cy="1317069"/>
             </a:xfrm>
             <a:custGeom>
               <a:avLst/>
               <a:pathLst>
-                <a:path w="0" h="3649639">
+                <a:path w="0" h="1317069">
                   <a:moveTo>
-                    <a:pt x="0" y="3649639"/>
+                    <a:pt x="0" y="1317069"/>
                   </a:moveTo>
                   <a:lnTo>
                     <a:pt x="0" y="0"/>
@@ -4740,21 +4775,21 @@
         </p:sp>
         <p:sp>
           <p:nvSpPr>
-            <p:cNvPr id="28" name="pl28"/>
+            <p:cNvPr id="29" name="pl29"/>
             <p:cNvSpPr/>
             <p:nvPr/>
           </p:nvSpPr>
           <p:spPr>
             <a:xfrm>
-              <a:off x="3095906" y="2073503"/>
-              <a:ext cx="0" cy="3649639"/>
+              <a:off x="3124839" y="2143092"/>
+              <a:ext cx="0" cy="1317069"/>
             </a:xfrm>
             <a:custGeom>
               <a:avLst/>
               <a:pathLst>
-                <a:path w="0" h="3649639">
+                <a:path w="0" h="1317069">
                   <a:moveTo>
-                    <a:pt x="0" y="3649639"/>
+                    <a:pt x="0" y="1317069"/>
                   </a:moveTo>
                   <a:lnTo>
                     <a:pt x="0" y="0"/>
@@ -4783,21 +4818,21 @@
         </p:sp>
         <p:sp>
           <p:nvSpPr>
-            <p:cNvPr id="29" name="pl29"/>
+            <p:cNvPr id="30" name="pl30"/>
             <p:cNvSpPr/>
             <p:nvPr/>
           </p:nvSpPr>
           <p:spPr>
             <a:xfrm>
-              <a:off x="5522967" y="2073503"/>
-              <a:ext cx="0" cy="3649639"/>
+              <a:off x="5508592" y="2143092"/>
+              <a:ext cx="0" cy="1317069"/>
             </a:xfrm>
             <a:custGeom>
               <a:avLst/>
               <a:pathLst>
-                <a:path w="0" h="3649639">
+                <a:path w="0" h="1317069">
                   <a:moveTo>
-                    <a:pt x="0" y="3649639"/>
+                    <a:pt x="0" y="1317069"/>
                   </a:moveTo>
                   <a:lnTo>
                     <a:pt x="0" y="0"/>
@@ -4826,13 +4861,13 @@
         </p:sp>
         <p:sp>
           <p:nvSpPr>
-            <p:cNvPr id="30" name="tx30"/>
+            <p:cNvPr id="31" name="tx31"/>
             <p:cNvSpPr/>
             <p:nvPr/>
           </p:nvSpPr>
           <p:spPr>
             <a:xfrm>
-              <a:off x="692708" y="5517199"/>
+              <a:off x="762297" y="3360243"/>
               <a:ext cx="62179" cy="80101"/>
             </a:xfrm>
             <a:prstGeom prst="rect">
@@ -4872,13 +4907,13 @@
         </p:sp>
         <p:sp>
           <p:nvSpPr>
-            <p:cNvPr id="31" name="tx31"/>
+            <p:cNvPr id="32" name="tx32"/>
             <p:cNvSpPr/>
             <p:nvPr/>
           </p:nvSpPr>
           <p:spPr>
             <a:xfrm>
-              <a:off x="692708" y="4687735"/>
+              <a:off x="762297" y="3060909"/>
               <a:ext cx="62179" cy="80101"/>
             </a:xfrm>
             <a:prstGeom prst="rect">
@@ -4918,13 +4953,13 @@
         </p:sp>
         <p:sp>
           <p:nvSpPr>
-            <p:cNvPr id="32" name="tx32"/>
+            <p:cNvPr id="33" name="tx33"/>
             <p:cNvSpPr/>
             <p:nvPr/>
           </p:nvSpPr>
           <p:spPr>
             <a:xfrm>
-              <a:off x="692708" y="3858272"/>
+              <a:off x="762297" y="2761575"/>
               <a:ext cx="62179" cy="80101"/>
             </a:xfrm>
             <a:prstGeom prst="rect">
@@ -4964,13 +4999,13 @@
         </p:sp>
         <p:sp>
           <p:nvSpPr>
-            <p:cNvPr id="33" name="tx33"/>
+            <p:cNvPr id="34" name="tx34"/>
             <p:cNvSpPr/>
             <p:nvPr/>
           </p:nvSpPr>
           <p:spPr>
             <a:xfrm>
-              <a:off x="692708" y="3028808"/>
+              <a:off x="762297" y="2462242"/>
               <a:ext cx="62179" cy="80101"/>
             </a:xfrm>
             <a:prstGeom prst="rect">
@@ -5010,13 +5045,13 @@
         </p:sp>
         <p:sp>
           <p:nvSpPr>
-            <p:cNvPr id="34" name="tx34"/>
+            <p:cNvPr id="35" name="tx35"/>
             <p:cNvSpPr/>
             <p:nvPr/>
           </p:nvSpPr>
           <p:spPr>
             <a:xfrm>
-              <a:off x="692708" y="2199345"/>
+              <a:off x="762297" y="2162908"/>
               <a:ext cx="62179" cy="80101"/>
             </a:xfrm>
             <a:prstGeom prst="rect">
@@ -5056,13 +5091,13 @@
         </p:sp>
         <p:sp>
           <p:nvSpPr>
-            <p:cNvPr id="35" name="tx35"/>
+            <p:cNvPr id="36" name="tx36"/>
             <p:cNvSpPr/>
             <p:nvPr/>
           </p:nvSpPr>
           <p:spPr>
             <a:xfrm>
-              <a:off x="2152181" y="5785772"/>
+              <a:off x="2196512" y="3522791"/>
               <a:ext cx="161574" cy="80101"/>
             </a:xfrm>
             <a:prstGeom prst="rect">
@@ -5102,13 +5137,13 @@
         </p:sp>
         <p:sp>
           <p:nvSpPr>
-            <p:cNvPr id="36" name="tx36"/>
+            <p:cNvPr id="37" name="tx37"/>
             <p:cNvSpPr/>
             <p:nvPr/>
           </p:nvSpPr>
           <p:spPr>
             <a:xfrm>
-              <a:off x="3884104" y="5785772"/>
+              <a:off x="3897531" y="3522791"/>
               <a:ext cx="161574" cy="80101"/>
             </a:xfrm>
             <a:prstGeom prst="rect">
@@ -5148,13 +5183,13 @@
         </p:sp>
         <p:sp>
           <p:nvSpPr>
-            <p:cNvPr id="37" name="tx37"/>
+            <p:cNvPr id="38" name="tx38"/>
             <p:cNvSpPr/>
             <p:nvPr/>
           </p:nvSpPr>
           <p:spPr>
             <a:xfrm>
-              <a:off x="5665725" y="5785772"/>
+              <a:off x="5648248" y="3522791"/>
               <a:ext cx="62179" cy="80101"/>
             </a:xfrm>
             <a:prstGeom prst="rect">
@@ -5194,13 +5229,13 @@
         </p:sp>
         <p:sp>
           <p:nvSpPr>
-            <p:cNvPr id="38" name="tx38"/>
+            <p:cNvPr id="39" name="tx39"/>
             <p:cNvSpPr/>
             <p:nvPr/>
           </p:nvSpPr>
           <p:spPr>
             <a:xfrm>
-              <a:off x="7366559" y="5785772"/>
+              <a:off x="7318177" y="3522791"/>
               <a:ext cx="124358" cy="80101"/>
             </a:xfrm>
             <a:prstGeom prst="rect">
@@ -5240,13 +5275,13 @@
         </p:sp>
         <p:sp>
           <p:nvSpPr>
-            <p:cNvPr id="39" name="tx39"/>
+            <p:cNvPr id="40" name="tx40"/>
             <p:cNvSpPr/>
             <p:nvPr/>
           </p:nvSpPr>
           <p:spPr>
             <a:xfrm>
-              <a:off x="1561815" y="5925448"/>
+              <a:off x="1561815" y="3662467"/>
               <a:ext cx="6311097" cy="100218"/>
             </a:xfrm>
             <a:prstGeom prst="rect">
@@ -5286,13 +5321,13 @@
         </p:sp>
         <p:sp>
           <p:nvSpPr>
-            <p:cNvPr id="40" name="tx40"/>
+            <p:cNvPr id="41" name="tx41"/>
             <p:cNvSpPr/>
             <p:nvPr/>
           </p:nvSpPr>
           <p:spPr>
             <a:xfrm rot="-5400000">
-              <a:off x="68446" y="3848213"/>
+              <a:off x="138035" y="2751517"/>
               <a:ext cx="1016904" cy="100218"/>
             </a:xfrm>
             <a:prstGeom prst="rect">
@@ -5332,13 +5367,13 @@
         </p:sp>
         <p:sp>
           <p:nvSpPr>
-            <p:cNvPr id="41" name="tx41"/>
+            <p:cNvPr id="42" name="tx42"/>
             <p:cNvSpPr/>
             <p:nvPr/>
           </p:nvSpPr>
           <p:spPr>
             <a:xfrm>
-              <a:off x="817517" y="1896563"/>
+              <a:off x="887106" y="1966152"/>
               <a:ext cx="6959864" cy="82021"/>
             </a:xfrm>
             <a:prstGeom prst="rect">
@@ -5378,13 +5413,3789 @@
         </p:sp>
         <p:sp>
           <p:nvSpPr>
-            <p:cNvPr id="42" name="tx42"/>
+            <p:cNvPr id="43" name="tx43"/>
             <p:cNvSpPr/>
             <p:nvPr/>
           </p:nvSpPr>
           <p:spPr>
             <a:xfrm>
-              <a:off x="817517" y="1669789"/>
+              <a:off x="887106" y="1739378"/>
+              <a:ext cx="3081985" cy="120152"/>
+            </a:xfrm>
+            <a:prstGeom prst="rect">
+              <a:avLst/>
+            </a:prstGeom>
+            <a:noFill/>
+          </p:spPr>
+          <p:txBody>
+            <a:bodyPr lIns="0" rIns="0" tIns="0" bIns="0" anchorCtr="1" anchor="ctr" wrap="none"/>
+            <a:lstStyle/>
+            <a:p>
+              <a:pPr algn="l" marL="0" marR="0" indent="0">
+                <a:lnSpc>
+                  <a:spcPts val="1320"/>
+                </a:lnSpc>
+                <a:spcBef>
+                  <a:spcPts val="0"/>
+                </a:spcBef>
+                <a:spcAft>
+                  <a:spcPts val="0"/>
+                </a:spcAft>
+              </a:pPr>
+              <a:r>
+                <a:rPr sz="1320">
+                  <a:solidFill>
+                    <a:srgbClr val="000000">
+                      <a:alpha val="100000"/>
+                    </a:srgbClr>
+                  </a:solidFill>
+                  <a:latin typeface="Helvetica"/>
+                  <a:cs typeface="Helvetica"/>
+                </a:rPr>
+                <a:t>Anemia Grade 3 (Sensitivity, Carboplatin)</a:t>
+              </a:r>
+            </a:p>
+          </p:txBody>
+        </p:sp>
+        <p:sp>
+          <p:nvSpPr>
+            <p:cNvPr id="44" name="pl44"/>
+            <p:cNvSpPr/>
+            <p:nvPr/>
+          </p:nvSpPr>
+          <p:spPr>
+            <a:xfrm>
+              <a:off x="887106" y="5444019"/>
+              <a:ext cx="7660515" cy="0"/>
+            </a:xfrm>
+            <a:custGeom>
+              <a:avLst/>
+              <a:pathLst>
+                <a:path w="7660515" h="0">
+                  <a:moveTo>
+                    <a:pt x="0" y="0"/>
+                  </a:moveTo>
+                  <a:lnTo>
+                    <a:pt x="7660515" y="0"/>
+                  </a:lnTo>
+                  <a:lnTo>
+                    <a:pt x="7660515" y="0"/>
+                  </a:lnTo>
+                </a:path>
+              </a:pathLst>
+            </a:custGeom>
+            <a:ln w="6775" cap="flat">
+              <a:solidFill>
+                <a:srgbClr val="EBEBEB">
+                  <a:alpha val="100000"/>
+                </a:srgbClr>
+              </a:solidFill>
+              <a:prstDash val="solid"/>
+              <a:round/>
+            </a:ln>
+          </p:spPr>
+          <p:txBody>
+            <a:bodyPr/>
+            <a:lstStyle/>
+            <a:p/>
+          </p:txBody>
+        </p:sp>
+        <p:sp>
+          <p:nvSpPr>
+            <p:cNvPr id="45" name="pl45"/>
+            <p:cNvSpPr/>
+            <p:nvPr/>
+          </p:nvSpPr>
+          <p:spPr>
+            <a:xfrm>
+              <a:off x="887106" y="5144686"/>
+              <a:ext cx="7660515" cy="0"/>
+            </a:xfrm>
+            <a:custGeom>
+              <a:avLst/>
+              <a:pathLst>
+                <a:path w="7660515" h="0">
+                  <a:moveTo>
+                    <a:pt x="0" y="0"/>
+                  </a:moveTo>
+                  <a:lnTo>
+                    <a:pt x="7660515" y="0"/>
+                  </a:lnTo>
+                  <a:lnTo>
+                    <a:pt x="7660515" y="0"/>
+                  </a:lnTo>
+                </a:path>
+              </a:pathLst>
+            </a:custGeom>
+            <a:ln w="6775" cap="flat">
+              <a:solidFill>
+                <a:srgbClr val="EBEBEB">
+                  <a:alpha val="100000"/>
+                </a:srgbClr>
+              </a:solidFill>
+              <a:prstDash val="solid"/>
+              <a:round/>
+            </a:ln>
+          </p:spPr>
+          <p:txBody>
+            <a:bodyPr/>
+            <a:lstStyle/>
+            <a:p/>
+          </p:txBody>
+        </p:sp>
+        <p:sp>
+          <p:nvSpPr>
+            <p:cNvPr id="46" name="pl46"/>
+            <p:cNvSpPr/>
+            <p:nvPr/>
+          </p:nvSpPr>
+          <p:spPr>
+            <a:xfrm>
+              <a:off x="887106" y="4845352"/>
+              <a:ext cx="7660515" cy="0"/>
+            </a:xfrm>
+            <a:custGeom>
+              <a:avLst/>
+              <a:pathLst>
+                <a:path w="7660515" h="0">
+                  <a:moveTo>
+                    <a:pt x="0" y="0"/>
+                  </a:moveTo>
+                  <a:lnTo>
+                    <a:pt x="7660515" y="0"/>
+                  </a:lnTo>
+                  <a:lnTo>
+                    <a:pt x="7660515" y="0"/>
+                  </a:lnTo>
+                </a:path>
+              </a:pathLst>
+            </a:custGeom>
+            <a:ln w="6775" cap="flat">
+              <a:solidFill>
+                <a:srgbClr val="EBEBEB">
+                  <a:alpha val="100000"/>
+                </a:srgbClr>
+              </a:solidFill>
+              <a:prstDash val="solid"/>
+              <a:round/>
+            </a:ln>
+          </p:spPr>
+          <p:txBody>
+            <a:bodyPr/>
+            <a:lstStyle/>
+            <a:p/>
+          </p:txBody>
+        </p:sp>
+        <p:sp>
+          <p:nvSpPr>
+            <p:cNvPr id="47" name="pl47"/>
+            <p:cNvSpPr/>
+            <p:nvPr/>
+          </p:nvSpPr>
+          <p:spPr>
+            <a:xfrm>
+              <a:off x="887106" y="4546018"/>
+              <a:ext cx="7660515" cy="0"/>
+            </a:xfrm>
+            <a:custGeom>
+              <a:avLst/>
+              <a:pathLst>
+                <a:path w="7660515" h="0">
+                  <a:moveTo>
+                    <a:pt x="0" y="0"/>
+                  </a:moveTo>
+                  <a:lnTo>
+                    <a:pt x="7660515" y="0"/>
+                  </a:lnTo>
+                  <a:lnTo>
+                    <a:pt x="7660515" y="0"/>
+                  </a:lnTo>
+                </a:path>
+              </a:pathLst>
+            </a:custGeom>
+            <a:ln w="6775" cap="flat">
+              <a:solidFill>
+                <a:srgbClr val="EBEBEB">
+                  <a:alpha val="100000"/>
+                </a:srgbClr>
+              </a:solidFill>
+              <a:prstDash val="solid"/>
+              <a:round/>
+            </a:ln>
+          </p:spPr>
+          <p:txBody>
+            <a:bodyPr/>
+            <a:lstStyle/>
+            <a:p/>
+          </p:txBody>
+        </p:sp>
+        <p:sp>
+          <p:nvSpPr>
+            <p:cNvPr id="48" name="pl48"/>
+            <p:cNvSpPr/>
+            <p:nvPr/>
+          </p:nvSpPr>
+          <p:spPr>
+            <a:xfrm>
+              <a:off x="1001535" y="4336484"/>
+              <a:ext cx="0" cy="1317069"/>
+            </a:xfrm>
+            <a:custGeom>
+              <a:avLst/>
+              <a:pathLst>
+                <a:path w="0" h="1317069">
+                  <a:moveTo>
+                    <a:pt x="0" y="1317069"/>
+                  </a:moveTo>
+                  <a:lnTo>
+                    <a:pt x="0" y="0"/>
+                  </a:lnTo>
+                  <a:lnTo>
+                    <a:pt x="0" y="0"/>
+                  </a:lnTo>
+                </a:path>
+              </a:pathLst>
+            </a:custGeom>
+            <a:ln w="6775" cap="flat">
+              <a:solidFill>
+                <a:srgbClr val="EBEBEB">
+                  <a:alpha val="100000"/>
+                </a:srgbClr>
+              </a:solidFill>
+              <a:prstDash val="solid"/>
+              <a:round/>
+            </a:ln>
+          </p:spPr>
+          <p:txBody>
+            <a:bodyPr/>
+            <a:lstStyle/>
+            <a:p/>
+          </p:txBody>
+        </p:sp>
+        <p:sp>
+          <p:nvSpPr>
+            <p:cNvPr id="49" name="pl49"/>
+            <p:cNvSpPr/>
+            <p:nvPr/>
+          </p:nvSpPr>
+          <p:spPr>
+            <a:xfrm>
+              <a:off x="1852045" y="4336484"/>
+              <a:ext cx="0" cy="1317069"/>
+            </a:xfrm>
+            <a:custGeom>
+              <a:avLst/>
+              <a:pathLst>
+                <a:path w="0" h="1317069">
+                  <a:moveTo>
+                    <a:pt x="0" y="1317069"/>
+                  </a:moveTo>
+                  <a:lnTo>
+                    <a:pt x="0" y="0"/>
+                  </a:lnTo>
+                  <a:lnTo>
+                    <a:pt x="0" y="0"/>
+                  </a:lnTo>
+                </a:path>
+              </a:pathLst>
+            </a:custGeom>
+            <a:ln w="6775" cap="flat">
+              <a:solidFill>
+                <a:srgbClr val="EBEBEB">
+                  <a:alpha val="100000"/>
+                </a:srgbClr>
+              </a:solidFill>
+              <a:prstDash val="solid"/>
+              <a:round/>
+            </a:ln>
+          </p:spPr>
+          <p:txBody>
+            <a:bodyPr/>
+            <a:lstStyle/>
+            <a:p/>
+          </p:txBody>
+        </p:sp>
+        <p:sp>
+          <p:nvSpPr>
+            <p:cNvPr id="50" name="pl50"/>
+            <p:cNvSpPr/>
+            <p:nvPr/>
+          </p:nvSpPr>
+          <p:spPr>
+            <a:xfrm>
+              <a:off x="2702554" y="4336484"/>
+              <a:ext cx="0" cy="1317069"/>
+            </a:xfrm>
+            <a:custGeom>
+              <a:avLst/>
+              <a:pathLst>
+                <a:path w="0" h="1317069">
+                  <a:moveTo>
+                    <a:pt x="0" y="1317069"/>
+                  </a:moveTo>
+                  <a:lnTo>
+                    <a:pt x="0" y="0"/>
+                  </a:lnTo>
+                  <a:lnTo>
+                    <a:pt x="0" y="0"/>
+                  </a:lnTo>
+                </a:path>
+              </a:pathLst>
+            </a:custGeom>
+            <a:ln w="6775" cap="flat">
+              <a:solidFill>
+                <a:srgbClr val="EBEBEB">
+                  <a:alpha val="100000"/>
+                </a:srgbClr>
+              </a:solidFill>
+              <a:prstDash val="solid"/>
+              <a:round/>
+            </a:ln>
+          </p:spPr>
+          <p:txBody>
+            <a:bodyPr/>
+            <a:lstStyle/>
+            <a:p/>
+          </p:txBody>
+        </p:sp>
+        <p:sp>
+          <p:nvSpPr>
+            <p:cNvPr id="51" name="pl51"/>
+            <p:cNvSpPr/>
+            <p:nvPr/>
+          </p:nvSpPr>
+          <p:spPr>
+            <a:xfrm>
+              <a:off x="3553064" y="4336484"/>
+              <a:ext cx="0" cy="1317069"/>
+            </a:xfrm>
+            <a:custGeom>
+              <a:avLst/>
+              <a:pathLst>
+                <a:path w="0" h="1317069">
+                  <a:moveTo>
+                    <a:pt x="0" y="1317069"/>
+                  </a:moveTo>
+                  <a:lnTo>
+                    <a:pt x="0" y="0"/>
+                  </a:lnTo>
+                  <a:lnTo>
+                    <a:pt x="0" y="0"/>
+                  </a:lnTo>
+                </a:path>
+              </a:pathLst>
+            </a:custGeom>
+            <a:ln w="6775" cap="flat">
+              <a:solidFill>
+                <a:srgbClr val="EBEBEB">
+                  <a:alpha val="100000"/>
+                </a:srgbClr>
+              </a:solidFill>
+              <a:prstDash val="solid"/>
+              <a:round/>
+            </a:ln>
+          </p:spPr>
+          <p:txBody>
+            <a:bodyPr/>
+            <a:lstStyle/>
+            <a:p/>
+          </p:txBody>
+        </p:sp>
+        <p:sp>
+          <p:nvSpPr>
+            <p:cNvPr id="52" name="pl52"/>
+            <p:cNvSpPr/>
+            <p:nvPr/>
+          </p:nvSpPr>
+          <p:spPr>
+            <a:xfrm>
+              <a:off x="4403573" y="4336484"/>
+              <a:ext cx="0" cy="1317069"/>
+            </a:xfrm>
+            <a:custGeom>
+              <a:avLst/>
+              <a:pathLst>
+                <a:path w="0" h="1317069">
+                  <a:moveTo>
+                    <a:pt x="0" y="1317069"/>
+                  </a:moveTo>
+                  <a:lnTo>
+                    <a:pt x="0" y="0"/>
+                  </a:lnTo>
+                  <a:lnTo>
+                    <a:pt x="0" y="0"/>
+                  </a:lnTo>
+                </a:path>
+              </a:pathLst>
+            </a:custGeom>
+            <a:ln w="6775" cap="flat">
+              <a:solidFill>
+                <a:srgbClr val="EBEBEB">
+                  <a:alpha val="100000"/>
+                </a:srgbClr>
+              </a:solidFill>
+              <a:prstDash val="solid"/>
+              <a:round/>
+            </a:ln>
+          </p:spPr>
+          <p:txBody>
+            <a:bodyPr/>
+            <a:lstStyle/>
+            <a:p/>
+          </p:txBody>
+        </p:sp>
+        <p:sp>
+          <p:nvSpPr>
+            <p:cNvPr id="53" name="pl53"/>
+            <p:cNvSpPr/>
+            <p:nvPr/>
+          </p:nvSpPr>
+          <p:spPr>
+            <a:xfrm>
+              <a:off x="5254082" y="4336484"/>
+              <a:ext cx="0" cy="1317069"/>
+            </a:xfrm>
+            <a:custGeom>
+              <a:avLst/>
+              <a:pathLst>
+                <a:path w="0" h="1317069">
+                  <a:moveTo>
+                    <a:pt x="0" y="1317069"/>
+                  </a:moveTo>
+                  <a:lnTo>
+                    <a:pt x="0" y="0"/>
+                  </a:lnTo>
+                  <a:lnTo>
+                    <a:pt x="0" y="0"/>
+                  </a:lnTo>
+                </a:path>
+              </a:pathLst>
+            </a:custGeom>
+            <a:ln w="6775" cap="flat">
+              <a:solidFill>
+                <a:srgbClr val="EBEBEB">
+                  <a:alpha val="100000"/>
+                </a:srgbClr>
+              </a:solidFill>
+              <a:prstDash val="solid"/>
+              <a:round/>
+            </a:ln>
+          </p:spPr>
+          <p:txBody>
+            <a:bodyPr/>
+            <a:lstStyle/>
+            <a:p/>
+          </p:txBody>
+        </p:sp>
+        <p:sp>
+          <p:nvSpPr>
+            <p:cNvPr id="54" name="pl54"/>
+            <p:cNvSpPr/>
+            <p:nvPr/>
+          </p:nvSpPr>
+          <p:spPr>
+            <a:xfrm>
+              <a:off x="6104592" y="4336484"/>
+              <a:ext cx="0" cy="1317069"/>
+            </a:xfrm>
+            <a:custGeom>
+              <a:avLst/>
+              <a:pathLst>
+                <a:path w="0" h="1317069">
+                  <a:moveTo>
+                    <a:pt x="0" y="1317069"/>
+                  </a:moveTo>
+                  <a:lnTo>
+                    <a:pt x="0" y="0"/>
+                  </a:lnTo>
+                  <a:lnTo>
+                    <a:pt x="0" y="0"/>
+                  </a:lnTo>
+                </a:path>
+              </a:pathLst>
+            </a:custGeom>
+            <a:ln w="6775" cap="flat">
+              <a:solidFill>
+                <a:srgbClr val="EBEBEB">
+                  <a:alpha val="100000"/>
+                </a:srgbClr>
+              </a:solidFill>
+              <a:prstDash val="solid"/>
+              <a:round/>
+            </a:ln>
+          </p:spPr>
+          <p:txBody>
+            <a:bodyPr/>
+            <a:lstStyle/>
+            <a:p/>
+          </p:txBody>
+        </p:sp>
+        <p:sp>
+          <p:nvSpPr>
+            <p:cNvPr id="55" name="pl55"/>
+            <p:cNvSpPr/>
+            <p:nvPr/>
+          </p:nvSpPr>
+          <p:spPr>
+            <a:xfrm>
+              <a:off x="6955101" y="4336484"/>
+              <a:ext cx="0" cy="1317069"/>
+            </a:xfrm>
+            <a:custGeom>
+              <a:avLst/>
+              <a:pathLst>
+                <a:path w="0" h="1317069">
+                  <a:moveTo>
+                    <a:pt x="0" y="1317069"/>
+                  </a:moveTo>
+                  <a:lnTo>
+                    <a:pt x="0" y="0"/>
+                  </a:lnTo>
+                  <a:lnTo>
+                    <a:pt x="0" y="0"/>
+                  </a:lnTo>
+                </a:path>
+              </a:pathLst>
+            </a:custGeom>
+            <a:ln w="6775" cap="flat">
+              <a:solidFill>
+                <a:srgbClr val="EBEBEB">
+                  <a:alpha val="100000"/>
+                </a:srgbClr>
+              </a:solidFill>
+              <a:prstDash val="solid"/>
+              <a:round/>
+            </a:ln>
+          </p:spPr>
+          <p:txBody>
+            <a:bodyPr/>
+            <a:lstStyle/>
+            <a:p/>
+          </p:txBody>
+        </p:sp>
+        <p:sp>
+          <p:nvSpPr>
+            <p:cNvPr id="56" name="pl56"/>
+            <p:cNvSpPr/>
+            <p:nvPr/>
+          </p:nvSpPr>
+          <p:spPr>
+            <a:xfrm>
+              <a:off x="7805611" y="4336484"/>
+              <a:ext cx="0" cy="1317069"/>
+            </a:xfrm>
+            <a:custGeom>
+              <a:avLst/>
+              <a:pathLst>
+                <a:path w="0" h="1317069">
+                  <a:moveTo>
+                    <a:pt x="0" y="1317069"/>
+                  </a:moveTo>
+                  <a:lnTo>
+                    <a:pt x="0" y="0"/>
+                  </a:lnTo>
+                  <a:lnTo>
+                    <a:pt x="0" y="0"/>
+                  </a:lnTo>
+                </a:path>
+              </a:pathLst>
+            </a:custGeom>
+            <a:ln w="6775" cap="flat">
+              <a:solidFill>
+                <a:srgbClr val="EBEBEB">
+                  <a:alpha val="100000"/>
+                </a:srgbClr>
+              </a:solidFill>
+              <a:prstDash val="solid"/>
+              <a:round/>
+            </a:ln>
+          </p:spPr>
+          <p:txBody>
+            <a:bodyPr/>
+            <a:lstStyle/>
+            <a:p/>
+          </p:txBody>
+        </p:sp>
+        <p:sp>
+          <p:nvSpPr>
+            <p:cNvPr id="57" name="pl57"/>
+            <p:cNvSpPr/>
+            <p:nvPr/>
+          </p:nvSpPr>
+          <p:spPr>
+            <a:xfrm>
+              <a:off x="887106" y="5593686"/>
+              <a:ext cx="7660515" cy="0"/>
+            </a:xfrm>
+            <a:custGeom>
+              <a:avLst/>
+              <a:pathLst>
+                <a:path w="7660515" h="0">
+                  <a:moveTo>
+                    <a:pt x="0" y="0"/>
+                  </a:moveTo>
+                  <a:lnTo>
+                    <a:pt x="7660515" y="0"/>
+                  </a:lnTo>
+                  <a:lnTo>
+                    <a:pt x="7660515" y="0"/>
+                  </a:lnTo>
+                </a:path>
+              </a:pathLst>
+            </a:custGeom>
+            <a:ln w="13550" cap="flat">
+              <a:solidFill>
+                <a:srgbClr val="EBEBEB">
+                  <a:alpha val="100000"/>
+                </a:srgbClr>
+              </a:solidFill>
+              <a:prstDash val="solid"/>
+              <a:round/>
+            </a:ln>
+          </p:spPr>
+          <p:txBody>
+            <a:bodyPr/>
+            <a:lstStyle/>
+            <a:p/>
+          </p:txBody>
+        </p:sp>
+        <p:sp>
+          <p:nvSpPr>
+            <p:cNvPr id="58" name="pl58"/>
+            <p:cNvSpPr/>
+            <p:nvPr/>
+          </p:nvSpPr>
+          <p:spPr>
+            <a:xfrm>
+              <a:off x="887106" y="5294352"/>
+              <a:ext cx="7660515" cy="0"/>
+            </a:xfrm>
+            <a:custGeom>
+              <a:avLst/>
+              <a:pathLst>
+                <a:path w="7660515" h="0">
+                  <a:moveTo>
+                    <a:pt x="0" y="0"/>
+                  </a:moveTo>
+                  <a:lnTo>
+                    <a:pt x="7660515" y="0"/>
+                  </a:lnTo>
+                  <a:lnTo>
+                    <a:pt x="7660515" y="0"/>
+                  </a:lnTo>
+                </a:path>
+              </a:pathLst>
+            </a:custGeom>
+            <a:ln w="13550" cap="flat">
+              <a:solidFill>
+                <a:srgbClr val="EBEBEB">
+                  <a:alpha val="100000"/>
+                </a:srgbClr>
+              </a:solidFill>
+              <a:prstDash val="solid"/>
+              <a:round/>
+            </a:ln>
+          </p:spPr>
+          <p:txBody>
+            <a:bodyPr/>
+            <a:lstStyle/>
+            <a:p/>
+          </p:txBody>
+        </p:sp>
+        <p:sp>
+          <p:nvSpPr>
+            <p:cNvPr id="59" name="pl59"/>
+            <p:cNvSpPr/>
+            <p:nvPr/>
+          </p:nvSpPr>
+          <p:spPr>
+            <a:xfrm>
+              <a:off x="887106" y="4995019"/>
+              <a:ext cx="7660515" cy="0"/>
+            </a:xfrm>
+            <a:custGeom>
+              <a:avLst/>
+              <a:pathLst>
+                <a:path w="7660515" h="0">
+                  <a:moveTo>
+                    <a:pt x="0" y="0"/>
+                  </a:moveTo>
+                  <a:lnTo>
+                    <a:pt x="7660515" y="0"/>
+                  </a:lnTo>
+                  <a:lnTo>
+                    <a:pt x="7660515" y="0"/>
+                  </a:lnTo>
+                </a:path>
+              </a:pathLst>
+            </a:custGeom>
+            <a:ln w="13550" cap="flat">
+              <a:solidFill>
+                <a:srgbClr val="EBEBEB">
+                  <a:alpha val="100000"/>
+                </a:srgbClr>
+              </a:solidFill>
+              <a:prstDash val="solid"/>
+              <a:round/>
+            </a:ln>
+          </p:spPr>
+          <p:txBody>
+            <a:bodyPr/>
+            <a:lstStyle/>
+            <a:p/>
+          </p:txBody>
+        </p:sp>
+        <p:sp>
+          <p:nvSpPr>
+            <p:cNvPr id="60" name="pl60"/>
+            <p:cNvSpPr/>
+            <p:nvPr/>
+          </p:nvSpPr>
+          <p:spPr>
+            <a:xfrm>
+              <a:off x="887106" y="4695685"/>
+              <a:ext cx="7660515" cy="0"/>
+            </a:xfrm>
+            <a:custGeom>
+              <a:avLst/>
+              <a:pathLst>
+                <a:path w="7660515" h="0">
+                  <a:moveTo>
+                    <a:pt x="0" y="0"/>
+                  </a:moveTo>
+                  <a:lnTo>
+                    <a:pt x="7660515" y="0"/>
+                  </a:lnTo>
+                  <a:lnTo>
+                    <a:pt x="7660515" y="0"/>
+                  </a:lnTo>
+                </a:path>
+              </a:pathLst>
+            </a:custGeom>
+            <a:ln w="13550" cap="flat">
+              <a:solidFill>
+                <a:srgbClr val="EBEBEB">
+                  <a:alpha val="100000"/>
+                </a:srgbClr>
+              </a:solidFill>
+              <a:prstDash val="solid"/>
+              <a:round/>
+            </a:ln>
+          </p:spPr>
+          <p:txBody>
+            <a:bodyPr/>
+            <a:lstStyle/>
+            <a:p/>
+          </p:txBody>
+        </p:sp>
+        <p:sp>
+          <p:nvSpPr>
+            <p:cNvPr id="61" name="pl61"/>
+            <p:cNvSpPr/>
+            <p:nvPr/>
+          </p:nvSpPr>
+          <p:spPr>
+            <a:xfrm>
+              <a:off x="887106" y="4396351"/>
+              <a:ext cx="7660515" cy="0"/>
+            </a:xfrm>
+            <a:custGeom>
+              <a:avLst/>
+              <a:pathLst>
+                <a:path w="7660515" h="0">
+                  <a:moveTo>
+                    <a:pt x="0" y="0"/>
+                  </a:moveTo>
+                  <a:lnTo>
+                    <a:pt x="7660515" y="0"/>
+                  </a:lnTo>
+                  <a:lnTo>
+                    <a:pt x="7660515" y="0"/>
+                  </a:lnTo>
+                </a:path>
+              </a:pathLst>
+            </a:custGeom>
+            <a:ln w="13550" cap="flat">
+              <a:solidFill>
+                <a:srgbClr val="EBEBEB">
+                  <a:alpha val="100000"/>
+                </a:srgbClr>
+              </a:solidFill>
+              <a:prstDash val="solid"/>
+              <a:round/>
+            </a:ln>
+          </p:spPr>
+          <p:txBody>
+            <a:bodyPr/>
+            <a:lstStyle/>
+            <a:p/>
+          </p:txBody>
+        </p:sp>
+        <p:sp>
+          <p:nvSpPr>
+            <p:cNvPr id="62" name="pl62"/>
+            <p:cNvSpPr/>
+            <p:nvPr/>
+          </p:nvSpPr>
+          <p:spPr>
+            <a:xfrm>
+              <a:off x="1426790" y="4336484"/>
+              <a:ext cx="0" cy="1317069"/>
+            </a:xfrm>
+            <a:custGeom>
+              <a:avLst/>
+              <a:pathLst>
+                <a:path w="0" h="1317069">
+                  <a:moveTo>
+                    <a:pt x="0" y="1317069"/>
+                  </a:moveTo>
+                  <a:lnTo>
+                    <a:pt x="0" y="0"/>
+                  </a:lnTo>
+                  <a:lnTo>
+                    <a:pt x="0" y="0"/>
+                  </a:lnTo>
+                </a:path>
+              </a:pathLst>
+            </a:custGeom>
+            <a:ln w="13550" cap="flat">
+              <a:solidFill>
+                <a:srgbClr val="EBEBEB">
+                  <a:alpha val="100000"/>
+                </a:srgbClr>
+              </a:solidFill>
+              <a:prstDash val="solid"/>
+              <a:round/>
+            </a:ln>
+          </p:spPr>
+          <p:txBody>
+            <a:bodyPr/>
+            <a:lstStyle/>
+            <a:p/>
+          </p:txBody>
+        </p:sp>
+        <p:sp>
+          <p:nvSpPr>
+            <p:cNvPr id="63" name="pl63"/>
+            <p:cNvSpPr/>
+            <p:nvPr/>
+          </p:nvSpPr>
+          <p:spPr>
+            <a:xfrm>
+              <a:off x="2277299" y="4336484"/>
+              <a:ext cx="0" cy="1317069"/>
+            </a:xfrm>
+            <a:custGeom>
+              <a:avLst/>
+              <a:pathLst>
+                <a:path w="0" h="1317069">
+                  <a:moveTo>
+                    <a:pt x="0" y="1317069"/>
+                  </a:moveTo>
+                  <a:lnTo>
+                    <a:pt x="0" y="0"/>
+                  </a:lnTo>
+                  <a:lnTo>
+                    <a:pt x="0" y="0"/>
+                  </a:lnTo>
+                </a:path>
+              </a:pathLst>
+            </a:custGeom>
+            <a:ln w="13550" cap="flat">
+              <a:solidFill>
+                <a:srgbClr val="EBEBEB">
+                  <a:alpha val="100000"/>
+                </a:srgbClr>
+              </a:solidFill>
+              <a:prstDash val="solid"/>
+              <a:round/>
+            </a:ln>
+          </p:spPr>
+          <p:txBody>
+            <a:bodyPr/>
+            <a:lstStyle/>
+            <a:p/>
+          </p:txBody>
+        </p:sp>
+        <p:sp>
+          <p:nvSpPr>
+            <p:cNvPr id="64" name="pl64"/>
+            <p:cNvSpPr/>
+            <p:nvPr/>
+          </p:nvSpPr>
+          <p:spPr>
+            <a:xfrm>
+              <a:off x="3127809" y="4336484"/>
+              <a:ext cx="0" cy="1317069"/>
+            </a:xfrm>
+            <a:custGeom>
+              <a:avLst/>
+              <a:pathLst>
+                <a:path w="0" h="1317069">
+                  <a:moveTo>
+                    <a:pt x="0" y="1317069"/>
+                  </a:moveTo>
+                  <a:lnTo>
+                    <a:pt x="0" y="0"/>
+                  </a:lnTo>
+                  <a:lnTo>
+                    <a:pt x="0" y="0"/>
+                  </a:lnTo>
+                </a:path>
+              </a:pathLst>
+            </a:custGeom>
+            <a:ln w="13550" cap="flat">
+              <a:solidFill>
+                <a:srgbClr val="EBEBEB">
+                  <a:alpha val="100000"/>
+                </a:srgbClr>
+              </a:solidFill>
+              <a:prstDash val="solid"/>
+              <a:round/>
+            </a:ln>
+          </p:spPr>
+          <p:txBody>
+            <a:bodyPr/>
+            <a:lstStyle/>
+            <a:p/>
+          </p:txBody>
+        </p:sp>
+        <p:sp>
+          <p:nvSpPr>
+            <p:cNvPr id="65" name="pl65"/>
+            <p:cNvSpPr/>
+            <p:nvPr/>
+          </p:nvSpPr>
+          <p:spPr>
+            <a:xfrm>
+              <a:off x="3978318" y="4336484"/>
+              <a:ext cx="0" cy="1317069"/>
+            </a:xfrm>
+            <a:custGeom>
+              <a:avLst/>
+              <a:pathLst>
+                <a:path w="0" h="1317069">
+                  <a:moveTo>
+                    <a:pt x="0" y="1317069"/>
+                  </a:moveTo>
+                  <a:lnTo>
+                    <a:pt x="0" y="0"/>
+                  </a:lnTo>
+                  <a:lnTo>
+                    <a:pt x="0" y="0"/>
+                  </a:lnTo>
+                </a:path>
+              </a:pathLst>
+            </a:custGeom>
+            <a:ln w="13550" cap="flat">
+              <a:solidFill>
+                <a:srgbClr val="EBEBEB">
+                  <a:alpha val="100000"/>
+                </a:srgbClr>
+              </a:solidFill>
+              <a:prstDash val="solid"/>
+              <a:round/>
+            </a:ln>
+          </p:spPr>
+          <p:txBody>
+            <a:bodyPr/>
+            <a:lstStyle/>
+            <a:p/>
+          </p:txBody>
+        </p:sp>
+        <p:sp>
+          <p:nvSpPr>
+            <p:cNvPr id="66" name="pl66"/>
+            <p:cNvSpPr/>
+            <p:nvPr/>
+          </p:nvSpPr>
+          <p:spPr>
+            <a:xfrm>
+              <a:off x="4828828" y="4336484"/>
+              <a:ext cx="0" cy="1317069"/>
+            </a:xfrm>
+            <a:custGeom>
+              <a:avLst/>
+              <a:pathLst>
+                <a:path w="0" h="1317069">
+                  <a:moveTo>
+                    <a:pt x="0" y="1317069"/>
+                  </a:moveTo>
+                  <a:lnTo>
+                    <a:pt x="0" y="0"/>
+                  </a:lnTo>
+                  <a:lnTo>
+                    <a:pt x="0" y="0"/>
+                  </a:lnTo>
+                </a:path>
+              </a:pathLst>
+            </a:custGeom>
+            <a:ln w="13550" cap="flat">
+              <a:solidFill>
+                <a:srgbClr val="EBEBEB">
+                  <a:alpha val="100000"/>
+                </a:srgbClr>
+              </a:solidFill>
+              <a:prstDash val="solid"/>
+              <a:round/>
+            </a:ln>
+          </p:spPr>
+          <p:txBody>
+            <a:bodyPr/>
+            <a:lstStyle/>
+            <a:p/>
+          </p:txBody>
+        </p:sp>
+        <p:sp>
+          <p:nvSpPr>
+            <p:cNvPr id="67" name="pl67"/>
+            <p:cNvSpPr/>
+            <p:nvPr/>
+          </p:nvSpPr>
+          <p:spPr>
+            <a:xfrm>
+              <a:off x="5679337" y="4336484"/>
+              <a:ext cx="0" cy="1317069"/>
+            </a:xfrm>
+            <a:custGeom>
+              <a:avLst/>
+              <a:pathLst>
+                <a:path w="0" h="1317069">
+                  <a:moveTo>
+                    <a:pt x="0" y="1317069"/>
+                  </a:moveTo>
+                  <a:lnTo>
+                    <a:pt x="0" y="0"/>
+                  </a:lnTo>
+                  <a:lnTo>
+                    <a:pt x="0" y="0"/>
+                  </a:lnTo>
+                </a:path>
+              </a:pathLst>
+            </a:custGeom>
+            <a:ln w="13550" cap="flat">
+              <a:solidFill>
+                <a:srgbClr val="EBEBEB">
+                  <a:alpha val="100000"/>
+                </a:srgbClr>
+              </a:solidFill>
+              <a:prstDash val="solid"/>
+              <a:round/>
+            </a:ln>
+          </p:spPr>
+          <p:txBody>
+            <a:bodyPr/>
+            <a:lstStyle/>
+            <a:p/>
+          </p:txBody>
+        </p:sp>
+        <p:sp>
+          <p:nvSpPr>
+            <p:cNvPr id="68" name="pl68"/>
+            <p:cNvSpPr/>
+            <p:nvPr/>
+          </p:nvSpPr>
+          <p:spPr>
+            <a:xfrm>
+              <a:off x="6529847" y="4336484"/>
+              <a:ext cx="0" cy="1317069"/>
+            </a:xfrm>
+            <a:custGeom>
+              <a:avLst/>
+              <a:pathLst>
+                <a:path w="0" h="1317069">
+                  <a:moveTo>
+                    <a:pt x="0" y="1317069"/>
+                  </a:moveTo>
+                  <a:lnTo>
+                    <a:pt x="0" y="0"/>
+                  </a:lnTo>
+                  <a:lnTo>
+                    <a:pt x="0" y="0"/>
+                  </a:lnTo>
+                </a:path>
+              </a:pathLst>
+            </a:custGeom>
+            <a:ln w="13550" cap="flat">
+              <a:solidFill>
+                <a:srgbClr val="EBEBEB">
+                  <a:alpha val="100000"/>
+                </a:srgbClr>
+              </a:solidFill>
+              <a:prstDash val="solid"/>
+              <a:round/>
+            </a:ln>
+          </p:spPr>
+          <p:txBody>
+            <a:bodyPr/>
+            <a:lstStyle/>
+            <a:p/>
+          </p:txBody>
+        </p:sp>
+        <p:sp>
+          <p:nvSpPr>
+            <p:cNvPr id="69" name="pl69"/>
+            <p:cNvSpPr/>
+            <p:nvPr/>
+          </p:nvSpPr>
+          <p:spPr>
+            <a:xfrm>
+              <a:off x="7380356" y="4336484"/>
+              <a:ext cx="0" cy="1317069"/>
+            </a:xfrm>
+            <a:custGeom>
+              <a:avLst/>
+              <a:pathLst>
+                <a:path w="0" h="1317069">
+                  <a:moveTo>
+                    <a:pt x="0" y="1317069"/>
+                  </a:moveTo>
+                  <a:lnTo>
+                    <a:pt x="0" y="0"/>
+                  </a:lnTo>
+                  <a:lnTo>
+                    <a:pt x="0" y="0"/>
+                  </a:lnTo>
+                </a:path>
+              </a:pathLst>
+            </a:custGeom>
+            <a:ln w="13550" cap="flat">
+              <a:solidFill>
+                <a:srgbClr val="EBEBEB">
+                  <a:alpha val="100000"/>
+                </a:srgbClr>
+              </a:solidFill>
+              <a:prstDash val="solid"/>
+              <a:round/>
+            </a:ln>
+          </p:spPr>
+          <p:txBody>
+            <a:bodyPr/>
+            <a:lstStyle/>
+            <a:p/>
+          </p:txBody>
+        </p:sp>
+        <p:sp>
+          <p:nvSpPr>
+            <p:cNvPr id="70" name="pl70"/>
+            <p:cNvSpPr/>
+            <p:nvPr/>
+          </p:nvSpPr>
+          <p:spPr>
+            <a:xfrm>
+              <a:off x="8230866" y="4336484"/>
+              <a:ext cx="0" cy="1317069"/>
+            </a:xfrm>
+            <a:custGeom>
+              <a:avLst/>
+              <a:pathLst>
+                <a:path w="0" h="1317069">
+                  <a:moveTo>
+                    <a:pt x="0" y="1317069"/>
+                  </a:moveTo>
+                  <a:lnTo>
+                    <a:pt x="0" y="0"/>
+                  </a:lnTo>
+                  <a:lnTo>
+                    <a:pt x="0" y="0"/>
+                  </a:lnTo>
+                </a:path>
+              </a:pathLst>
+            </a:custGeom>
+            <a:ln w="13550" cap="flat">
+              <a:solidFill>
+                <a:srgbClr val="EBEBEB">
+                  <a:alpha val="100000"/>
+                </a:srgbClr>
+              </a:solidFill>
+              <a:prstDash val="solid"/>
+              <a:round/>
+            </a:ln>
+          </p:spPr>
+          <p:txBody>
+            <a:bodyPr/>
+            <a:lstStyle/>
+            <a:p/>
+          </p:txBody>
+        </p:sp>
+        <p:sp>
+          <p:nvSpPr>
+            <p:cNvPr id="71" name="pg71"/>
+            <p:cNvSpPr/>
+            <p:nvPr/>
+          </p:nvSpPr>
+          <p:spPr>
+            <a:xfrm>
+              <a:off x="1235312" y="4379265"/>
+              <a:ext cx="6964104" cy="1164430"/>
+            </a:xfrm>
+            <a:custGeom>
+              <a:avLst/>
+              <a:pathLst>
+                <a:path w="6964104" h="1164430">
+                  <a:moveTo>
+                    <a:pt x="0" y="0"/>
+                  </a:moveTo>
+                  <a:lnTo>
+                    <a:pt x="70344" y="38509"/>
+                  </a:lnTo>
+                  <a:lnTo>
+                    <a:pt x="140688" y="75798"/>
+                  </a:lnTo>
+                  <a:lnTo>
+                    <a:pt x="211033" y="111904"/>
+                  </a:lnTo>
+                  <a:lnTo>
+                    <a:pt x="281377" y="146865"/>
+                  </a:lnTo>
+                  <a:lnTo>
+                    <a:pt x="351722" y="180718"/>
+                  </a:lnTo>
+                  <a:lnTo>
+                    <a:pt x="422066" y="213497"/>
+                  </a:lnTo>
+                  <a:lnTo>
+                    <a:pt x="492411" y="245236"/>
+                  </a:lnTo>
+                  <a:lnTo>
+                    <a:pt x="562755" y="275970"/>
+                  </a:lnTo>
+                  <a:lnTo>
+                    <a:pt x="633100" y="305728"/>
+                  </a:lnTo>
+                  <a:lnTo>
+                    <a:pt x="703444" y="334543"/>
+                  </a:lnTo>
+                  <a:lnTo>
+                    <a:pt x="773789" y="362444"/>
+                  </a:lnTo>
+                  <a:lnTo>
+                    <a:pt x="844133" y="389461"/>
+                  </a:lnTo>
+                  <a:lnTo>
+                    <a:pt x="914478" y="415621"/>
+                  </a:lnTo>
+                  <a:lnTo>
+                    <a:pt x="984822" y="440951"/>
+                  </a:lnTo>
+                  <a:lnTo>
+                    <a:pt x="1055167" y="465478"/>
+                  </a:lnTo>
+                  <a:lnTo>
+                    <a:pt x="1125511" y="489227"/>
+                  </a:lnTo>
+                  <a:lnTo>
+                    <a:pt x="1195856" y="512223"/>
+                  </a:lnTo>
+                  <a:lnTo>
+                    <a:pt x="1266200" y="534490"/>
+                  </a:lnTo>
+                  <a:lnTo>
+                    <a:pt x="1336545" y="556051"/>
+                  </a:lnTo>
+                  <a:lnTo>
+                    <a:pt x="1406889" y="576928"/>
+                  </a:lnTo>
+                  <a:lnTo>
+                    <a:pt x="1477234" y="597143"/>
+                  </a:lnTo>
+                  <a:lnTo>
+                    <a:pt x="1547578" y="616717"/>
+                  </a:lnTo>
+                  <a:lnTo>
+                    <a:pt x="1617923" y="635671"/>
+                  </a:lnTo>
+                  <a:lnTo>
+                    <a:pt x="1688267" y="654023"/>
+                  </a:lnTo>
+                  <a:lnTo>
+                    <a:pt x="1758612" y="671794"/>
+                  </a:lnTo>
+                  <a:lnTo>
+                    <a:pt x="1828956" y="689001"/>
+                  </a:lnTo>
+                  <a:lnTo>
+                    <a:pt x="1899301" y="705662"/>
+                  </a:lnTo>
+                  <a:lnTo>
+                    <a:pt x="1969645" y="721795"/>
+                  </a:lnTo>
+                  <a:lnTo>
+                    <a:pt x="2039990" y="737416"/>
+                  </a:lnTo>
+                  <a:lnTo>
+                    <a:pt x="2110334" y="752542"/>
+                  </a:lnTo>
+                  <a:lnTo>
+                    <a:pt x="2180679" y="767188"/>
+                  </a:lnTo>
+                  <a:lnTo>
+                    <a:pt x="2251023" y="781370"/>
+                  </a:lnTo>
+                  <a:lnTo>
+                    <a:pt x="2321368" y="795103"/>
+                  </a:lnTo>
+                  <a:lnTo>
+                    <a:pt x="2391712" y="808399"/>
+                  </a:lnTo>
+                  <a:lnTo>
+                    <a:pt x="2462057" y="821274"/>
+                  </a:lnTo>
+                  <a:lnTo>
+                    <a:pt x="2532401" y="833741"/>
+                  </a:lnTo>
+                  <a:lnTo>
+                    <a:pt x="2602746" y="845813"/>
+                  </a:lnTo>
+                  <a:lnTo>
+                    <a:pt x="2673090" y="857501"/>
+                  </a:lnTo>
+                  <a:lnTo>
+                    <a:pt x="2743435" y="868819"/>
+                  </a:lnTo>
+                  <a:lnTo>
+                    <a:pt x="2813779" y="879779"/>
+                  </a:lnTo>
+                  <a:lnTo>
+                    <a:pt x="2884124" y="890390"/>
+                  </a:lnTo>
+                  <a:lnTo>
+                    <a:pt x="2954468" y="900665"/>
+                  </a:lnTo>
+                  <a:lnTo>
+                    <a:pt x="3024813" y="910615"/>
+                  </a:lnTo>
+                  <a:lnTo>
+                    <a:pt x="3095157" y="916123"/>
+                  </a:lnTo>
+                  <a:lnTo>
+                    <a:pt x="3165502" y="918032"/>
+                  </a:lnTo>
+                  <a:lnTo>
+                    <a:pt x="3235846" y="919929"/>
+                  </a:lnTo>
+                  <a:lnTo>
+                    <a:pt x="3306191" y="921814"/>
+                  </a:lnTo>
+                  <a:lnTo>
+                    <a:pt x="3376535" y="923686"/>
+                  </a:lnTo>
+                  <a:lnTo>
+                    <a:pt x="3446880" y="925547"/>
+                  </a:lnTo>
+                  <a:lnTo>
+                    <a:pt x="3517224" y="927396"/>
+                  </a:lnTo>
+                  <a:lnTo>
+                    <a:pt x="3587569" y="929233"/>
+                  </a:lnTo>
+                  <a:lnTo>
+                    <a:pt x="3657913" y="931058"/>
+                  </a:lnTo>
+                  <a:lnTo>
+                    <a:pt x="3728257" y="932872"/>
+                  </a:lnTo>
+                  <a:lnTo>
+                    <a:pt x="3798602" y="934674"/>
+                  </a:lnTo>
+                  <a:lnTo>
+                    <a:pt x="3868946" y="936464"/>
+                  </a:lnTo>
+                  <a:lnTo>
+                    <a:pt x="3939291" y="938243"/>
+                  </a:lnTo>
+                  <a:lnTo>
+                    <a:pt x="4009635" y="940011"/>
+                  </a:lnTo>
+                  <a:lnTo>
+                    <a:pt x="4079980" y="941767"/>
+                  </a:lnTo>
+                  <a:lnTo>
+                    <a:pt x="4150324" y="943512"/>
+                  </a:lnTo>
+                  <a:lnTo>
+                    <a:pt x="4220669" y="945246"/>
+                  </a:lnTo>
+                  <a:lnTo>
+                    <a:pt x="4291013" y="946969"/>
+                  </a:lnTo>
+                  <a:lnTo>
+                    <a:pt x="4361358" y="948680"/>
+                  </a:lnTo>
+                  <a:lnTo>
+                    <a:pt x="4431702" y="950381"/>
+                  </a:lnTo>
+                  <a:lnTo>
+                    <a:pt x="4502047" y="952071"/>
+                  </a:lnTo>
+                  <a:lnTo>
+                    <a:pt x="4572391" y="953750"/>
+                  </a:lnTo>
+                  <a:lnTo>
+                    <a:pt x="4642736" y="955419"/>
+                  </a:lnTo>
+                  <a:lnTo>
+                    <a:pt x="4713080" y="957076"/>
+                  </a:lnTo>
+                  <a:lnTo>
+                    <a:pt x="4783425" y="958723"/>
+                  </a:lnTo>
+                  <a:lnTo>
+                    <a:pt x="4853769" y="960360"/>
+                  </a:lnTo>
+                  <a:lnTo>
+                    <a:pt x="4924114" y="961986"/>
+                  </a:lnTo>
+                  <a:lnTo>
+                    <a:pt x="4994458" y="963601"/>
+                  </a:lnTo>
+                  <a:lnTo>
+                    <a:pt x="5064803" y="965207"/>
+                  </a:lnTo>
+                  <a:lnTo>
+                    <a:pt x="5135147" y="966802"/>
+                  </a:lnTo>
+                  <a:lnTo>
+                    <a:pt x="5205492" y="968387"/>
+                  </a:lnTo>
+                  <a:lnTo>
+                    <a:pt x="5275836" y="969961"/>
+                  </a:lnTo>
+                  <a:lnTo>
+                    <a:pt x="5346181" y="971526"/>
+                  </a:lnTo>
+                  <a:lnTo>
+                    <a:pt x="5416525" y="973080"/>
+                  </a:lnTo>
+                  <a:lnTo>
+                    <a:pt x="5486870" y="974625"/>
+                  </a:lnTo>
+                  <a:lnTo>
+                    <a:pt x="5557214" y="976160"/>
+                  </a:lnTo>
+                  <a:lnTo>
+                    <a:pt x="5627559" y="977685"/>
+                  </a:lnTo>
+                  <a:lnTo>
+                    <a:pt x="5697903" y="979200"/>
+                  </a:lnTo>
+                  <a:lnTo>
+                    <a:pt x="5768248" y="980705"/>
+                  </a:lnTo>
+                  <a:lnTo>
+                    <a:pt x="5838592" y="982201"/>
+                  </a:lnTo>
+                  <a:lnTo>
+                    <a:pt x="5908937" y="983687"/>
+                  </a:lnTo>
+                  <a:lnTo>
+                    <a:pt x="5979281" y="985164"/>
+                  </a:lnTo>
+                  <a:lnTo>
+                    <a:pt x="6049626" y="986631"/>
+                  </a:lnTo>
+                  <a:lnTo>
+                    <a:pt x="6119970" y="988089"/>
+                  </a:lnTo>
+                  <a:lnTo>
+                    <a:pt x="6190315" y="989538"/>
+                  </a:lnTo>
+                  <a:lnTo>
+                    <a:pt x="6260659" y="990977"/>
+                  </a:lnTo>
+                  <a:lnTo>
+                    <a:pt x="6331004" y="992407"/>
+                  </a:lnTo>
+                  <a:lnTo>
+                    <a:pt x="6401348" y="993828"/>
+                  </a:lnTo>
+                  <a:lnTo>
+                    <a:pt x="6471693" y="995240"/>
+                  </a:lnTo>
+                  <a:lnTo>
+                    <a:pt x="6542037" y="996643"/>
+                  </a:lnTo>
+                  <a:lnTo>
+                    <a:pt x="6612382" y="998037"/>
+                  </a:lnTo>
+                  <a:lnTo>
+                    <a:pt x="6682726" y="999422"/>
+                  </a:lnTo>
+                  <a:lnTo>
+                    <a:pt x="6753071" y="1000798"/>
+                  </a:lnTo>
+                  <a:lnTo>
+                    <a:pt x="6823415" y="1002165"/>
+                  </a:lnTo>
+                  <a:lnTo>
+                    <a:pt x="6893760" y="1003523"/>
+                  </a:lnTo>
+                  <a:lnTo>
+                    <a:pt x="6964104" y="1004873"/>
+                  </a:lnTo>
+                  <a:lnTo>
+                    <a:pt x="6964104" y="1164430"/>
+                  </a:lnTo>
+                  <a:lnTo>
+                    <a:pt x="6893760" y="1162793"/>
+                  </a:lnTo>
+                  <a:lnTo>
+                    <a:pt x="6823415" y="1161102"/>
+                  </a:lnTo>
+                  <a:lnTo>
+                    <a:pt x="6753071" y="1159356"/>
+                  </a:lnTo>
+                  <a:lnTo>
+                    <a:pt x="6682726" y="1157552"/>
+                  </a:lnTo>
+                  <a:lnTo>
+                    <a:pt x="6612382" y="1155690"/>
+                  </a:lnTo>
+                  <a:lnTo>
+                    <a:pt x="6542037" y="1153767"/>
+                  </a:lnTo>
+                  <a:lnTo>
+                    <a:pt x="6471693" y="1151780"/>
+                  </a:lnTo>
+                  <a:lnTo>
+                    <a:pt x="6401348" y="1149729"/>
+                  </a:lnTo>
+                  <a:lnTo>
+                    <a:pt x="6331004" y="1147610"/>
+                  </a:lnTo>
+                  <a:lnTo>
+                    <a:pt x="6260659" y="1145422"/>
+                  </a:lnTo>
+                  <a:lnTo>
+                    <a:pt x="6190315" y="1143163"/>
+                  </a:lnTo>
+                  <a:lnTo>
+                    <a:pt x="6119970" y="1140829"/>
+                  </a:lnTo>
+                  <a:lnTo>
+                    <a:pt x="6049626" y="1138419"/>
+                  </a:lnTo>
+                  <a:lnTo>
+                    <a:pt x="5979281" y="1135930"/>
+                  </a:lnTo>
+                  <a:lnTo>
+                    <a:pt x="5908937" y="1133360"/>
+                  </a:lnTo>
+                  <a:lnTo>
+                    <a:pt x="5838592" y="1130705"/>
+                  </a:lnTo>
+                  <a:lnTo>
+                    <a:pt x="5768248" y="1127963"/>
+                  </a:lnTo>
+                  <a:lnTo>
+                    <a:pt x="5697903" y="1125132"/>
+                  </a:lnTo>
+                  <a:lnTo>
+                    <a:pt x="5627559" y="1122208"/>
+                  </a:lnTo>
+                  <a:lnTo>
+                    <a:pt x="5557214" y="1119188"/>
+                  </a:lnTo>
+                  <a:lnTo>
+                    <a:pt x="5486870" y="1116069"/>
+                  </a:lnTo>
+                  <a:lnTo>
+                    <a:pt x="5416525" y="1112848"/>
+                  </a:lnTo>
+                  <a:lnTo>
+                    <a:pt x="5346181" y="1109522"/>
+                  </a:lnTo>
+                  <a:lnTo>
+                    <a:pt x="5275836" y="1106087"/>
+                  </a:lnTo>
+                  <a:lnTo>
+                    <a:pt x="5205492" y="1102539"/>
+                  </a:lnTo>
+                  <a:lnTo>
+                    <a:pt x="5135147" y="1098875"/>
+                  </a:lnTo>
+                  <a:lnTo>
+                    <a:pt x="5064803" y="1095091"/>
+                  </a:lnTo>
+                  <a:lnTo>
+                    <a:pt x="4994458" y="1091183"/>
+                  </a:lnTo>
+                  <a:lnTo>
+                    <a:pt x="4924114" y="1087147"/>
+                  </a:lnTo>
+                  <a:lnTo>
+                    <a:pt x="4853769" y="1082979"/>
+                  </a:lnTo>
+                  <a:lnTo>
+                    <a:pt x="4783425" y="1078674"/>
+                  </a:lnTo>
+                  <a:lnTo>
+                    <a:pt x="4713080" y="1074229"/>
+                  </a:lnTo>
+                  <a:lnTo>
+                    <a:pt x="4642736" y="1069638"/>
+                  </a:lnTo>
+                  <a:lnTo>
+                    <a:pt x="4572391" y="1064896"/>
+                  </a:lnTo>
+                  <a:lnTo>
+                    <a:pt x="4502047" y="1059999"/>
+                  </a:lnTo>
+                  <a:lnTo>
+                    <a:pt x="4431702" y="1054942"/>
+                  </a:lnTo>
+                  <a:lnTo>
+                    <a:pt x="4361358" y="1049720"/>
+                  </a:lnTo>
+                  <a:lnTo>
+                    <a:pt x="4291013" y="1044326"/>
+                  </a:lnTo>
+                  <a:lnTo>
+                    <a:pt x="4220669" y="1038755"/>
+                  </a:lnTo>
+                  <a:lnTo>
+                    <a:pt x="4150324" y="1033002"/>
+                  </a:lnTo>
+                  <a:lnTo>
+                    <a:pt x="4079980" y="1027061"/>
+                  </a:lnTo>
+                  <a:lnTo>
+                    <a:pt x="4009635" y="1020925"/>
+                  </a:lnTo>
+                  <a:lnTo>
+                    <a:pt x="3939291" y="1014589"/>
+                  </a:lnTo>
+                  <a:lnTo>
+                    <a:pt x="3868946" y="1008044"/>
+                  </a:lnTo>
+                  <a:lnTo>
+                    <a:pt x="3798602" y="1001286"/>
+                  </a:lnTo>
+                  <a:lnTo>
+                    <a:pt x="3728257" y="994306"/>
+                  </a:lnTo>
+                  <a:lnTo>
+                    <a:pt x="3657913" y="987097"/>
+                  </a:lnTo>
+                  <a:lnTo>
+                    <a:pt x="3587569" y="979653"/>
+                  </a:lnTo>
+                  <a:lnTo>
+                    <a:pt x="3517224" y="971964"/>
+                  </a:lnTo>
+                  <a:lnTo>
+                    <a:pt x="3446880" y="964024"/>
+                  </a:lnTo>
+                  <a:lnTo>
+                    <a:pt x="3376535" y="955824"/>
+                  </a:lnTo>
+                  <a:lnTo>
+                    <a:pt x="3306191" y="947355"/>
+                  </a:lnTo>
+                  <a:lnTo>
+                    <a:pt x="3235846" y="938609"/>
+                  </a:lnTo>
+                  <a:lnTo>
+                    <a:pt x="3165502" y="929577"/>
+                  </a:lnTo>
+                  <a:lnTo>
+                    <a:pt x="3095157" y="920248"/>
+                  </a:lnTo>
+                  <a:lnTo>
+                    <a:pt x="3024813" y="914201"/>
+                  </a:lnTo>
+                  <a:lnTo>
+                    <a:pt x="2954468" y="912267"/>
+                  </a:lnTo>
+                  <a:lnTo>
+                    <a:pt x="2884124" y="910321"/>
+                  </a:lnTo>
+                  <a:lnTo>
+                    <a:pt x="2813779" y="908362"/>
+                  </a:lnTo>
+                  <a:lnTo>
+                    <a:pt x="2743435" y="906391"/>
+                  </a:lnTo>
+                  <a:lnTo>
+                    <a:pt x="2673090" y="904407"/>
+                  </a:lnTo>
+                  <a:lnTo>
+                    <a:pt x="2602746" y="902410"/>
+                  </a:lnTo>
+                  <a:lnTo>
+                    <a:pt x="2532401" y="900400"/>
+                  </a:lnTo>
+                  <a:lnTo>
+                    <a:pt x="2462057" y="898377"/>
+                  </a:lnTo>
+                  <a:lnTo>
+                    <a:pt x="2391712" y="896341"/>
+                  </a:lnTo>
+                  <a:lnTo>
+                    <a:pt x="2321368" y="894292"/>
+                  </a:lnTo>
+                  <a:lnTo>
+                    <a:pt x="2251023" y="892230"/>
+                  </a:lnTo>
+                  <a:lnTo>
+                    <a:pt x="2180679" y="890155"/>
+                  </a:lnTo>
+                  <a:lnTo>
+                    <a:pt x="2110334" y="888066"/>
+                  </a:lnTo>
+                  <a:lnTo>
+                    <a:pt x="2039990" y="885964"/>
+                  </a:lnTo>
+                  <a:lnTo>
+                    <a:pt x="1969645" y="883848"/>
+                  </a:lnTo>
+                  <a:lnTo>
+                    <a:pt x="1899301" y="881719"/>
+                  </a:lnTo>
+                  <a:lnTo>
+                    <a:pt x="1828956" y="879576"/>
+                  </a:lnTo>
+                  <a:lnTo>
+                    <a:pt x="1758612" y="877419"/>
+                  </a:lnTo>
+                  <a:lnTo>
+                    <a:pt x="1688267" y="875248"/>
+                  </a:lnTo>
+                  <a:lnTo>
+                    <a:pt x="1617923" y="873064"/>
+                  </a:lnTo>
+                  <a:lnTo>
+                    <a:pt x="1547578" y="870865"/>
+                  </a:lnTo>
+                  <a:lnTo>
+                    <a:pt x="1477234" y="868652"/>
+                  </a:lnTo>
+                  <a:lnTo>
+                    <a:pt x="1406889" y="866425"/>
+                  </a:lnTo>
+                  <a:lnTo>
+                    <a:pt x="1336545" y="864183"/>
+                  </a:lnTo>
+                  <a:lnTo>
+                    <a:pt x="1266200" y="861927"/>
+                  </a:lnTo>
+                  <a:lnTo>
+                    <a:pt x="1195856" y="859656"/>
+                  </a:lnTo>
+                  <a:lnTo>
+                    <a:pt x="1125511" y="857371"/>
+                  </a:lnTo>
+                  <a:lnTo>
+                    <a:pt x="1055167" y="855071"/>
+                  </a:lnTo>
+                  <a:lnTo>
+                    <a:pt x="984822" y="852757"/>
+                  </a:lnTo>
+                  <a:lnTo>
+                    <a:pt x="914478" y="850427"/>
+                  </a:lnTo>
+                  <a:lnTo>
+                    <a:pt x="844133" y="848082"/>
+                  </a:lnTo>
+                  <a:lnTo>
+                    <a:pt x="773789" y="845723"/>
+                  </a:lnTo>
+                  <a:lnTo>
+                    <a:pt x="703444" y="843348"/>
+                  </a:lnTo>
+                  <a:lnTo>
+                    <a:pt x="633100" y="840957"/>
+                  </a:lnTo>
+                  <a:lnTo>
+                    <a:pt x="562755" y="838552"/>
+                  </a:lnTo>
+                  <a:lnTo>
+                    <a:pt x="492411" y="836131"/>
+                  </a:lnTo>
+                  <a:lnTo>
+                    <a:pt x="422066" y="833694"/>
+                  </a:lnTo>
+                  <a:lnTo>
+                    <a:pt x="351722" y="831241"/>
+                  </a:lnTo>
+                  <a:lnTo>
+                    <a:pt x="281377" y="828773"/>
+                  </a:lnTo>
+                  <a:lnTo>
+                    <a:pt x="211033" y="826289"/>
+                  </a:lnTo>
+                  <a:lnTo>
+                    <a:pt x="140688" y="823789"/>
+                  </a:lnTo>
+                  <a:lnTo>
+                    <a:pt x="70344" y="821273"/>
+                  </a:lnTo>
+                  <a:lnTo>
+                    <a:pt x="0" y="818740"/>
+                  </a:lnTo>
+                  <a:close/>
+                </a:path>
+              </a:pathLst>
+            </a:custGeom>
+            <a:solidFill>
+              <a:srgbClr val="FF8C00">
+                <a:alpha val="20000"/>
+              </a:srgbClr>
+            </a:solidFill>
+          </p:spPr>
+          <p:txBody>
+            <a:bodyPr/>
+            <a:lstStyle/>
+            <a:p/>
+          </p:txBody>
+        </p:sp>
+        <p:sp>
+          <p:nvSpPr>
+            <p:cNvPr id="72" name="pl72"/>
+            <p:cNvSpPr/>
+            <p:nvPr/>
+          </p:nvSpPr>
+          <p:spPr>
+            <a:xfrm>
+              <a:off x="1235312" y="4379265"/>
+              <a:ext cx="6964104" cy="1004873"/>
+            </a:xfrm>
+            <a:custGeom>
+              <a:avLst/>
+              <a:pathLst>
+                <a:path w="6964104" h="1004873">
+                  <a:moveTo>
+                    <a:pt x="0" y="0"/>
+                  </a:moveTo>
+                  <a:lnTo>
+                    <a:pt x="70344" y="38509"/>
+                  </a:lnTo>
+                  <a:lnTo>
+                    <a:pt x="140688" y="75798"/>
+                  </a:lnTo>
+                  <a:lnTo>
+                    <a:pt x="211033" y="111904"/>
+                  </a:lnTo>
+                  <a:lnTo>
+                    <a:pt x="281377" y="146865"/>
+                  </a:lnTo>
+                  <a:lnTo>
+                    <a:pt x="351722" y="180718"/>
+                  </a:lnTo>
+                  <a:lnTo>
+                    <a:pt x="422066" y="213497"/>
+                  </a:lnTo>
+                  <a:lnTo>
+                    <a:pt x="492411" y="245236"/>
+                  </a:lnTo>
+                  <a:lnTo>
+                    <a:pt x="562755" y="275970"/>
+                  </a:lnTo>
+                  <a:lnTo>
+                    <a:pt x="633100" y="305728"/>
+                  </a:lnTo>
+                  <a:lnTo>
+                    <a:pt x="703444" y="334543"/>
+                  </a:lnTo>
+                  <a:lnTo>
+                    <a:pt x="773789" y="362444"/>
+                  </a:lnTo>
+                  <a:lnTo>
+                    <a:pt x="844133" y="389461"/>
+                  </a:lnTo>
+                  <a:lnTo>
+                    <a:pt x="914478" y="415621"/>
+                  </a:lnTo>
+                  <a:lnTo>
+                    <a:pt x="984822" y="440951"/>
+                  </a:lnTo>
+                  <a:lnTo>
+                    <a:pt x="1055167" y="465478"/>
+                  </a:lnTo>
+                  <a:lnTo>
+                    <a:pt x="1125511" y="489227"/>
+                  </a:lnTo>
+                  <a:lnTo>
+                    <a:pt x="1195856" y="512223"/>
+                  </a:lnTo>
+                  <a:lnTo>
+                    <a:pt x="1266200" y="534490"/>
+                  </a:lnTo>
+                  <a:lnTo>
+                    <a:pt x="1336545" y="556051"/>
+                  </a:lnTo>
+                  <a:lnTo>
+                    <a:pt x="1406889" y="576928"/>
+                  </a:lnTo>
+                  <a:lnTo>
+                    <a:pt x="1477234" y="597143"/>
+                  </a:lnTo>
+                  <a:lnTo>
+                    <a:pt x="1547578" y="616717"/>
+                  </a:lnTo>
+                  <a:lnTo>
+                    <a:pt x="1617923" y="635671"/>
+                  </a:lnTo>
+                  <a:lnTo>
+                    <a:pt x="1688267" y="654023"/>
+                  </a:lnTo>
+                  <a:lnTo>
+                    <a:pt x="1758612" y="671794"/>
+                  </a:lnTo>
+                  <a:lnTo>
+                    <a:pt x="1828956" y="689001"/>
+                  </a:lnTo>
+                  <a:lnTo>
+                    <a:pt x="1899301" y="705662"/>
+                  </a:lnTo>
+                  <a:lnTo>
+                    <a:pt x="1969645" y="721795"/>
+                  </a:lnTo>
+                  <a:lnTo>
+                    <a:pt x="2039990" y="737416"/>
+                  </a:lnTo>
+                  <a:lnTo>
+                    <a:pt x="2110334" y="752542"/>
+                  </a:lnTo>
+                  <a:lnTo>
+                    <a:pt x="2180679" y="767188"/>
+                  </a:lnTo>
+                  <a:lnTo>
+                    <a:pt x="2251023" y="781370"/>
+                  </a:lnTo>
+                  <a:lnTo>
+                    <a:pt x="2321368" y="795103"/>
+                  </a:lnTo>
+                  <a:lnTo>
+                    <a:pt x="2391712" y="808399"/>
+                  </a:lnTo>
+                  <a:lnTo>
+                    <a:pt x="2462057" y="821274"/>
+                  </a:lnTo>
+                  <a:lnTo>
+                    <a:pt x="2532401" y="833741"/>
+                  </a:lnTo>
+                  <a:lnTo>
+                    <a:pt x="2602746" y="845813"/>
+                  </a:lnTo>
+                  <a:lnTo>
+                    <a:pt x="2673090" y="857501"/>
+                  </a:lnTo>
+                  <a:lnTo>
+                    <a:pt x="2743435" y="868819"/>
+                  </a:lnTo>
+                  <a:lnTo>
+                    <a:pt x="2813779" y="879779"/>
+                  </a:lnTo>
+                  <a:lnTo>
+                    <a:pt x="2884124" y="890390"/>
+                  </a:lnTo>
+                  <a:lnTo>
+                    <a:pt x="2954468" y="900665"/>
+                  </a:lnTo>
+                  <a:lnTo>
+                    <a:pt x="3024813" y="910615"/>
+                  </a:lnTo>
+                  <a:lnTo>
+                    <a:pt x="3095157" y="916123"/>
+                  </a:lnTo>
+                  <a:lnTo>
+                    <a:pt x="3165502" y="918032"/>
+                  </a:lnTo>
+                  <a:lnTo>
+                    <a:pt x="3235846" y="919929"/>
+                  </a:lnTo>
+                  <a:lnTo>
+                    <a:pt x="3306191" y="921814"/>
+                  </a:lnTo>
+                  <a:lnTo>
+                    <a:pt x="3376535" y="923686"/>
+                  </a:lnTo>
+                  <a:lnTo>
+                    <a:pt x="3446880" y="925547"/>
+                  </a:lnTo>
+                  <a:lnTo>
+                    <a:pt x="3517224" y="927396"/>
+                  </a:lnTo>
+                  <a:lnTo>
+                    <a:pt x="3587569" y="929233"/>
+                  </a:lnTo>
+                  <a:lnTo>
+                    <a:pt x="3657913" y="931058"/>
+                  </a:lnTo>
+                  <a:lnTo>
+                    <a:pt x="3728257" y="932872"/>
+                  </a:lnTo>
+                  <a:lnTo>
+                    <a:pt x="3798602" y="934674"/>
+                  </a:lnTo>
+                  <a:lnTo>
+                    <a:pt x="3868946" y="936464"/>
+                  </a:lnTo>
+                  <a:lnTo>
+                    <a:pt x="3939291" y="938243"/>
+                  </a:lnTo>
+                  <a:lnTo>
+                    <a:pt x="4009635" y="940011"/>
+                  </a:lnTo>
+                  <a:lnTo>
+                    <a:pt x="4079980" y="941767"/>
+                  </a:lnTo>
+                  <a:lnTo>
+                    <a:pt x="4150324" y="943512"/>
+                  </a:lnTo>
+                  <a:lnTo>
+                    <a:pt x="4220669" y="945246"/>
+                  </a:lnTo>
+                  <a:lnTo>
+                    <a:pt x="4291013" y="946969"/>
+                  </a:lnTo>
+                  <a:lnTo>
+                    <a:pt x="4361358" y="948680"/>
+                  </a:lnTo>
+                  <a:lnTo>
+                    <a:pt x="4431702" y="950381"/>
+                  </a:lnTo>
+                  <a:lnTo>
+                    <a:pt x="4502047" y="952071"/>
+                  </a:lnTo>
+                  <a:lnTo>
+                    <a:pt x="4572391" y="953750"/>
+                  </a:lnTo>
+                  <a:lnTo>
+                    <a:pt x="4642736" y="955419"/>
+                  </a:lnTo>
+                  <a:lnTo>
+                    <a:pt x="4713080" y="957076"/>
+                  </a:lnTo>
+                  <a:lnTo>
+                    <a:pt x="4783425" y="958723"/>
+                  </a:lnTo>
+                  <a:lnTo>
+                    <a:pt x="4853769" y="960360"/>
+                  </a:lnTo>
+                  <a:lnTo>
+                    <a:pt x="4924114" y="961986"/>
+                  </a:lnTo>
+                  <a:lnTo>
+                    <a:pt x="4994458" y="963601"/>
+                  </a:lnTo>
+                  <a:lnTo>
+                    <a:pt x="5064803" y="965207"/>
+                  </a:lnTo>
+                  <a:lnTo>
+                    <a:pt x="5135147" y="966802"/>
+                  </a:lnTo>
+                  <a:lnTo>
+                    <a:pt x="5205492" y="968387"/>
+                  </a:lnTo>
+                  <a:lnTo>
+                    <a:pt x="5275836" y="969961"/>
+                  </a:lnTo>
+                  <a:lnTo>
+                    <a:pt x="5346181" y="971526"/>
+                  </a:lnTo>
+                  <a:lnTo>
+                    <a:pt x="5416525" y="973080"/>
+                  </a:lnTo>
+                  <a:lnTo>
+                    <a:pt x="5486870" y="974625"/>
+                  </a:lnTo>
+                  <a:lnTo>
+                    <a:pt x="5557214" y="976160"/>
+                  </a:lnTo>
+                  <a:lnTo>
+                    <a:pt x="5627559" y="977685"/>
+                  </a:lnTo>
+                  <a:lnTo>
+                    <a:pt x="5697903" y="979200"/>
+                  </a:lnTo>
+                  <a:lnTo>
+                    <a:pt x="5768248" y="980705"/>
+                  </a:lnTo>
+                  <a:lnTo>
+                    <a:pt x="5838592" y="982201"/>
+                  </a:lnTo>
+                  <a:lnTo>
+                    <a:pt x="5908937" y="983687"/>
+                  </a:lnTo>
+                  <a:lnTo>
+                    <a:pt x="5979281" y="985164"/>
+                  </a:lnTo>
+                  <a:lnTo>
+                    <a:pt x="6049626" y="986631"/>
+                  </a:lnTo>
+                  <a:lnTo>
+                    <a:pt x="6119970" y="988089"/>
+                  </a:lnTo>
+                  <a:lnTo>
+                    <a:pt x="6190315" y="989538"/>
+                  </a:lnTo>
+                  <a:lnTo>
+                    <a:pt x="6260659" y="990977"/>
+                  </a:lnTo>
+                  <a:lnTo>
+                    <a:pt x="6331004" y="992407"/>
+                  </a:lnTo>
+                  <a:lnTo>
+                    <a:pt x="6401348" y="993828"/>
+                  </a:lnTo>
+                  <a:lnTo>
+                    <a:pt x="6471693" y="995240"/>
+                  </a:lnTo>
+                  <a:lnTo>
+                    <a:pt x="6542037" y="996643"/>
+                  </a:lnTo>
+                  <a:lnTo>
+                    <a:pt x="6612382" y="998037"/>
+                  </a:lnTo>
+                  <a:lnTo>
+                    <a:pt x="6682726" y="999422"/>
+                  </a:lnTo>
+                  <a:lnTo>
+                    <a:pt x="6753071" y="1000798"/>
+                  </a:lnTo>
+                  <a:lnTo>
+                    <a:pt x="6823415" y="1002165"/>
+                  </a:lnTo>
+                  <a:lnTo>
+                    <a:pt x="6893760" y="1003523"/>
+                  </a:lnTo>
+                  <a:lnTo>
+                    <a:pt x="6964104" y="1004873"/>
+                  </a:lnTo>
+                </a:path>
+              </a:pathLst>
+            </a:custGeom>
+          </p:spPr>
+          <p:txBody>
+            <a:bodyPr/>
+            <a:lstStyle/>
+            <a:p/>
+          </p:txBody>
+        </p:sp>
+        <p:sp>
+          <p:nvSpPr>
+            <p:cNvPr id="73" name="pl73"/>
+            <p:cNvSpPr/>
+            <p:nvPr/>
+          </p:nvSpPr>
+          <p:spPr>
+            <a:xfrm>
+              <a:off x="1235312" y="5198006"/>
+              <a:ext cx="6964104" cy="345689"/>
+            </a:xfrm>
+            <a:custGeom>
+              <a:avLst/>
+              <a:pathLst>
+                <a:path w="6964104" h="345689">
+                  <a:moveTo>
+                    <a:pt x="6964104" y="345689"/>
+                  </a:moveTo>
+                  <a:lnTo>
+                    <a:pt x="6893760" y="344052"/>
+                  </a:lnTo>
+                  <a:lnTo>
+                    <a:pt x="6823415" y="342361"/>
+                  </a:lnTo>
+                  <a:lnTo>
+                    <a:pt x="6753071" y="340615"/>
+                  </a:lnTo>
+                  <a:lnTo>
+                    <a:pt x="6682726" y="338812"/>
+                  </a:lnTo>
+                  <a:lnTo>
+                    <a:pt x="6612382" y="336949"/>
+                  </a:lnTo>
+                  <a:lnTo>
+                    <a:pt x="6542037" y="335026"/>
+                  </a:lnTo>
+                  <a:lnTo>
+                    <a:pt x="6471693" y="333040"/>
+                  </a:lnTo>
+                  <a:lnTo>
+                    <a:pt x="6401348" y="330988"/>
+                  </a:lnTo>
+                  <a:lnTo>
+                    <a:pt x="6331004" y="328870"/>
+                  </a:lnTo>
+                  <a:lnTo>
+                    <a:pt x="6260659" y="326682"/>
+                  </a:lnTo>
+                  <a:lnTo>
+                    <a:pt x="6190315" y="324422"/>
+                  </a:lnTo>
+                  <a:lnTo>
+                    <a:pt x="6119970" y="322088"/>
+                  </a:lnTo>
+                  <a:lnTo>
+                    <a:pt x="6049626" y="319678"/>
+                  </a:lnTo>
+                  <a:lnTo>
+                    <a:pt x="5979281" y="317189"/>
+                  </a:lnTo>
+                  <a:lnTo>
+                    <a:pt x="5908937" y="314619"/>
+                  </a:lnTo>
+                  <a:lnTo>
+                    <a:pt x="5838592" y="311964"/>
+                  </a:lnTo>
+                  <a:lnTo>
+                    <a:pt x="5768248" y="309223"/>
+                  </a:lnTo>
+                  <a:lnTo>
+                    <a:pt x="5697903" y="306391"/>
+                  </a:lnTo>
+                  <a:lnTo>
+                    <a:pt x="5627559" y="303467"/>
+                  </a:lnTo>
+                  <a:lnTo>
+                    <a:pt x="5557214" y="300447"/>
+                  </a:lnTo>
+                  <a:lnTo>
+                    <a:pt x="5486870" y="297328"/>
+                  </a:lnTo>
+                  <a:lnTo>
+                    <a:pt x="5416525" y="294108"/>
+                  </a:lnTo>
+                  <a:lnTo>
+                    <a:pt x="5346181" y="290781"/>
+                  </a:lnTo>
+                  <a:lnTo>
+                    <a:pt x="5275836" y="287346"/>
+                  </a:lnTo>
+                  <a:lnTo>
+                    <a:pt x="5205492" y="283798"/>
+                  </a:lnTo>
+                  <a:lnTo>
+                    <a:pt x="5135147" y="280134"/>
+                  </a:lnTo>
+                  <a:lnTo>
+                    <a:pt x="5064803" y="276350"/>
+                  </a:lnTo>
+                  <a:lnTo>
+                    <a:pt x="4994458" y="272442"/>
+                  </a:lnTo>
+                  <a:lnTo>
+                    <a:pt x="4924114" y="268406"/>
+                  </a:lnTo>
+                  <a:lnTo>
+                    <a:pt x="4853769" y="264238"/>
+                  </a:lnTo>
+                  <a:lnTo>
+                    <a:pt x="4783425" y="259934"/>
+                  </a:lnTo>
+                  <a:lnTo>
+                    <a:pt x="4713080" y="255488"/>
+                  </a:lnTo>
+                  <a:lnTo>
+                    <a:pt x="4642736" y="250897"/>
+                  </a:lnTo>
+                  <a:lnTo>
+                    <a:pt x="4572391" y="246155"/>
+                  </a:lnTo>
+                  <a:lnTo>
+                    <a:pt x="4502047" y="241259"/>
+                  </a:lnTo>
+                  <a:lnTo>
+                    <a:pt x="4431702" y="236201"/>
+                  </a:lnTo>
+                  <a:lnTo>
+                    <a:pt x="4361358" y="230979"/>
+                  </a:lnTo>
+                  <a:lnTo>
+                    <a:pt x="4291013" y="225585"/>
+                  </a:lnTo>
+                  <a:lnTo>
+                    <a:pt x="4220669" y="220015"/>
+                  </a:lnTo>
+                  <a:lnTo>
+                    <a:pt x="4150324" y="214262"/>
+                  </a:lnTo>
+                  <a:lnTo>
+                    <a:pt x="4079980" y="208320"/>
+                  </a:lnTo>
+                  <a:lnTo>
+                    <a:pt x="4009635" y="202185"/>
+                  </a:lnTo>
+                  <a:lnTo>
+                    <a:pt x="3939291" y="195848"/>
+                  </a:lnTo>
+                  <a:lnTo>
+                    <a:pt x="3868946" y="189304"/>
+                  </a:lnTo>
+                  <a:lnTo>
+                    <a:pt x="3798602" y="182545"/>
+                  </a:lnTo>
+                  <a:lnTo>
+                    <a:pt x="3728257" y="175565"/>
+                  </a:lnTo>
+                  <a:lnTo>
+                    <a:pt x="3657913" y="168357"/>
+                  </a:lnTo>
+                  <a:lnTo>
+                    <a:pt x="3587569" y="160912"/>
+                  </a:lnTo>
+                  <a:lnTo>
+                    <a:pt x="3517224" y="153224"/>
+                  </a:lnTo>
+                  <a:lnTo>
+                    <a:pt x="3446880" y="145283"/>
+                  </a:lnTo>
+                  <a:lnTo>
+                    <a:pt x="3376535" y="137083"/>
+                  </a:lnTo>
+                  <a:lnTo>
+                    <a:pt x="3306191" y="128615"/>
+                  </a:lnTo>
+                  <a:lnTo>
+                    <a:pt x="3235846" y="119868"/>
+                  </a:lnTo>
+                  <a:lnTo>
+                    <a:pt x="3165502" y="110836"/>
+                  </a:lnTo>
+                  <a:lnTo>
+                    <a:pt x="3095157" y="101508"/>
+                  </a:lnTo>
+                  <a:lnTo>
+                    <a:pt x="3024813" y="95460"/>
+                  </a:lnTo>
+                  <a:lnTo>
+                    <a:pt x="2954468" y="93527"/>
+                  </a:lnTo>
+                  <a:lnTo>
+                    <a:pt x="2884124" y="91580"/>
+                  </a:lnTo>
+                  <a:lnTo>
+                    <a:pt x="2813779" y="89621"/>
+                  </a:lnTo>
+                  <a:lnTo>
+                    <a:pt x="2743435" y="87650"/>
+                  </a:lnTo>
+                  <a:lnTo>
+                    <a:pt x="2673090" y="85666"/>
+                  </a:lnTo>
+                  <a:lnTo>
+                    <a:pt x="2602746" y="83669"/>
+                  </a:lnTo>
+                  <a:lnTo>
+                    <a:pt x="2532401" y="81659"/>
+                  </a:lnTo>
+                  <a:lnTo>
+                    <a:pt x="2462057" y="79636"/>
+                  </a:lnTo>
+                  <a:lnTo>
+                    <a:pt x="2391712" y="77601"/>
+                  </a:lnTo>
+                  <a:lnTo>
+                    <a:pt x="2321368" y="75552"/>
+                  </a:lnTo>
+                  <a:lnTo>
+                    <a:pt x="2251023" y="73490"/>
+                  </a:lnTo>
+                  <a:lnTo>
+                    <a:pt x="2180679" y="71414"/>
+                  </a:lnTo>
+                  <a:lnTo>
+                    <a:pt x="2110334" y="69326"/>
+                  </a:lnTo>
+                  <a:lnTo>
+                    <a:pt x="2039990" y="67223"/>
+                  </a:lnTo>
+                  <a:lnTo>
+                    <a:pt x="1969645" y="65108"/>
+                  </a:lnTo>
+                  <a:lnTo>
+                    <a:pt x="1899301" y="62978"/>
+                  </a:lnTo>
+                  <a:lnTo>
+                    <a:pt x="1828956" y="60835"/>
+                  </a:lnTo>
+                  <a:lnTo>
+                    <a:pt x="1758612" y="58678"/>
+                  </a:lnTo>
+                  <a:lnTo>
+                    <a:pt x="1688267" y="56508"/>
+                  </a:lnTo>
+                  <a:lnTo>
+                    <a:pt x="1617923" y="54323"/>
+                  </a:lnTo>
+                  <a:lnTo>
+                    <a:pt x="1547578" y="52124"/>
+                  </a:lnTo>
+                  <a:lnTo>
+                    <a:pt x="1477234" y="49911"/>
+                  </a:lnTo>
+                  <a:lnTo>
+                    <a:pt x="1406889" y="47684"/>
+                  </a:lnTo>
+                  <a:lnTo>
+                    <a:pt x="1336545" y="45442"/>
+                  </a:lnTo>
+                  <a:lnTo>
+                    <a:pt x="1266200" y="43186"/>
+                  </a:lnTo>
+                  <a:lnTo>
+                    <a:pt x="1195856" y="40916"/>
+                  </a:lnTo>
+                  <a:lnTo>
+                    <a:pt x="1125511" y="38630"/>
+                  </a:lnTo>
+                  <a:lnTo>
+                    <a:pt x="1055167" y="36330"/>
+                  </a:lnTo>
+                  <a:lnTo>
+                    <a:pt x="984822" y="34016"/>
+                  </a:lnTo>
+                  <a:lnTo>
+                    <a:pt x="914478" y="31686"/>
+                  </a:lnTo>
+                  <a:lnTo>
+                    <a:pt x="844133" y="29341"/>
+                  </a:lnTo>
+                  <a:lnTo>
+                    <a:pt x="773789" y="26982"/>
+                  </a:lnTo>
+                  <a:lnTo>
+                    <a:pt x="703444" y="24607"/>
+                  </a:lnTo>
+                  <a:lnTo>
+                    <a:pt x="633100" y="22217"/>
+                  </a:lnTo>
+                  <a:lnTo>
+                    <a:pt x="562755" y="19811"/>
+                  </a:lnTo>
+                  <a:lnTo>
+                    <a:pt x="492411" y="17390"/>
+                  </a:lnTo>
+                  <a:lnTo>
+                    <a:pt x="422066" y="14953"/>
+                  </a:lnTo>
+                  <a:lnTo>
+                    <a:pt x="351722" y="12501"/>
+                  </a:lnTo>
+                  <a:lnTo>
+                    <a:pt x="281377" y="10032"/>
+                  </a:lnTo>
+                  <a:lnTo>
+                    <a:pt x="211033" y="7548"/>
+                  </a:lnTo>
+                  <a:lnTo>
+                    <a:pt x="140688" y="5048"/>
+                  </a:lnTo>
+                  <a:lnTo>
+                    <a:pt x="70344" y="2532"/>
+                  </a:lnTo>
+                  <a:lnTo>
+                    <a:pt x="0" y="0"/>
+                  </a:lnTo>
+                </a:path>
+              </a:pathLst>
+            </a:custGeom>
+          </p:spPr>
+          <p:txBody>
+            <a:bodyPr/>
+            <a:lstStyle/>
+            <a:p/>
+          </p:txBody>
+        </p:sp>
+        <p:sp>
+          <p:nvSpPr>
+            <p:cNvPr id="74" name="pl74"/>
+            <p:cNvSpPr/>
+            <p:nvPr/>
+          </p:nvSpPr>
+          <p:spPr>
+            <a:xfrm>
+              <a:off x="1235312" y="4900489"/>
+              <a:ext cx="6964104" cy="590847"/>
+            </a:xfrm>
+            <a:custGeom>
+              <a:avLst/>
+              <a:pathLst>
+                <a:path w="6964104" h="590847">
+                  <a:moveTo>
+                    <a:pt x="0" y="0"/>
+                  </a:moveTo>
+                  <a:lnTo>
+                    <a:pt x="70344" y="13265"/>
+                  </a:lnTo>
+                  <a:lnTo>
+                    <a:pt x="140688" y="26277"/>
+                  </a:lnTo>
+                  <a:lnTo>
+                    <a:pt x="211033" y="39040"/>
+                  </a:lnTo>
+                  <a:lnTo>
+                    <a:pt x="281377" y="51558"/>
+                  </a:lnTo>
+                  <a:lnTo>
+                    <a:pt x="351722" y="63837"/>
+                  </a:lnTo>
+                  <a:lnTo>
+                    <a:pt x="422066" y="75881"/>
+                  </a:lnTo>
+                  <a:lnTo>
+                    <a:pt x="492411" y="87695"/>
+                  </a:lnTo>
+                  <a:lnTo>
+                    <a:pt x="562755" y="99282"/>
+                  </a:lnTo>
+                  <a:lnTo>
+                    <a:pt x="633100" y="110648"/>
+                  </a:lnTo>
+                  <a:lnTo>
+                    <a:pt x="703444" y="121796"/>
+                  </a:lnTo>
+                  <a:lnTo>
+                    <a:pt x="773789" y="132731"/>
+                  </a:lnTo>
+                  <a:lnTo>
+                    <a:pt x="844133" y="143457"/>
+                  </a:lnTo>
+                  <a:lnTo>
+                    <a:pt x="914478" y="153977"/>
+                  </a:lnTo>
+                  <a:lnTo>
+                    <a:pt x="984822" y="164296"/>
+                  </a:lnTo>
+                  <a:lnTo>
+                    <a:pt x="1055167" y="174417"/>
+                  </a:lnTo>
+                  <a:lnTo>
+                    <a:pt x="1125511" y="184345"/>
+                  </a:lnTo>
+                  <a:lnTo>
+                    <a:pt x="1195856" y="194083"/>
+                  </a:lnTo>
+                  <a:lnTo>
+                    <a:pt x="1266200" y="203635"/>
+                  </a:lnTo>
+                  <a:lnTo>
+                    <a:pt x="1336545" y="213003"/>
+                  </a:lnTo>
+                  <a:lnTo>
+                    <a:pt x="1406889" y="222193"/>
+                  </a:lnTo>
+                  <a:lnTo>
+                    <a:pt x="1477234" y="231206"/>
+                  </a:lnTo>
+                  <a:lnTo>
+                    <a:pt x="1547578" y="240047"/>
+                  </a:lnTo>
+                  <a:lnTo>
+                    <a:pt x="1617923" y="248719"/>
+                  </a:lnTo>
+                  <a:lnTo>
+                    <a:pt x="1688267" y="257225"/>
+                  </a:lnTo>
+                  <a:lnTo>
+                    <a:pt x="1758612" y="265568"/>
+                  </a:lnTo>
+                  <a:lnTo>
+                    <a:pt x="1828956" y="273752"/>
+                  </a:lnTo>
+                  <a:lnTo>
+                    <a:pt x="1899301" y="281779"/>
+                  </a:lnTo>
+                  <a:lnTo>
+                    <a:pt x="1969645" y="289652"/>
+                  </a:lnTo>
+                  <a:lnTo>
+                    <a:pt x="2039990" y="297375"/>
+                  </a:lnTo>
+                  <a:lnTo>
+                    <a:pt x="2110334" y="304949"/>
+                  </a:lnTo>
+                  <a:lnTo>
+                    <a:pt x="2180679" y="312379"/>
+                  </a:lnTo>
+                  <a:lnTo>
+                    <a:pt x="2251023" y="319667"/>
+                  </a:lnTo>
+                  <a:lnTo>
+                    <a:pt x="2321368" y="326815"/>
+                  </a:lnTo>
+                  <a:lnTo>
+                    <a:pt x="2391712" y="333827"/>
+                  </a:lnTo>
+                  <a:lnTo>
+                    <a:pt x="2462057" y="340704"/>
+                  </a:lnTo>
+                  <a:lnTo>
+                    <a:pt x="2532401" y="347450"/>
+                  </a:lnTo>
+                  <a:lnTo>
+                    <a:pt x="2602746" y="354066"/>
+                  </a:lnTo>
+                  <a:lnTo>
+                    <a:pt x="2673090" y="360556"/>
+                  </a:lnTo>
+                  <a:lnTo>
+                    <a:pt x="2743435" y="366922"/>
+                  </a:lnTo>
+                  <a:lnTo>
+                    <a:pt x="2813779" y="373166"/>
+                  </a:lnTo>
+                  <a:lnTo>
+                    <a:pt x="2884124" y="379290"/>
+                  </a:lnTo>
+                  <a:lnTo>
+                    <a:pt x="2954468" y="385297"/>
+                  </a:lnTo>
+                  <a:lnTo>
+                    <a:pt x="3024813" y="391189"/>
+                  </a:lnTo>
+                  <a:lnTo>
+                    <a:pt x="3095157" y="396969"/>
+                  </a:lnTo>
+                  <a:lnTo>
+                    <a:pt x="3165502" y="402638"/>
+                  </a:lnTo>
+                  <a:lnTo>
+                    <a:pt x="3235846" y="408198"/>
+                  </a:lnTo>
+                  <a:lnTo>
+                    <a:pt x="3306191" y="413652"/>
+                  </a:lnTo>
+                  <a:lnTo>
+                    <a:pt x="3376535" y="419002"/>
+                  </a:lnTo>
+                  <a:lnTo>
+                    <a:pt x="3446880" y="424249"/>
+                  </a:lnTo>
+                  <a:lnTo>
+                    <a:pt x="3517224" y="429396"/>
+                  </a:lnTo>
+                  <a:lnTo>
+                    <a:pt x="3587569" y="434444"/>
+                  </a:lnTo>
+                  <a:lnTo>
+                    <a:pt x="3657913" y="439396"/>
+                  </a:lnTo>
+                  <a:lnTo>
+                    <a:pt x="3728257" y="444253"/>
+                  </a:lnTo>
+                  <a:lnTo>
+                    <a:pt x="3798602" y="449017"/>
+                  </a:lnTo>
+                  <a:lnTo>
+                    <a:pt x="3868946" y="453690"/>
+                  </a:lnTo>
+                  <a:lnTo>
+                    <a:pt x="3939291" y="458273"/>
+                  </a:lnTo>
+                  <a:lnTo>
+                    <a:pt x="4009635" y="462769"/>
+                  </a:lnTo>
+                  <a:lnTo>
+                    <a:pt x="4079980" y="467179"/>
+                  </a:lnTo>
+                  <a:lnTo>
+                    <a:pt x="4150324" y="471504"/>
+                  </a:lnTo>
+                  <a:lnTo>
+                    <a:pt x="4220669" y="475747"/>
+                  </a:lnTo>
+                  <a:lnTo>
+                    <a:pt x="4291013" y="479908"/>
+                  </a:lnTo>
+                  <a:lnTo>
+                    <a:pt x="4361358" y="483990"/>
+                  </a:lnTo>
+                  <a:lnTo>
+                    <a:pt x="4431702" y="487993"/>
+                  </a:lnTo>
+                  <a:lnTo>
+                    <a:pt x="4502047" y="491920"/>
+                  </a:lnTo>
+                  <a:lnTo>
+                    <a:pt x="4572391" y="495772"/>
+                  </a:lnTo>
+                  <a:lnTo>
+                    <a:pt x="4642736" y="499550"/>
+                  </a:lnTo>
+                  <a:lnTo>
+                    <a:pt x="4713080" y="503256"/>
+                  </a:lnTo>
+                  <a:lnTo>
+                    <a:pt x="4783425" y="506891"/>
+                  </a:lnTo>
+                  <a:lnTo>
+                    <a:pt x="4853769" y="510456"/>
+                  </a:lnTo>
+                  <a:lnTo>
+                    <a:pt x="4924114" y="513953"/>
+                  </a:lnTo>
+                  <a:lnTo>
+                    <a:pt x="4994458" y="517383"/>
+                  </a:lnTo>
+                  <a:lnTo>
+                    <a:pt x="5064803" y="520748"/>
+                  </a:lnTo>
+                  <a:lnTo>
+                    <a:pt x="5135147" y="524048"/>
+                  </a:lnTo>
+                  <a:lnTo>
+                    <a:pt x="5205492" y="527285"/>
+                  </a:lnTo>
+                  <a:lnTo>
+                    <a:pt x="5275836" y="530460"/>
+                  </a:lnTo>
+                  <a:lnTo>
+                    <a:pt x="5346181" y="533574"/>
+                  </a:lnTo>
+                  <a:lnTo>
+                    <a:pt x="5416525" y="536629"/>
+                  </a:lnTo>
+                  <a:lnTo>
+                    <a:pt x="5486870" y="539625"/>
+                  </a:lnTo>
+                  <a:lnTo>
+                    <a:pt x="5557214" y="542564"/>
+                  </a:lnTo>
+                  <a:lnTo>
+                    <a:pt x="5627559" y="545447"/>
+                  </a:lnTo>
+                  <a:lnTo>
+                    <a:pt x="5697903" y="548274"/>
+                  </a:lnTo>
+                  <a:lnTo>
+                    <a:pt x="5768248" y="551048"/>
+                  </a:lnTo>
+                  <a:lnTo>
+                    <a:pt x="5838592" y="553768"/>
+                  </a:lnTo>
+                  <a:lnTo>
+                    <a:pt x="5908937" y="556436"/>
+                  </a:lnTo>
+                  <a:lnTo>
+                    <a:pt x="5979281" y="559053"/>
+                  </a:lnTo>
+                  <a:lnTo>
+                    <a:pt x="6049626" y="561620"/>
+                  </a:lnTo>
+                  <a:lnTo>
+                    <a:pt x="6119970" y="564138"/>
+                  </a:lnTo>
+                  <a:lnTo>
+                    <a:pt x="6190315" y="566608"/>
+                  </a:lnTo>
+                  <a:lnTo>
+                    <a:pt x="6260659" y="569031"/>
+                  </a:lnTo>
+                  <a:lnTo>
+                    <a:pt x="6331004" y="571407"/>
+                  </a:lnTo>
+                  <a:lnTo>
+                    <a:pt x="6401348" y="573738"/>
+                  </a:lnTo>
+                  <a:lnTo>
+                    <a:pt x="6471693" y="576024"/>
+                  </a:lnTo>
+                  <a:lnTo>
+                    <a:pt x="6542037" y="578266"/>
+                  </a:lnTo>
+                  <a:lnTo>
+                    <a:pt x="6612382" y="580465"/>
+                  </a:lnTo>
+                  <a:lnTo>
+                    <a:pt x="6682726" y="582623"/>
+                  </a:lnTo>
+                  <a:lnTo>
+                    <a:pt x="6753071" y="584739"/>
+                  </a:lnTo>
+                  <a:lnTo>
+                    <a:pt x="6823415" y="586814"/>
+                  </a:lnTo>
+                  <a:lnTo>
+                    <a:pt x="6893760" y="588850"/>
+                  </a:lnTo>
+                  <a:lnTo>
+                    <a:pt x="6964104" y="590847"/>
+                  </a:lnTo>
+                </a:path>
+              </a:pathLst>
+            </a:custGeom>
+            <a:ln w="27101" cap="flat">
+              <a:solidFill>
+                <a:srgbClr val="FF8C00">
+                  <a:alpha val="100000"/>
+                </a:srgbClr>
+              </a:solidFill>
+              <a:prstDash val="solid"/>
+              <a:round/>
+            </a:ln>
+          </p:spPr>
+          <p:txBody>
+            <a:bodyPr/>
+            <a:lstStyle/>
+            <a:p/>
+          </p:txBody>
+        </p:sp>
+        <p:sp>
+          <p:nvSpPr>
+            <p:cNvPr id="75" name="pl75"/>
+            <p:cNvSpPr/>
+            <p:nvPr/>
+          </p:nvSpPr>
+          <p:spPr>
+            <a:xfrm>
+              <a:off x="887106" y="5294352"/>
+              <a:ext cx="7660515" cy="0"/>
+            </a:xfrm>
+            <a:custGeom>
+              <a:avLst/>
+              <a:pathLst>
+                <a:path w="7660515" h="0">
+                  <a:moveTo>
+                    <a:pt x="0" y="0"/>
+                  </a:moveTo>
+                  <a:lnTo>
+                    <a:pt x="7660515" y="0"/>
+                  </a:lnTo>
+                  <a:lnTo>
+                    <a:pt x="7660515" y="0"/>
+                  </a:lnTo>
+                </a:path>
+              </a:pathLst>
+            </a:custGeom>
+            <a:ln w="13550" cap="flat">
+              <a:solidFill>
+                <a:srgbClr val="7F7F7F">
+                  <a:alpha val="100000"/>
+                </a:srgbClr>
+              </a:solidFill>
+              <a:prstDash val="dash"/>
+              <a:round/>
+            </a:ln>
+          </p:spPr>
+          <p:txBody>
+            <a:bodyPr/>
+            <a:lstStyle/>
+            <a:p/>
+          </p:txBody>
+        </p:sp>
+        <p:sp>
+          <p:nvSpPr>
+            <p:cNvPr id="76" name="pl76"/>
+            <p:cNvSpPr/>
+            <p:nvPr/>
+          </p:nvSpPr>
+          <p:spPr>
+            <a:xfrm>
+              <a:off x="4292500" y="4336484"/>
+              <a:ext cx="0" cy="1317069"/>
+            </a:xfrm>
+            <a:custGeom>
+              <a:avLst/>
+              <a:pathLst>
+                <a:path w="0" h="1317069">
+                  <a:moveTo>
+                    <a:pt x="0" y="1317069"/>
+                  </a:moveTo>
+                  <a:lnTo>
+                    <a:pt x="0" y="0"/>
+                  </a:lnTo>
+                  <a:lnTo>
+                    <a:pt x="0" y="0"/>
+                  </a:lnTo>
+                </a:path>
+              </a:pathLst>
+            </a:custGeom>
+            <a:ln w="13550" cap="flat">
+              <a:solidFill>
+                <a:srgbClr val="666666">
+                  <a:alpha val="100000"/>
+                </a:srgbClr>
+              </a:solidFill>
+              <a:prstDash val="dot"/>
+              <a:round/>
+            </a:ln>
+          </p:spPr>
+          <p:txBody>
+            <a:bodyPr/>
+            <a:lstStyle/>
+            <a:p/>
+          </p:txBody>
+        </p:sp>
+        <p:sp>
+          <p:nvSpPr>
+            <p:cNvPr id="77" name="pl77"/>
+            <p:cNvSpPr/>
+            <p:nvPr/>
+          </p:nvSpPr>
+          <p:spPr>
+            <a:xfrm>
+              <a:off x="3124839" y="4336484"/>
+              <a:ext cx="0" cy="1317069"/>
+            </a:xfrm>
+            <a:custGeom>
+              <a:avLst/>
+              <a:pathLst>
+                <a:path w="0" h="1317069">
+                  <a:moveTo>
+                    <a:pt x="0" y="1317069"/>
+                  </a:moveTo>
+                  <a:lnTo>
+                    <a:pt x="0" y="0"/>
+                  </a:lnTo>
+                  <a:lnTo>
+                    <a:pt x="0" y="0"/>
+                  </a:lnTo>
+                </a:path>
+              </a:pathLst>
+            </a:custGeom>
+            <a:ln w="13550" cap="flat">
+              <a:solidFill>
+                <a:srgbClr val="4682B4">
+                  <a:alpha val="69803"/>
+                </a:srgbClr>
+              </a:solidFill>
+              <a:prstDash val="dash"/>
+              <a:round/>
+            </a:ln>
+          </p:spPr>
+          <p:txBody>
+            <a:bodyPr/>
+            <a:lstStyle/>
+            <a:p/>
+          </p:txBody>
+        </p:sp>
+        <p:sp>
+          <p:nvSpPr>
+            <p:cNvPr id="78" name="pl78"/>
+            <p:cNvSpPr/>
+            <p:nvPr/>
+          </p:nvSpPr>
+          <p:spPr>
+            <a:xfrm>
+              <a:off x="5508592" y="4336484"/>
+              <a:ext cx="0" cy="1317069"/>
+            </a:xfrm>
+            <a:custGeom>
+              <a:avLst/>
+              <a:pathLst>
+                <a:path w="0" h="1317069">
+                  <a:moveTo>
+                    <a:pt x="0" y="1317069"/>
+                  </a:moveTo>
+                  <a:lnTo>
+                    <a:pt x="0" y="0"/>
+                  </a:lnTo>
+                  <a:lnTo>
+                    <a:pt x="0" y="0"/>
+                  </a:lnTo>
+                </a:path>
+              </a:pathLst>
+            </a:custGeom>
+            <a:ln w="13550" cap="flat">
+              <a:solidFill>
+                <a:srgbClr val="4682B4">
+                  <a:alpha val="69803"/>
+                </a:srgbClr>
+              </a:solidFill>
+              <a:prstDash val="dash"/>
+              <a:round/>
+            </a:ln>
+          </p:spPr>
+          <p:txBody>
+            <a:bodyPr/>
+            <a:lstStyle/>
+            <a:p/>
+          </p:txBody>
+        </p:sp>
+        <p:sp>
+          <p:nvSpPr>
+            <p:cNvPr id="79" name="tx79"/>
+            <p:cNvSpPr/>
+            <p:nvPr/>
+          </p:nvSpPr>
+          <p:spPr>
+            <a:xfrm>
+              <a:off x="762297" y="5553636"/>
+              <a:ext cx="62179" cy="80101"/>
+            </a:xfrm>
+            <a:prstGeom prst="rect">
+              <a:avLst/>
+            </a:prstGeom>
+            <a:noFill/>
+          </p:spPr>
+          <p:txBody>
+            <a:bodyPr lIns="0" rIns="0" tIns="0" bIns="0" anchorCtr="1" anchor="ctr" wrap="none"/>
+            <a:lstStyle/>
+            <a:p>
+              <a:pPr algn="l" marL="0" marR="0" indent="0">
+                <a:lnSpc>
+                  <a:spcPts val="880"/>
+                </a:lnSpc>
+                <a:spcBef>
+                  <a:spcPts val="0"/>
+                </a:spcBef>
+                <a:spcAft>
+                  <a:spcPts val="0"/>
+                </a:spcAft>
+              </a:pPr>
+              <a:r>
+                <a:rPr sz="880">
+                  <a:solidFill>
+                    <a:srgbClr val="4D4D4D">
+                      <a:alpha val="100000"/>
+                    </a:srgbClr>
+                  </a:solidFill>
+                  <a:latin typeface="Helvetica"/>
+                  <a:cs typeface="Helvetica"/>
+                </a:rPr>
+                <a:t>0</a:t>
+              </a:r>
+            </a:p>
+          </p:txBody>
+        </p:sp>
+        <p:sp>
+          <p:nvSpPr>
+            <p:cNvPr id="80" name="tx80"/>
+            <p:cNvSpPr/>
+            <p:nvPr/>
+          </p:nvSpPr>
+          <p:spPr>
+            <a:xfrm>
+              <a:off x="762297" y="5254302"/>
+              <a:ext cx="62179" cy="80101"/>
+            </a:xfrm>
+            <a:prstGeom prst="rect">
+              <a:avLst/>
+            </a:prstGeom>
+            <a:noFill/>
+          </p:spPr>
+          <p:txBody>
+            <a:bodyPr lIns="0" rIns="0" tIns="0" bIns="0" anchorCtr="1" anchor="ctr" wrap="none"/>
+            <a:lstStyle/>
+            <a:p>
+              <a:pPr algn="l" marL="0" marR="0" indent="0">
+                <a:lnSpc>
+                  <a:spcPts val="880"/>
+                </a:lnSpc>
+                <a:spcBef>
+                  <a:spcPts val="0"/>
+                </a:spcBef>
+                <a:spcAft>
+                  <a:spcPts val="0"/>
+                </a:spcAft>
+              </a:pPr>
+              <a:r>
+                <a:rPr sz="880">
+                  <a:solidFill>
+                    <a:srgbClr val="4D4D4D">
+                      <a:alpha val="100000"/>
+                    </a:srgbClr>
+                  </a:solidFill>
+                  <a:latin typeface="Helvetica"/>
+                  <a:cs typeface="Helvetica"/>
+                </a:rPr>
+                <a:t>1</a:t>
+              </a:r>
+            </a:p>
+          </p:txBody>
+        </p:sp>
+        <p:sp>
+          <p:nvSpPr>
+            <p:cNvPr id="81" name="tx81"/>
+            <p:cNvSpPr/>
+            <p:nvPr/>
+          </p:nvSpPr>
+          <p:spPr>
+            <a:xfrm>
+              <a:off x="762297" y="4954968"/>
+              <a:ext cx="62179" cy="80101"/>
+            </a:xfrm>
+            <a:prstGeom prst="rect">
+              <a:avLst/>
+            </a:prstGeom>
+            <a:noFill/>
+          </p:spPr>
+          <p:txBody>
+            <a:bodyPr lIns="0" rIns="0" tIns="0" bIns="0" anchorCtr="1" anchor="ctr" wrap="none"/>
+            <a:lstStyle/>
+            <a:p>
+              <a:pPr algn="l" marL="0" marR="0" indent="0">
+                <a:lnSpc>
+                  <a:spcPts val="880"/>
+                </a:lnSpc>
+                <a:spcBef>
+                  <a:spcPts val="0"/>
+                </a:spcBef>
+                <a:spcAft>
+                  <a:spcPts val="0"/>
+                </a:spcAft>
+              </a:pPr>
+              <a:r>
+                <a:rPr sz="880">
+                  <a:solidFill>
+                    <a:srgbClr val="4D4D4D">
+                      <a:alpha val="100000"/>
+                    </a:srgbClr>
+                  </a:solidFill>
+                  <a:latin typeface="Helvetica"/>
+                  <a:cs typeface="Helvetica"/>
+                </a:rPr>
+                <a:t>2</a:t>
+              </a:r>
+            </a:p>
+          </p:txBody>
+        </p:sp>
+        <p:sp>
+          <p:nvSpPr>
+            <p:cNvPr id="82" name="tx82"/>
+            <p:cNvSpPr/>
+            <p:nvPr/>
+          </p:nvSpPr>
+          <p:spPr>
+            <a:xfrm>
+              <a:off x="762297" y="4655634"/>
+              <a:ext cx="62179" cy="80101"/>
+            </a:xfrm>
+            <a:prstGeom prst="rect">
+              <a:avLst/>
+            </a:prstGeom>
+            <a:noFill/>
+          </p:spPr>
+          <p:txBody>
+            <a:bodyPr lIns="0" rIns="0" tIns="0" bIns="0" anchorCtr="1" anchor="ctr" wrap="none"/>
+            <a:lstStyle/>
+            <a:p>
+              <a:pPr algn="l" marL="0" marR="0" indent="0">
+                <a:lnSpc>
+                  <a:spcPts val="880"/>
+                </a:lnSpc>
+                <a:spcBef>
+                  <a:spcPts val="0"/>
+                </a:spcBef>
+                <a:spcAft>
+                  <a:spcPts val="0"/>
+                </a:spcAft>
+              </a:pPr>
+              <a:r>
+                <a:rPr sz="880">
+                  <a:solidFill>
+                    <a:srgbClr val="4D4D4D">
+                      <a:alpha val="100000"/>
+                    </a:srgbClr>
+                  </a:solidFill>
+                  <a:latin typeface="Helvetica"/>
+                  <a:cs typeface="Helvetica"/>
+                </a:rPr>
+                <a:t>3</a:t>
+              </a:r>
+            </a:p>
+          </p:txBody>
+        </p:sp>
+        <p:sp>
+          <p:nvSpPr>
+            <p:cNvPr id="83" name="tx83"/>
+            <p:cNvSpPr/>
+            <p:nvPr/>
+          </p:nvSpPr>
+          <p:spPr>
+            <a:xfrm>
+              <a:off x="762297" y="4356300"/>
+              <a:ext cx="62179" cy="80101"/>
+            </a:xfrm>
+            <a:prstGeom prst="rect">
+              <a:avLst/>
+            </a:prstGeom>
+            <a:noFill/>
+          </p:spPr>
+          <p:txBody>
+            <a:bodyPr lIns="0" rIns="0" tIns="0" bIns="0" anchorCtr="1" anchor="ctr" wrap="none"/>
+            <a:lstStyle/>
+            <a:p>
+              <a:pPr algn="l" marL="0" marR="0" indent="0">
+                <a:lnSpc>
+                  <a:spcPts val="880"/>
+                </a:lnSpc>
+                <a:spcBef>
+                  <a:spcPts val="0"/>
+                </a:spcBef>
+                <a:spcAft>
+                  <a:spcPts val="0"/>
+                </a:spcAft>
+              </a:pPr>
+              <a:r>
+                <a:rPr sz="880">
+                  <a:solidFill>
+                    <a:srgbClr val="4D4D4D">
+                      <a:alpha val="100000"/>
+                    </a:srgbClr>
+                  </a:solidFill>
+                  <a:latin typeface="Helvetica"/>
+                  <a:cs typeface="Helvetica"/>
+                </a:rPr>
+                <a:t>4</a:t>
+              </a:r>
+            </a:p>
+          </p:txBody>
+        </p:sp>
+        <p:sp>
+          <p:nvSpPr>
+            <p:cNvPr id="84" name="tx84"/>
+            <p:cNvSpPr/>
+            <p:nvPr/>
+          </p:nvSpPr>
+          <p:spPr>
+            <a:xfrm>
+              <a:off x="1346003" y="5716183"/>
+              <a:ext cx="161574" cy="80101"/>
+            </a:xfrm>
+            <a:prstGeom prst="rect">
+              <a:avLst/>
+            </a:prstGeom>
+            <a:noFill/>
+          </p:spPr>
+          <p:txBody>
+            <a:bodyPr lIns="0" rIns="0" tIns="0" bIns="0" anchorCtr="1" anchor="ctr" wrap="none"/>
+            <a:lstStyle/>
+            <a:p>
+              <a:pPr algn="l" marL="0" marR="0" indent="0">
+                <a:lnSpc>
+                  <a:spcPts val="880"/>
+                </a:lnSpc>
+                <a:spcBef>
+                  <a:spcPts val="0"/>
+                </a:spcBef>
+                <a:spcAft>
+                  <a:spcPts val="0"/>
+                </a:spcAft>
+              </a:pPr>
+              <a:r>
+                <a:rPr sz="880">
+                  <a:solidFill>
+                    <a:srgbClr val="4D4D4D">
+                      <a:alpha val="100000"/>
+                    </a:srgbClr>
+                  </a:solidFill>
+                  <a:latin typeface="Helvetica"/>
+                  <a:cs typeface="Helvetica"/>
+                </a:rPr>
+                <a:t>-50</a:t>
+              </a:r>
+            </a:p>
+          </p:txBody>
+        </p:sp>
+        <p:sp>
+          <p:nvSpPr>
+            <p:cNvPr id="85" name="tx85"/>
+            <p:cNvSpPr/>
+            <p:nvPr/>
+          </p:nvSpPr>
+          <p:spPr>
+            <a:xfrm>
+              <a:off x="2196512" y="5716183"/>
+              <a:ext cx="161574" cy="80101"/>
+            </a:xfrm>
+            <a:prstGeom prst="rect">
+              <a:avLst/>
+            </a:prstGeom>
+            <a:noFill/>
+          </p:spPr>
+          <p:txBody>
+            <a:bodyPr lIns="0" rIns="0" tIns="0" bIns="0" anchorCtr="1" anchor="ctr" wrap="none"/>
+            <a:lstStyle/>
+            <a:p>
+              <a:pPr algn="l" marL="0" marR="0" indent="0">
+                <a:lnSpc>
+                  <a:spcPts val="880"/>
+                </a:lnSpc>
+                <a:spcBef>
+                  <a:spcPts val="0"/>
+                </a:spcBef>
+                <a:spcAft>
+                  <a:spcPts val="0"/>
+                </a:spcAft>
+              </a:pPr>
+              <a:r>
+                <a:rPr sz="880">
+                  <a:solidFill>
+                    <a:srgbClr val="4D4D4D">
+                      <a:alpha val="100000"/>
+                    </a:srgbClr>
+                  </a:solidFill>
+                  <a:latin typeface="Helvetica"/>
+                  <a:cs typeface="Helvetica"/>
+                </a:rPr>
+                <a:t>-40</a:t>
+              </a:r>
+            </a:p>
+          </p:txBody>
+        </p:sp>
+        <p:sp>
+          <p:nvSpPr>
+            <p:cNvPr id="86" name="tx86"/>
+            <p:cNvSpPr/>
+            <p:nvPr/>
+          </p:nvSpPr>
+          <p:spPr>
+            <a:xfrm>
+              <a:off x="3047022" y="5716183"/>
+              <a:ext cx="161574" cy="80101"/>
+            </a:xfrm>
+            <a:prstGeom prst="rect">
+              <a:avLst/>
+            </a:prstGeom>
+            <a:noFill/>
+          </p:spPr>
+          <p:txBody>
+            <a:bodyPr lIns="0" rIns="0" tIns="0" bIns="0" anchorCtr="1" anchor="ctr" wrap="none"/>
+            <a:lstStyle/>
+            <a:p>
+              <a:pPr algn="l" marL="0" marR="0" indent="0">
+                <a:lnSpc>
+                  <a:spcPts val="880"/>
+                </a:lnSpc>
+                <a:spcBef>
+                  <a:spcPts val="0"/>
+                </a:spcBef>
+                <a:spcAft>
+                  <a:spcPts val="0"/>
+                </a:spcAft>
+              </a:pPr>
+              <a:r>
+                <a:rPr sz="880">
+                  <a:solidFill>
+                    <a:srgbClr val="4D4D4D">
+                      <a:alpha val="100000"/>
+                    </a:srgbClr>
+                  </a:solidFill>
+                  <a:latin typeface="Helvetica"/>
+                  <a:cs typeface="Helvetica"/>
+                </a:rPr>
+                <a:t>-30</a:t>
+              </a:r>
+            </a:p>
+          </p:txBody>
+        </p:sp>
+        <p:sp>
+          <p:nvSpPr>
+            <p:cNvPr id="87" name="tx87"/>
+            <p:cNvSpPr/>
+            <p:nvPr/>
+          </p:nvSpPr>
+          <p:spPr>
+            <a:xfrm>
+              <a:off x="3897531" y="5716183"/>
+              <a:ext cx="161574" cy="80101"/>
+            </a:xfrm>
+            <a:prstGeom prst="rect">
+              <a:avLst/>
+            </a:prstGeom>
+            <a:noFill/>
+          </p:spPr>
+          <p:txBody>
+            <a:bodyPr lIns="0" rIns="0" tIns="0" bIns="0" anchorCtr="1" anchor="ctr" wrap="none"/>
+            <a:lstStyle/>
+            <a:p>
+              <a:pPr algn="l" marL="0" marR="0" indent="0">
+                <a:lnSpc>
+                  <a:spcPts val="880"/>
+                </a:lnSpc>
+                <a:spcBef>
+                  <a:spcPts val="0"/>
+                </a:spcBef>
+                <a:spcAft>
+                  <a:spcPts val="0"/>
+                </a:spcAft>
+              </a:pPr>
+              <a:r>
+                <a:rPr sz="880">
+                  <a:solidFill>
+                    <a:srgbClr val="4D4D4D">
+                      <a:alpha val="100000"/>
+                    </a:srgbClr>
+                  </a:solidFill>
+                  <a:latin typeface="Helvetica"/>
+                  <a:cs typeface="Helvetica"/>
+                </a:rPr>
+                <a:t>-20</a:t>
+              </a:r>
+            </a:p>
+          </p:txBody>
+        </p:sp>
+        <p:sp>
+          <p:nvSpPr>
+            <p:cNvPr id="88" name="tx88"/>
+            <p:cNvSpPr/>
+            <p:nvPr/>
+          </p:nvSpPr>
+          <p:spPr>
+            <a:xfrm>
+              <a:off x="4748041" y="5716183"/>
+              <a:ext cx="161574" cy="80101"/>
+            </a:xfrm>
+            <a:prstGeom prst="rect">
+              <a:avLst/>
+            </a:prstGeom>
+            <a:noFill/>
+          </p:spPr>
+          <p:txBody>
+            <a:bodyPr lIns="0" rIns="0" tIns="0" bIns="0" anchorCtr="1" anchor="ctr" wrap="none"/>
+            <a:lstStyle/>
+            <a:p>
+              <a:pPr algn="l" marL="0" marR="0" indent="0">
+                <a:lnSpc>
+                  <a:spcPts val="880"/>
+                </a:lnSpc>
+                <a:spcBef>
+                  <a:spcPts val="0"/>
+                </a:spcBef>
+                <a:spcAft>
+                  <a:spcPts val="0"/>
+                </a:spcAft>
+              </a:pPr>
+              <a:r>
+                <a:rPr sz="880">
+                  <a:solidFill>
+                    <a:srgbClr val="4D4D4D">
+                      <a:alpha val="100000"/>
+                    </a:srgbClr>
+                  </a:solidFill>
+                  <a:latin typeface="Helvetica"/>
+                  <a:cs typeface="Helvetica"/>
+                </a:rPr>
+                <a:t>-10</a:t>
+              </a:r>
+            </a:p>
+          </p:txBody>
+        </p:sp>
+        <p:sp>
+          <p:nvSpPr>
+            <p:cNvPr id="89" name="tx89"/>
+            <p:cNvSpPr/>
+            <p:nvPr/>
+          </p:nvSpPr>
+          <p:spPr>
+            <a:xfrm>
+              <a:off x="5648248" y="5716183"/>
+              <a:ext cx="62179" cy="80101"/>
+            </a:xfrm>
+            <a:prstGeom prst="rect">
+              <a:avLst/>
+            </a:prstGeom>
+            <a:noFill/>
+          </p:spPr>
+          <p:txBody>
+            <a:bodyPr lIns="0" rIns="0" tIns="0" bIns="0" anchorCtr="1" anchor="ctr" wrap="none"/>
+            <a:lstStyle/>
+            <a:p>
+              <a:pPr algn="l" marL="0" marR="0" indent="0">
+                <a:lnSpc>
+                  <a:spcPts val="880"/>
+                </a:lnSpc>
+                <a:spcBef>
+                  <a:spcPts val="0"/>
+                </a:spcBef>
+                <a:spcAft>
+                  <a:spcPts val="0"/>
+                </a:spcAft>
+              </a:pPr>
+              <a:r>
+                <a:rPr sz="880">
+                  <a:solidFill>
+                    <a:srgbClr val="4D4D4D">
+                      <a:alpha val="100000"/>
+                    </a:srgbClr>
+                  </a:solidFill>
+                  <a:latin typeface="Helvetica"/>
+                  <a:cs typeface="Helvetica"/>
+                </a:rPr>
+                <a:t>0</a:t>
+              </a:r>
+            </a:p>
+          </p:txBody>
+        </p:sp>
+        <p:sp>
+          <p:nvSpPr>
+            <p:cNvPr id="90" name="tx90"/>
+            <p:cNvSpPr/>
+            <p:nvPr/>
+          </p:nvSpPr>
+          <p:spPr>
+            <a:xfrm>
+              <a:off x="6467667" y="5716183"/>
+              <a:ext cx="124358" cy="80101"/>
+            </a:xfrm>
+            <a:prstGeom prst="rect">
+              <a:avLst/>
+            </a:prstGeom>
+            <a:noFill/>
+          </p:spPr>
+          <p:txBody>
+            <a:bodyPr lIns="0" rIns="0" tIns="0" bIns="0" anchorCtr="1" anchor="ctr" wrap="none"/>
+            <a:lstStyle/>
+            <a:p>
+              <a:pPr algn="l" marL="0" marR="0" indent="0">
+                <a:lnSpc>
+                  <a:spcPts val="880"/>
+                </a:lnSpc>
+                <a:spcBef>
+                  <a:spcPts val="0"/>
+                </a:spcBef>
+                <a:spcAft>
+                  <a:spcPts val="0"/>
+                </a:spcAft>
+              </a:pPr>
+              <a:r>
+                <a:rPr sz="880">
+                  <a:solidFill>
+                    <a:srgbClr val="4D4D4D">
+                      <a:alpha val="100000"/>
+                    </a:srgbClr>
+                  </a:solidFill>
+                  <a:latin typeface="Helvetica"/>
+                  <a:cs typeface="Helvetica"/>
+                </a:rPr>
+                <a:t>10</a:t>
+              </a:r>
+            </a:p>
+          </p:txBody>
+        </p:sp>
+        <p:sp>
+          <p:nvSpPr>
+            <p:cNvPr id="91" name="tx91"/>
+            <p:cNvSpPr/>
+            <p:nvPr/>
+          </p:nvSpPr>
+          <p:spPr>
+            <a:xfrm>
+              <a:off x="7318177" y="5716183"/>
+              <a:ext cx="124358" cy="80101"/>
+            </a:xfrm>
+            <a:prstGeom prst="rect">
+              <a:avLst/>
+            </a:prstGeom>
+            <a:noFill/>
+          </p:spPr>
+          <p:txBody>
+            <a:bodyPr lIns="0" rIns="0" tIns="0" bIns="0" anchorCtr="1" anchor="ctr" wrap="none"/>
+            <a:lstStyle/>
+            <a:p>
+              <a:pPr algn="l" marL="0" marR="0" indent="0">
+                <a:lnSpc>
+                  <a:spcPts val="880"/>
+                </a:lnSpc>
+                <a:spcBef>
+                  <a:spcPts val="0"/>
+                </a:spcBef>
+                <a:spcAft>
+                  <a:spcPts val="0"/>
+                </a:spcAft>
+              </a:pPr>
+              <a:r>
+                <a:rPr sz="880">
+                  <a:solidFill>
+                    <a:srgbClr val="4D4D4D">
+                      <a:alpha val="100000"/>
+                    </a:srgbClr>
+                  </a:solidFill>
+                  <a:latin typeface="Helvetica"/>
+                  <a:cs typeface="Helvetica"/>
+                </a:rPr>
+                <a:t>20</a:t>
+              </a:r>
+            </a:p>
+          </p:txBody>
+        </p:sp>
+        <p:sp>
+          <p:nvSpPr>
+            <p:cNvPr id="92" name="tx92"/>
+            <p:cNvSpPr/>
+            <p:nvPr/>
+          </p:nvSpPr>
+          <p:spPr>
+            <a:xfrm>
+              <a:off x="8168686" y="5716183"/>
+              <a:ext cx="124358" cy="80101"/>
+            </a:xfrm>
+            <a:prstGeom prst="rect">
+              <a:avLst/>
+            </a:prstGeom>
+            <a:noFill/>
+          </p:spPr>
+          <p:txBody>
+            <a:bodyPr lIns="0" rIns="0" tIns="0" bIns="0" anchorCtr="1" anchor="ctr" wrap="none"/>
+            <a:lstStyle/>
+            <a:p>
+              <a:pPr algn="l" marL="0" marR="0" indent="0">
+                <a:lnSpc>
+                  <a:spcPts val="880"/>
+                </a:lnSpc>
+                <a:spcBef>
+                  <a:spcPts val="0"/>
+                </a:spcBef>
+                <a:spcAft>
+                  <a:spcPts val="0"/>
+                </a:spcAft>
+              </a:pPr>
+              <a:r>
+                <a:rPr sz="880">
+                  <a:solidFill>
+                    <a:srgbClr val="4D4D4D">
+                      <a:alpha val="100000"/>
+                    </a:srgbClr>
+                  </a:solidFill>
+                  <a:latin typeface="Helvetica"/>
+                  <a:cs typeface="Helvetica"/>
+                </a:rPr>
+                <a:t>30</a:t>
+              </a:r>
+            </a:p>
+          </p:txBody>
+        </p:sp>
+        <p:sp>
+          <p:nvSpPr>
+            <p:cNvPr id="93" name="tx93"/>
+            <p:cNvSpPr/>
+            <p:nvPr/>
+          </p:nvSpPr>
+          <p:spPr>
+            <a:xfrm>
+              <a:off x="1561815" y="5855859"/>
+              <a:ext cx="6311097" cy="100218"/>
+            </a:xfrm>
+            <a:prstGeom prst="rect">
+              <a:avLst/>
+            </a:prstGeom>
+            <a:noFill/>
+          </p:spPr>
+          <p:txBody>
+            <a:bodyPr lIns="0" rIns="0" tIns="0" bIns="0" anchorCtr="1" anchor="ctr" wrap="none"/>
+            <a:lstStyle/>
+            <a:p>
+              <a:pPr algn="l" marL="0" marR="0" indent="0">
+                <a:lnSpc>
+                  <a:spcPts val="1100"/>
+                </a:lnSpc>
+                <a:spcBef>
+                  <a:spcPts val="0"/>
+                </a:spcBef>
+                <a:spcAft>
+                  <a:spcPts val="0"/>
+                </a:spcAft>
+              </a:pPr>
+              <a:r>
+                <a:rPr sz="1100">
+                  <a:solidFill>
+                    <a:srgbClr val="000000">
+                      <a:alpha val="100000"/>
+                    </a:srgbClr>
+                  </a:solidFill>
+                  <a:latin typeface="Helvetica"/>
+                  <a:cs typeface="Helvetica"/>
+                </a:rPr>
+                <a:t>Sensitivity eGFR Difference (%): 100 × (CKD-EPI 2012 CysC − CKD-EPI 2021 Cr) / CKD-EPI 2021 Cr</a:t>
+              </a:r>
+            </a:p>
+          </p:txBody>
+        </p:sp>
+        <p:sp>
+          <p:nvSpPr>
+            <p:cNvPr id="94" name="tx94"/>
+            <p:cNvSpPr/>
+            <p:nvPr/>
+          </p:nvSpPr>
+          <p:spPr>
+            <a:xfrm rot="-5400000">
+              <a:off x="138035" y="4944909"/>
+              <a:ext cx="1016904" cy="100218"/>
+            </a:xfrm>
+            <a:prstGeom prst="rect">
+              <a:avLst/>
+            </a:prstGeom>
+            <a:noFill/>
+          </p:spPr>
+          <p:txBody>
+            <a:bodyPr lIns="0" rIns="0" tIns="0" bIns="0" anchorCtr="1" anchor="ctr" wrap="none"/>
+            <a:lstStyle/>
+            <a:p>
+              <a:pPr algn="l" marL="0" marR="0" indent="0">
+                <a:lnSpc>
+                  <a:spcPts val="1100"/>
+                </a:lnSpc>
+                <a:spcBef>
+                  <a:spcPts val="0"/>
+                </a:spcBef>
+                <a:spcAft>
+                  <a:spcPts val="0"/>
+                </a:spcAft>
+              </a:pPr>
+              <a:r>
+                <a:rPr sz="1100">
+                  <a:solidFill>
+                    <a:srgbClr val="000000">
+                      <a:alpha val="100000"/>
+                    </a:srgbClr>
+                  </a:solidFill>
+                  <a:latin typeface="Helvetica"/>
+                  <a:cs typeface="Helvetica"/>
+                </a:rPr>
+                <a:t>subHR (95% CI)</a:t>
+              </a:r>
+            </a:p>
+          </p:txBody>
+        </p:sp>
+        <p:sp>
+          <p:nvSpPr>
+            <p:cNvPr id="95" name="tx95"/>
+            <p:cNvSpPr/>
+            <p:nvPr/>
+          </p:nvSpPr>
+          <p:spPr>
+            <a:xfrm>
+              <a:off x="887106" y="4159544"/>
+              <a:ext cx="6959864" cy="82021"/>
+            </a:xfrm>
+            <a:prstGeom prst="rect">
+              <a:avLst/>
+            </a:prstGeom>
+            <a:noFill/>
+          </p:spPr>
+          <p:txBody>
+            <a:bodyPr lIns="0" rIns="0" tIns="0" bIns="0" anchorCtr="1" anchor="ctr" wrap="none"/>
+            <a:lstStyle/>
+            <a:p>
+              <a:pPr algn="l" marL="0" marR="0" indent="0">
+                <a:lnSpc>
+                  <a:spcPts val="900"/>
+                </a:lnSpc>
+                <a:spcBef>
+                  <a:spcPts val="0"/>
+                </a:spcBef>
+                <a:spcAft>
+                  <a:spcPts val="0"/>
+                </a:spcAft>
+              </a:pPr>
+              <a:r>
+                <a:rPr sz="900">
+                  <a:solidFill>
+                    <a:srgbClr val="404040">
+                      <a:alpha val="100000"/>
+                    </a:srgbClr>
+                  </a:solidFill>
+                  <a:latin typeface="Helvetica"/>
+                  <a:cs typeface="Helvetica"/>
+                </a:rPr>
+                <a:t>subHR per 10 % decline: 1.26 (1.08-1.48), p_Bonf = 0.020 (n = 6)  |  per IQR decline (Δ = 28.0 %): 1.92 (1.24-2.98)  |  IQR: [-30.0, -2.0] %</a:t>
+              </a:r>
+            </a:p>
+          </p:txBody>
+        </p:sp>
+        <p:sp>
+          <p:nvSpPr>
+            <p:cNvPr id="96" name="tx96"/>
+            <p:cNvSpPr/>
+            <p:nvPr/>
+          </p:nvSpPr>
+          <p:spPr>
+            <a:xfrm>
+              <a:off x="887106" y="3932770"/>
               <a:ext cx="3081985" cy="120152"/>
             </a:xfrm>
             <a:prstGeom prst="rect">
